--- a/skills/ppt-report-style/assets/example-slide.pptx
+++ b/skills/ppt-report-style/assets/example-slide.pptx
@@ -692,7 +692,27 @@
           <a:lstStyle/>
           <a:p>
             <a:r>
-              <a:t>【示例页】仅用于演示版式，不是真实内容。讲稿结构：导语 → 三条实证 → 一句判断 → 结论条。</a:t>
+              <a:t>【示例页 · 讲稿模板】</a:t>
+            </a:r>
+          </a:p>
+          <a:p>
+            <a:r>
+              <a:t>本页只是版式示例，所有数值都是虚构占位数据，不要当作真实结论引用。</a:t>
+            </a:r>
+          </a:p>
+          <a:p>
+            <a:r>
+              <a:t>讲解时按这个节奏走：先用一句话导语说明这一页要回答什么问题；再逐条讲三条实证，每条都是"指标名 + 数值 + 口径"写在同一句里；然后用一句判断收束，把数字背后的含义说清楚；最后用底部结论条点出证据强弱与边界。</a:t>
+            </a:r>
+          </a:p>
+          <a:p>
+            <a:r>
+              <a:t>如果换成真实数据，来源、统计口径、发布时间一律写进备注，不要放到版面上。</a:t>
+            </a:r>
+          </a:p>
+          <a:p>
+            <a:r>
+              <a:t>按这个节奏讲完大约需要一分钟。</a:t>
             </a:r>
           </a:p>
         </p:txBody>
@@ -762,7 +782,27 @@
           <a:lstStyle/>
           <a:p>
             <a:r>
-              <a:t>【表格示例页】演示强数据用表格的样式：表头深色、交替行底纹、关键数值主题色。</a:t>
+              <a:t>【表格示例页 · 讲稿模板】</a:t>
+            </a:r>
+          </a:p>
+          <a:p>
+            <a:r>
+              <a:t>本页演示"强数据用表格"的样式：表头用主题色底白字，数值列用主题色，正文用黑色，交替行加浅底。</a:t>
+            </a:r>
+          </a:p>
+          <a:p>
+            <a:r>
+              <a:t>讲的时候不要逐格念表，而是先说这张表回答什么问题、结论是什么，再点出两三个关键数字的变化。</a:t>
+            </a:r>
+          </a:p>
+          <a:p>
+            <a:r>
+              <a:t>如果这个表格承载的是需要逐项核对的内容，就把口径与来源写进备注，必要时附一句"该列数据截至某年某月"。</a:t>
+            </a:r>
+          </a:p>
+          <a:p>
+            <a:r>
+              <a:t>表格页通常比图示页快，一分钟左右讲完。</a:t>
             </a:r>
           </a:p>
         </p:txBody>
@@ -5484,7 +5524,7 @@
                           <a:ea typeface="黑体"/>
                           <a:cs typeface="黑体"/>
                         </a:rPr>
-                        <a:t>−3.7</a:t>
+                        <a:t>-3.7</a:t>
                       </a:r>
                     </a:p>
                   </a:txBody>

--- a/skills/ppt-report-style/assets/example-slide.pptx
+++ b/skills/ppt-report-style/assets/example-slide.pptx
@@ -186,9 +186,9 @@
                   <a:solidFill>
                     <a:srgbClr val="283E4E"/>
                   </a:solidFill>
-                  <a:latin typeface="黑体"/>
-                  <a:ea typeface="黑体"/>
-                  <a:cs typeface="黑体"/>
+                  <a:latin typeface="Arial"/>
+                  <a:ea typeface="宋体"/>
+                  <a:cs typeface="宋体"/>
                 </a:defRPr>
               </a:pPr>
             </a:p>
@@ -232,7 +232,7 @@
                 <a:solidFill>
                   <a:srgbClr val="000000"/>
                 </a:solidFill>
-                <a:latin typeface="宋体"/>
+                <a:latin typeface="Arial"/>
                 <a:ea typeface="宋体"/>
                 <a:cs typeface="宋体"/>
               </a:defRPr>
@@ -283,7 +283,7 @@
           <a:solidFill>
             <a:srgbClr val="000000"/>
           </a:solidFill>
-          <a:latin typeface="宋体"/>
+          <a:latin typeface="Arial"/>
           <a:ea typeface="宋体"/>
           <a:cs typeface="宋体"/>
         </a:defRPr>
@@ -3816,8 +3816,8 @@
         </p:nvSpPr>
         <p:spPr>
           <a:xfrm>
-            <a:off x="5852160" y="237744"/>
-            <a:ext cx="5577840" cy="256032"/>
+            <a:off x="5852160" y="219456"/>
+            <a:ext cx="5577840" cy="310896"/>
           </a:xfrm>
           <a:prstGeom prst="rect">
             <a:avLst/>
@@ -3840,7 +3840,7 @@
                 <a:solidFill>
                   <a:srgbClr val="000000"/>
                 </a:solidFill>
-                <a:latin typeface="宋体"/>
+                <a:latin typeface="Times New Roman"/>
                 <a:ea typeface="宋体"/>
                 <a:cs typeface="宋体"/>
               </a:rPr>
@@ -3857,8 +3857,8 @@
         </p:nvSpPr>
         <p:spPr>
           <a:xfrm>
-            <a:off x="11521440" y="237744"/>
-            <a:ext cx="832104" cy="256032"/>
+            <a:off x="11521440" y="219456"/>
+            <a:ext cx="832104" cy="310896"/>
           </a:xfrm>
           <a:prstGeom prst="rect">
             <a:avLst/>
@@ -3881,7 +3881,7 @@
                 <a:solidFill>
                   <a:srgbClr val="283E4E"/>
                 </a:solidFill>
-                <a:latin typeface="黑体"/>
+                <a:latin typeface="Arial"/>
                 <a:ea typeface="黑体"/>
                 <a:cs typeface="黑体"/>
               </a:rPr>
@@ -3898,8 +3898,8 @@
         </p:nvSpPr>
         <p:spPr>
           <a:xfrm>
-            <a:off x="502920" y="566928"/>
-            <a:ext cx="11850624" cy="475488"/>
+            <a:off x="502920" y="530352"/>
+            <a:ext cx="11850624" cy="603504"/>
           </a:xfrm>
           <a:prstGeom prst="rect">
             <a:avLst/>
@@ -3918,11 +3918,11 @@
               </a:lnSpc>
             </a:pPr>
             <a:r>
-              <a:rPr sz="2500">
+              <a:rPr sz="3000">
                 <a:solidFill>
                   <a:srgbClr val="283E4E"/>
                 </a:solidFill>
-                <a:latin typeface="黑体"/>
+                <a:latin typeface="Arial"/>
                 <a:ea typeface="黑体"/>
                 <a:cs typeface="黑体"/>
               </a:rPr>
@@ -3939,8 +3939,8 @@
         </p:nvSpPr>
         <p:spPr>
           <a:xfrm>
-            <a:off x="502920" y="1078992"/>
-            <a:ext cx="11850624" cy="274320"/>
+            <a:off x="502920" y="1152144"/>
+            <a:ext cx="11850624" cy="329184"/>
           </a:xfrm>
           <a:prstGeom prst="rect">
             <a:avLst/>
@@ -3959,11 +3959,11 @@
               </a:lnSpc>
             </a:pPr>
             <a:r>
-              <a:rPr sz="1600">
+              <a:rPr sz="2000">
                 <a:solidFill>
                   <a:srgbClr val="000000"/>
                 </a:solidFill>
-                <a:latin typeface="宋体"/>
+                <a:latin typeface="Times New Roman"/>
                 <a:ea typeface="宋体"/>
                 <a:cs typeface="宋体"/>
               </a:rPr>
@@ -3980,7 +3980,7 @@
         </p:nvSpPr>
         <p:spPr>
           <a:xfrm>
-            <a:off x="502920" y="1481328"/>
+            <a:off x="502920" y="1554480"/>
             <a:ext cx="11850624" cy="10972"/>
           </a:xfrm>
           <a:prstGeom prst="rect">
@@ -4022,447 +4022,7 @@
         </p:nvSpPr>
         <p:spPr>
           <a:xfrm>
-            <a:off x="502920" y="1591056"/>
-            <a:ext cx="6492240" cy="868680"/>
-          </a:xfrm>
-          <a:prstGeom prst="rect">
-            <a:avLst/>
-          </a:prstGeom>
-          <a:solidFill>
-            <a:srgbClr val="F1F5F8"/>
-          </a:solidFill>
-          <a:ln>
-            <a:noFill/>
-          </a:ln>
-          <a:effectLst/>
-        </p:spPr>
-        <p:style>
-          <a:lnRef idx="1">
-            <a:schemeClr val="accent1"/>
-          </a:lnRef>
-          <a:fillRef idx="3">
-            <a:schemeClr val="accent1"/>
-          </a:fillRef>
-          <a:effectRef idx="2">
-            <a:schemeClr val="accent1"/>
-          </a:effectRef>
-          <a:fontRef idx="minor">
-            <a:schemeClr val="lt1"/>
-          </a:fontRef>
-        </p:style>
-        <p:txBody>
-          <a:bodyPr rtlCol="0" anchor="ctr"/>
-          <a:lstStyle/>
-          <a:p/>
-        </p:txBody>
-      </p:sp>
-      <p:sp>
-        <p:nvSpPr>
-          <p:cNvPr id="8" name="Rectangle 7"/>
-          <p:cNvSpPr/>
-          <p:nvPr/>
-        </p:nvSpPr>
-        <p:spPr>
-          <a:xfrm>
-            <a:off x="502920" y="1591056"/>
-            <a:ext cx="41148" cy="868680"/>
-          </a:xfrm>
-          <a:prstGeom prst="rect">
-            <a:avLst/>
-          </a:prstGeom>
-          <a:solidFill>
-            <a:srgbClr val="283E4E"/>
-          </a:solidFill>
-          <a:ln>
-            <a:noFill/>
-          </a:ln>
-          <a:effectLst/>
-        </p:spPr>
-        <p:style>
-          <a:lnRef idx="1">
-            <a:schemeClr val="accent1"/>
-          </a:lnRef>
-          <a:fillRef idx="3">
-            <a:schemeClr val="accent1"/>
-          </a:fillRef>
-          <a:effectRef idx="2">
-            <a:schemeClr val="accent1"/>
-          </a:effectRef>
-          <a:fontRef idx="minor">
-            <a:schemeClr val="lt1"/>
-          </a:fontRef>
-        </p:style>
-        <p:txBody>
-          <a:bodyPr rtlCol="0" anchor="ctr"/>
-          <a:lstStyle/>
-          <a:p/>
-        </p:txBody>
-      </p:sp>
-      <p:sp>
-        <p:nvSpPr>
-          <p:cNvPr id="9" name="TextBox 8"/>
-          <p:cNvSpPr txBox="1"/>
-          <p:nvPr/>
-        </p:nvSpPr>
-        <p:spPr>
-          <a:xfrm>
-            <a:off x="694944" y="1682496"/>
-            <a:ext cx="6163056" cy="685800"/>
-          </a:xfrm>
-          <a:prstGeom prst="rect">
-            <a:avLst/>
-          </a:prstGeom>
-          <a:noFill/>
-        </p:spPr>
-        <p:txBody>
-          <a:bodyPr wrap="square" anchor="ctr" lIns="0" rIns="0" tIns="0" bIns="0">
-            <a:spAutoFit/>
-          </a:bodyPr>
-          <a:lstStyle/>
-          <a:p>
-            <a:pPr algn="l">
-              <a:lnSpc>
-                <a:spcPct val="118000"/>
-              </a:lnSpc>
-            </a:pPr>
-            <a:r>
-              <a:rPr sz="1700">
-                <a:solidFill>
-                  <a:srgbClr val="000000"/>
-                </a:solidFill>
-                <a:latin typeface="楷体"/>
-                <a:ea typeface="楷体"/>
-                <a:cs typeface="楷体"/>
-              </a:rPr>
-              <a:t>这是导语块：演示位置、字号、行距与浅底强调样式，文字内容为占位示意。</a:t>
-            </a:r>
-          </a:p>
-        </p:txBody>
-      </p:sp>
-      <p:sp>
-        <p:nvSpPr>
-          <p:cNvPr id="10" name="Rectangle 9"/>
-          <p:cNvSpPr/>
-          <p:nvPr/>
-        </p:nvSpPr>
-        <p:spPr>
-          <a:xfrm>
-            <a:off x="502920" y="2596896"/>
-            <a:ext cx="41148" cy="603504"/>
-          </a:xfrm>
-          <a:prstGeom prst="rect">
-            <a:avLst/>
-          </a:prstGeom>
-          <a:solidFill>
-            <a:srgbClr val="283E4E"/>
-          </a:solidFill>
-          <a:ln>
-            <a:noFill/>
-          </a:ln>
-          <a:effectLst/>
-        </p:spPr>
-        <p:style>
-          <a:lnRef idx="1">
-            <a:schemeClr val="accent1"/>
-          </a:lnRef>
-          <a:fillRef idx="3">
-            <a:schemeClr val="accent1"/>
-          </a:fillRef>
-          <a:effectRef idx="2">
-            <a:schemeClr val="accent1"/>
-          </a:effectRef>
-          <a:fontRef idx="minor">
-            <a:schemeClr val="lt1"/>
-          </a:fontRef>
-        </p:style>
-        <p:txBody>
-          <a:bodyPr rtlCol="0" anchor="ctr"/>
-          <a:lstStyle/>
-          <a:p/>
-        </p:txBody>
-      </p:sp>
-      <p:sp>
-        <p:nvSpPr>
-          <p:cNvPr id="11" name="TextBox 10"/>
-          <p:cNvSpPr txBox="1"/>
-          <p:nvPr/>
-        </p:nvSpPr>
-        <p:spPr>
-          <a:xfrm>
-            <a:off x="694944" y="2596896"/>
-            <a:ext cx="6254496" cy="603504"/>
-          </a:xfrm>
-          <a:prstGeom prst="rect">
-            <a:avLst/>
-          </a:prstGeom>
-          <a:noFill/>
-        </p:spPr>
-        <p:txBody>
-          <a:bodyPr wrap="square" anchor="ctr" lIns="0" rIns="0" tIns="0" bIns="0">
-            <a:spAutoFit/>
-          </a:bodyPr>
-          <a:lstStyle/>
-          <a:p>
-            <a:pPr algn="l">
-              <a:lnSpc>
-                <a:spcPct val="116000"/>
-              </a:lnSpc>
-            </a:pPr>
-            <a:r>
-              <a:rPr sz="1700">
-                <a:solidFill>
-                  <a:srgbClr val="000000"/>
-                </a:solidFill>
-                <a:latin typeface="宋体"/>
-                <a:ea typeface="宋体"/>
-                <a:cs typeface="宋体"/>
-              </a:rPr>
-              <a:t>示例指标 A 达到 </a:t>
-            </a:r>
-            <a:r>
-              <a:rPr sz="1700">
-                <a:solidFill>
-                  <a:srgbClr val="283E4E"/>
-                </a:solidFill>
-                <a:latin typeface="黑体"/>
-                <a:ea typeface="黑体"/>
-                <a:cs typeface="黑体"/>
-              </a:rPr>
-              <a:t>38.6</a:t>
-            </a:r>
-            <a:r>
-              <a:rPr sz="1700">
-                <a:solidFill>
-                  <a:srgbClr val="000000"/>
-                </a:solidFill>
-                <a:latin typeface="宋体"/>
-                <a:ea typeface="宋体"/>
-                <a:cs typeface="宋体"/>
-              </a:rPr>
-              <a:t>（占位数值）</a:t>
-            </a:r>
-          </a:p>
-        </p:txBody>
-      </p:sp>
-      <p:sp>
-        <p:nvSpPr>
-          <p:cNvPr id="12" name="Rectangle 11"/>
-          <p:cNvSpPr/>
-          <p:nvPr/>
-        </p:nvSpPr>
-        <p:spPr>
-          <a:xfrm>
-            <a:off x="502920" y="3236976"/>
-            <a:ext cx="41148" cy="603504"/>
-          </a:xfrm>
-          <a:prstGeom prst="rect">
-            <a:avLst/>
-          </a:prstGeom>
-          <a:solidFill>
-            <a:srgbClr val="283E4E"/>
-          </a:solidFill>
-          <a:ln>
-            <a:noFill/>
-          </a:ln>
-          <a:effectLst/>
-        </p:spPr>
-        <p:style>
-          <a:lnRef idx="1">
-            <a:schemeClr val="accent1"/>
-          </a:lnRef>
-          <a:fillRef idx="3">
-            <a:schemeClr val="accent1"/>
-          </a:fillRef>
-          <a:effectRef idx="2">
-            <a:schemeClr val="accent1"/>
-          </a:effectRef>
-          <a:fontRef idx="minor">
-            <a:schemeClr val="lt1"/>
-          </a:fontRef>
-        </p:style>
-        <p:txBody>
-          <a:bodyPr rtlCol="0" anchor="ctr"/>
-          <a:lstStyle/>
-          <a:p/>
-        </p:txBody>
-      </p:sp>
-      <p:sp>
-        <p:nvSpPr>
-          <p:cNvPr id="13" name="TextBox 12"/>
-          <p:cNvSpPr txBox="1"/>
-          <p:nvPr/>
-        </p:nvSpPr>
-        <p:spPr>
-          <a:xfrm>
-            <a:off x="694944" y="3236976"/>
-            <a:ext cx="6254496" cy="603504"/>
-          </a:xfrm>
-          <a:prstGeom prst="rect">
-            <a:avLst/>
-          </a:prstGeom>
-          <a:noFill/>
-        </p:spPr>
-        <p:txBody>
-          <a:bodyPr wrap="square" anchor="ctr" lIns="0" rIns="0" tIns="0" bIns="0">
-            <a:spAutoFit/>
-          </a:bodyPr>
-          <a:lstStyle/>
-          <a:p>
-            <a:pPr algn="l">
-              <a:lnSpc>
-                <a:spcPct val="116000"/>
-              </a:lnSpc>
-            </a:pPr>
-            <a:r>
-              <a:rPr sz="1700">
-                <a:solidFill>
-                  <a:srgbClr val="000000"/>
-                </a:solidFill>
-                <a:latin typeface="宋体"/>
-                <a:ea typeface="宋体"/>
-                <a:cs typeface="宋体"/>
-              </a:rPr>
-              <a:t>示例指标 B 同比变化 </a:t>
-            </a:r>
-            <a:r>
-              <a:rPr sz="1700">
-                <a:solidFill>
-                  <a:srgbClr val="283E4E"/>
-                </a:solidFill>
-                <a:latin typeface="黑体"/>
-                <a:ea typeface="黑体"/>
-                <a:cs typeface="黑体"/>
-              </a:rPr>
-              <a:t>+12.4</a:t>
-            </a:r>
-            <a:r>
-              <a:rPr sz="1700">
-                <a:solidFill>
-                  <a:srgbClr val="000000"/>
-                </a:solidFill>
-                <a:latin typeface="宋体"/>
-                <a:ea typeface="宋体"/>
-                <a:cs typeface="宋体"/>
-              </a:rPr>
-              <a:t>（占位数值）</a:t>
-            </a:r>
-          </a:p>
-        </p:txBody>
-      </p:sp>
-      <p:sp>
-        <p:nvSpPr>
-          <p:cNvPr id="14" name="Rectangle 13"/>
-          <p:cNvSpPr/>
-          <p:nvPr/>
-        </p:nvSpPr>
-        <p:spPr>
-          <a:xfrm>
-            <a:off x="502920" y="3877056"/>
-            <a:ext cx="41148" cy="603504"/>
-          </a:xfrm>
-          <a:prstGeom prst="rect">
-            <a:avLst/>
-          </a:prstGeom>
-          <a:solidFill>
-            <a:srgbClr val="283E4E"/>
-          </a:solidFill>
-          <a:ln>
-            <a:noFill/>
-          </a:ln>
-          <a:effectLst/>
-        </p:spPr>
-        <p:style>
-          <a:lnRef idx="1">
-            <a:schemeClr val="accent1"/>
-          </a:lnRef>
-          <a:fillRef idx="3">
-            <a:schemeClr val="accent1"/>
-          </a:fillRef>
-          <a:effectRef idx="2">
-            <a:schemeClr val="accent1"/>
-          </a:effectRef>
-          <a:fontRef idx="minor">
-            <a:schemeClr val="lt1"/>
-          </a:fontRef>
-        </p:style>
-        <p:txBody>
-          <a:bodyPr rtlCol="0" anchor="ctr"/>
-          <a:lstStyle/>
-          <a:p/>
-        </p:txBody>
-      </p:sp>
-      <p:sp>
-        <p:nvSpPr>
-          <p:cNvPr id="15" name="TextBox 14"/>
-          <p:cNvSpPr txBox="1"/>
-          <p:nvPr/>
-        </p:nvSpPr>
-        <p:spPr>
-          <a:xfrm>
-            <a:off x="694944" y="3877056"/>
-            <a:ext cx="6254496" cy="603504"/>
-          </a:xfrm>
-          <a:prstGeom prst="rect">
-            <a:avLst/>
-          </a:prstGeom>
-          <a:noFill/>
-        </p:spPr>
-        <p:txBody>
-          <a:bodyPr wrap="square" anchor="ctr" lIns="0" rIns="0" tIns="0" bIns="0">
-            <a:spAutoFit/>
-          </a:bodyPr>
-          <a:lstStyle/>
-          <a:p>
-            <a:pPr algn="l">
-              <a:lnSpc>
-                <a:spcPct val="116000"/>
-              </a:lnSpc>
-            </a:pPr>
-            <a:r>
-              <a:rPr sz="1700">
-                <a:solidFill>
-                  <a:srgbClr val="000000"/>
-                </a:solidFill>
-                <a:latin typeface="宋体"/>
-                <a:ea typeface="宋体"/>
-                <a:cs typeface="宋体"/>
-              </a:rPr>
-              <a:t>示例指标 C 覆盖范围 </a:t>
-            </a:r>
-            <a:r>
-              <a:rPr sz="1700">
-                <a:solidFill>
-                  <a:srgbClr val="283E4E"/>
-                </a:solidFill>
-                <a:latin typeface="黑体"/>
-                <a:ea typeface="黑体"/>
-                <a:cs typeface="黑体"/>
-              </a:rPr>
-              <a:t>1,200</a:t>
-            </a:r>
-            <a:r>
-              <a:rPr sz="1700">
-                <a:solidFill>
-                  <a:srgbClr val="000000"/>
-                </a:solidFill>
-                <a:latin typeface="宋体"/>
-                <a:ea typeface="宋体"/>
-                <a:cs typeface="宋体"/>
-              </a:rPr>
-              <a:t>（占位数值）</a:t>
-            </a:r>
-          </a:p>
-        </p:txBody>
-      </p:sp>
-      <p:sp>
-        <p:nvSpPr>
-          <p:cNvPr id="16" name="Rectangle 15"/>
-          <p:cNvSpPr/>
-          <p:nvPr/>
-        </p:nvSpPr>
-        <p:spPr>
-          <a:xfrm>
-            <a:off x="502920" y="4626864"/>
+            <a:off x="502920" y="1664208"/>
             <a:ext cx="6492240" cy="960120"/>
           </a:xfrm>
           <a:prstGeom prst="rect">
@@ -4498,13 +4058,13 @@
       </p:sp>
       <p:sp>
         <p:nvSpPr>
-          <p:cNvPr id="17" name="Rectangle 16"/>
+          <p:cNvPr id="8" name="Rectangle 7"/>
           <p:cNvSpPr/>
           <p:nvPr/>
         </p:nvSpPr>
         <p:spPr>
           <a:xfrm>
-            <a:off x="502920" y="4626864"/>
+            <a:off x="502920" y="1664208"/>
             <a:ext cx="41148" cy="960120"/>
           </a:xfrm>
           <a:prstGeom prst="rect">
@@ -4540,13 +4100,13 @@
       </p:sp>
       <p:sp>
         <p:nvSpPr>
-          <p:cNvPr id="18" name="TextBox 17"/>
+          <p:cNvPr id="9" name="TextBox 8"/>
           <p:cNvSpPr txBox="1"/>
           <p:nvPr/>
         </p:nvSpPr>
         <p:spPr>
           <a:xfrm>
-            <a:off x="694944" y="4718304"/>
+            <a:off x="694944" y="1755648"/>
             <a:ext cx="6163056" cy="777240"/>
           </a:xfrm>
           <a:prstGeom prst="rect">
@@ -4562,19 +4122,459 @@
           <a:p>
             <a:pPr algn="l">
               <a:lnSpc>
-                <a:spcPct val="118000"/>
+                <a:spcPct val="120000"/>
               </a:lnSpc>
             </a:pPr>
             <a:r>
-              <a:rPr sz="1700">
+              <a:rPr sz="2000">
+                <a:solidFill>
+                  <a:srgbClr val="000000"/>
+                </a:solidFill>
+                <a:latin typeface="Times New Roman"/>
+                <a:ea typeface="楷体"/>
+                <a:cs typeface="楷体"/>
+              </a:rPr>
+              <a:t>这是导语块：演示位置、字号、行距与浅底强调样式，文字内容为占位示意。</a:t>
+            </a:r>
+          </a:p>
+        </p:txBody>
+      </p:sp>
+      <p:sp>
+        <p:nvSpPr>
+          <p:cNvPr id="10" name="Rectangle 9"/>
+          <p:cNvSpPr/>
+          <p:nvPr/>
+        </p:nvSpPr>
+        <p:spPr>
+          <a:xfrm>
+            <a:off x="502920" y="2715768"/>
+            <a:ext cx="41148" cy="658368"/>
+          </a:xfrm>
+          <a:prstGeom prst="rect">
+            <a:avLst/>
+          </a:prstGeom>
+          <a:solidFill>
+            <a:srgbClr val="283E4E"/>
+          </a:solidFill>
+          <a:ln>
+            <a:noFill/>
+          </a:ln>
+          <a:effectLst/>
+        </p:spPr>
+        <p:style>
+          <a:lnRef idx="1">
+            <a:schemeClr val="accent1"/>
+          </a:lnRef>
+          <a:fillRef idx="3">
+            <a:schemeClr val="accent1"/>
+          </a:fillRef>
+          <a:effectRef idx="2">
+            <a:schemeClr val="accent1"/>
+          </a:effectRef>
+          <a:fontRef idx="minor">
+            <a:schemeClr val="lt1"/>
+          </a:fontRef>
+        </p:style>
+        <p:txBody>
+          <a:bodyPr rtlCol="0" anchor="ctr"/>
+          <a:lstStyle/>
+          <a:p/>
+        </p:txBody>
+      </p:sp>
+      <p:sp>
+        <p:nvSpPr>
+          <p:cNvPr id="11" name="TextBox 10"/>
+          <p:cNvSpPr txBox="1"/>
+          <p:nvPr/>
+        </p:nvSpPr>
+        <p:spPr>
+          <a:xfrm>
+            <a:off x="694944" y="2715768"/>
+            <a:ext cx="6254496" cy="658368"/>
+          </a:xfrm>
+          <a:prstGeom prst="rect">
+            <a:avLst/>
+          </a:prstGeom>
+          <a:noFill/>
+        </p:spPr>
+        <p:txBody>
+          <a:bodyPr wrap="square" anchor="ctr" lIns="0" rIns="0" tIns="0" bIns="0">
+            <a:spAutoFit/>
+          </a:bodyPr>
+          <a:lstStyle/>
+          <a:p>
+            <a:pPr algn="l">
+              <a:lnSpc>
+                <a:spcPct val="120000"/>
+              </a:lnSpc>
+            </a:pPr>
+            <a:r>
+              <a:rPr sz="1800">
+                <a:solidFill>
+                  <a:srgbClr val="000000"/>
+                </a:solidFill>
+                <a:latin typeface="Times New Roman"/>
+                <a:ea typeface="宋体"/>
+                <a:cs typeface="宋体"/>
+              </a:rPr>
+              <a:t>示例指标 A 达到 </a:t>
+            </a:r>
+            <a:r>
+              <a:rPr sz="1800">
                 <a:solidFill>
                   <a:srgbClr val="283E4E"/>
                 </a:solidFill>
-                <a:latin typeface="黑体"/>
+                <a:latin typeface="Arial"/>
                 <a:ea typeface="黑体"/>
                 <a:cs typeface="黑体"/>
               </a:rPr>
-              <a:t>示例判断句：用一句话收束左侧信息，主题色加粗，作为口头汇报的落点。</a:t>
+              <a:t>38.6</a:t>
+            </a:r>
+            <a:r>
+              <a:rPr sz="1800">
+                <a:solidFill>
+                  <a:srgbClr val="000000"/>
+                </a:solidFill>
+                <a:latin typeface="Times New Roman"/>
+                <a:ea typeface="宋体"/>
+                <a:cs typeface="宋体"/>
+              </a:rPr>
+              <a:t>（占位数值）</a:t>
+            </a:r>
+          </a:p>
+        </p:txBody>
+      </p:sp>
+      <p:sp>
+        <p:nvSpPr>
+          <p:cNvPr id="12" name="Rectangle 11"/>
+          <p:cNvSpPr/>
+          <p:nvPr/>
+        </p:nvSpPr>
+        <p:spPr>
+          <a:xfrm>
+            <a:off x="502920" y="3429000"/>
+            <a:ext cx="41148" cy="658368"/>
+          </a:xfrm>
+          <a:prstGeom prst="rect">
+            <a:avLst/>
+          </a:prstGeom>
+          <a:solidFill>
+            <a:srgbClr val="283E4E"/>
+          </a:solidFill>
+          <a:ln>
+            <a:noFill/>
+          </a:ln>
+          <a:effectLst/>
+        </p:spPr>
+        <p:style>
+          <a:lnRef idx="1">
+            <a:schemeClr val="accent1"/>
+          </a:lnRef>
+          <a:fillRef idx="3">
+            <a:schemeClr val="accent1"/>
+          </a:fillRef>
+          <a:effectRef idx="2">
+            <a:schemeClr val="accent1"/>
+          </a:effectRef>
+          <a:fontRef idx="minor">
+            <a:schemeClr val="lt1"/>
+          </a:fontRef>
+        </p:style>
+        <p:txBody>
+          <a:bodyPr rtlCol="0" anchor="ctr"/>
+          <a:lstStyle/>
+          <a:p/>
+        </p:txBody>
+      </p:sp>
+      <p:sp>
+        <p:nvSpPr>
+          <p:cNvPr id="13" name="TextBox 12"/>
+          <p:cNvSpPr txBox="1"/>
+          <p:nvPr/>
+        </p:nvSpPr>
+        <p:spPr>
+          <a:xfrm>
+            <a:off x="694944" y="3429000"/>
+            <a:ext cx="6254496" cy="658368"/>
+          </a:xfrm>
+          <a:prstGeom prst="rect">
+            <a:avLst/>
+          </a:prstGeom>
+          <a:noFill/>
+        </p:spPr>
+        <p:txBody>
+          <a:bodyPr wrap="square" anchor="ctr" lIns="0" rIns="0" tIns="0" bIns="0">
+            <a:spAutoFit/>
+          </a:bodyPr>
+          <a:lstStyle/>
+          <a:p>
+            <a:pPr algn="l">
+              <a:lnSpc>
+                <a:spcPct val="120000"/>
+              </a:lnSpc>
+            </a:pPr>
+            <a:r>
+              <a:rPr sz="1800">
+                <a:solidFill>
+                  <a:srgbClr val="000000"/>
+                </a:solidFill>
+                <a:latin typeface="Times New Roman"/>
+                <a:ea typeface="宋体"/>
+                <a:cs typeface="宋体"/>
+              </a:rPr>
+              <a:t>示例指标 B 同比变化 </a:t>
+            </a:r>
+            <a:r>
+              <a:rPr sz="1800">
+                <a:solidFill>
+                  <a:srgbClr val="283E4E"/>
+                </a:solidFill>
+                <a:latin typeface="Arial"/>
+                <a:ea typeface="黑体"/>
+                <a:cs typeface="黑体"/>
+              </a:rPr>
+              <a:t>+12.4</a:t>
+            </a:r>
+            <a:r>
+              <a:rPr sz="1800">
+                <a:solidFill>
+                  <a:srgbClr val="000000"/>
+                </a:solidFill>
+                <a:latin typeface="Times New Roman"/>
+                <a:ea typeface="宋体"/>
+                <a:cs typeface="宋体"/>
+              </a:rPr>
+              <a:t>（占位数值）</a:t>
+            </a:r>
+          </a:p>
+        </p:txBody>
+      </p:sp>
+      <p:sp>
+        <p:nvSpPr>
+          <p:cNvPr id="14" name="Rectangle 13"/>
+          <p:cNvSpPr/>
+          <p:nvPr/>
+        </p:nvSpPr>
+        <p:spPr>
+          <a:xfrm>
+            <a:off x="502920" y="4142232"/>
+            <a:ext cx="41148" cy="658368"/>
+          </a:xfrm>
+          <a:prstGeom prst="rect">
+            <a:avLst/>
+          </a:prstGeom>
+          <a:solidFill>
+            <a:srgbClr val="283E4E"/>
+          </a:solidFill>
+          <a:ln>
+            <a:noFill/>
+          </a:ln>
+          <a:effectLst/>
+        </p:spPr>
+        <p:style>
+          <a:lnRef idx="1">
+            <a:schemeClr val="accent1"/>
+          </a:lnRef>
+          <a:fillRef idx="3">
+            <a:schemeClr val="accent1"/>
+          </a:fillRef>
+          <a:effectRef idx="2">
+            <a:schemeClr val="accent1"/>
+          </a:effectRef>
+          <a:fontRef idx="minor">
+            <a:schemeClr val="lt1"/>
+          </a:fontRef>
+        </p:style>
+        <p:txBody>
+          <a:bodyPr rtlCol="0" anchor="ctr"/>
+          <a:lstStyle/>
+          <a:p/>
+        </p:txBody>
+      </p:sp>
+      <p:sp>
+        <p:nvSpPr>
+          <p:cNvPr id="15" name="TextBox 14"/>
+          <p:cNvSpPr txBox="1"/>
+          <p:nvPr/>
+        </p:nvSpPr>
+        <p:spPr>
+          <a:xfrm>
+            <a:off x="694944" y="4142232"/>
+            <a:ext cx="6254496" cy="658368"/>
+          </a:xfrm>
+          <a:prstGeom prst="rect">
+            <a:avLst/>
+          </a:prstGeom>
+          <a:noFill/>
+        </p:spPr>
+        <p:txBody>
+          <a:bodyPr wrap="square" anchor="ctr" lIns="0" rIns="0" tIns="0" bIns="0">
+            <a:spAutoFit/>
+          </a:bodyPr>
+          <a:lstStyle/>
+          <a:p>
+            <a:pPr algn="l">
+              <a:lnSpc>
+                <a:spcPct val="120000"/>
+              </a:lnSpc>
+            </a:pPr>
+            <a:r>
+              <a:rPr sz="1800">
+                <a:solidFill>
+                  <a:srgbClr val="000000"/>
+                </a:solidFill>
+                <a:latin typeface="Times New Roman"/>
+                <a:ea typeface="宋体"/>
+                <a:cs typeface="宋体"/>
+              </a:rPr>
+              <a:t>示例指标 C 覆盖范围 </a:t>
+            </a:r>
+            <a:r>
+              <a:rPr sz="1800">
+                <a:solidFill>
+                  <a:srgbClr val="283E4E"/>
+                </a:solidFill>
+                <a:latin typeface="Arial"/>
+                <a:ea typeface="黑体"/>
+                <a:cs typeface="黑体"/>
+              </a:rPr>
+              <a:t>1,200</a:t>
+            </a:r>
+            <a:r>
+              <a:rPr sz="1800">
+                <a:solidFill>
+                  <a:srgbClr val="000000"/>
+                </a:solidFill>
+                <a:latin typeface="Times New Roman"/>
+                <a:ea typeface="宋体"/>
+                <a:cs typeface="宋体"/>
+              </a:rPr>
+              <a:t>（占位数值）</a:t>
+            </a:r>
+          </a:p>
+        </p:txBody>
+      </p:sp>
+      <p:sp>
+        <p:nvSpPr>
+          <p:cNvPr id="16" name="Rectangle 15"/>
+          <p:cNvSpPr/>
+          <p:nvPr/>
+        </p:nvSpPr>
+        <p:spPr>
+          <a:xfrm>
+            <a:off x="502920" y="4892040"/>
+            <a:ext cx="6492240" cy="1005840"/>
+          </a:xfrm>
+          <a:prstGeom prst="rect">
+            <a:avLst/>
+          </a:prstGeom>
+          <a:solidFill>
+            <a:srgbClr val="F1F5F8"/>
+          </a:solidFill>
+          <a:ln>
+            <a:noFill/>
+          </a:ln>
+          <a:effectLst/>
+        </p:spPr>
+        <p:style>
+          <a:lnRef idx="1">
+            <a:schemeClr val="accent1"/>
+          </a:lnRef>
+          <a:fillRef idx="3">
+            <a:schemeClr val="accent1"/>
+          </a:fillRef>
+          <a:effectRef idx="2">
+            <a:schemeClr val="accent1"/>
+          </a:effectRef>
+          <a:fontRef idx="minor">
+            <a:schemeClr val="lt1"/>
+          </a:fontRef>
+        </p:style>
+        <p:txBody>
+          <a:bodyPr rtlCol="0" anchor="ctr"/>
+          <a:lstStyle/>
+          <a:p/>
+        </p:txBody>
+      </p:sp>
+      <p:sp>
+        <p:nvSpPr>
+          <p:cNvPr id="17" name="Rectangle 16"/>
+          <p:cNvSpPr/>
+          <p:nvPr/>
+        </p:nvSpPr>
+        <p:spPr>
+          <a:xfrm>
+            <a:off x="502920" y="4892040"/>
+            <a:ext cx="41148" cy="1005840"/>
+          </a:xfrm>
+          <a:prstGeom prst="rect">
+            <a:avLst/>
+          </a:prstGeom>
+          <a:solidFill>
+            <a:srgbClr val="283E4E"/>
+          </a:solidFill>
+          <a:ln>
+            <a:noFill/>
+          </a:ln>
+          <a:effectLst/>
+        </p:spPr>
+        <p:style>
+          <a:lnRef idx="1">
+            <a:schemeClr val="accent1"/>
+          </a:lnRef>
+          <a:fillRef idx="3">
+            <a:schemeClr val="accent1"/>
+          </a:fillRef>
+          <a:effectRef idx="2">
+            <a:schemeClr val="accent1"/>
+          </a:effectRef>
+          <a:fontRef idx="minor">
+            <a:schemeClr val="lt1"/>
+          </a:fontRef>
+        </p:style>
+        <p:txBody>
+          <a:bodyPr rtlCol="0" anchor="ctr"/>
+          <a:lstStyle/>
+          <a:p/>
+        </p:txBody>
+      </p:sp>
+      <p:sp>
+        <p:nvSpPr>
+          <p:cNvPr id="18" name="TextBox 17"/>
+          <p:cNvSpPr txBox="1"/>
+          <p:nvPr/>
+        </p:nvSpPr>
+        <p:spPr>
+          <a:xfrm>
+            <a:off x="694944" y="4983480"/>
+            <a:ext cx="6163056" cy="822960"/>
+          </a:xfrm>
+          <a:prstGeom prst="rect">
+            <a:avLst/>
+          </a:prstGeom>
+          <a:noFill/>
+        </p:spPr>
+        <p:txBody>
+          <a:bodyPr wrap="square" anchor="ctr" lIns="0" rIns="0" tIns="0" bIns="0">
+            <a:spAutoFit/>
+          </a:bodyPr>
+          <a:lstStyle/>
+          <a:p>
+            <a:pPr algn="l">
+              <a:lnSpc>
+                <a:spcPct val="120000"/>
+              </a:lnSpc>
+            </a:pPr>
+            <a:r>
+              <a:rPr sz="1800">
+                <a:solidFill>
+                  <a:srgbClr val="283E4E"/>
+                </a:solidFill>
+                <a:latin typeface="Arial"/>
+                <a:ea typeface="黑体"/>
+                <a:cs typeface="黑体"/>
+              </a:rPr>
+              <a:t>示例判断句：用一句话收束左侧信息，靠黑体与主题色强调，作为口头汇报的落点。</a:t>
             </a:r>
           </a:p>
         </p:txBody>
@@ -4587,8 +4587,8 @@
         </p:nvSpPr>
         <p:spPr>
           <a:xfrm>
-            <a:off x="7178040" y="1591056"/>
-            <a:ext cx="5175504" cy="1572768"/>
+            <a:off x="7178040" y="1664208"/>
+            <a:ext cx="5175504" cy="1481328"/>
           </a:xfrm>
           <a:prstGeom prst="rect">
             <a:avLst/>
@@ -4631,7 +4631,7 @@
         </p:nvSpPr>
         <p:spPr>
           <a:xfrm>
-            <a:off x="7178040" y="2103120"/>
+            <a:off x="7178040" y="2212848"/>
             <a:ext cx="5175504" cy="365760"/>
           </a:xfrm>
           <a:prstGeom prst="rect">
@@ -4655,7 +4655,7 @@
                 <a:solidFill>
                   <a:srgbClr val="000000"/>
                 </a:solidFill>
-                <a:latin typeface="宋体"/>
+                <a:latin typeface="Times New Roman"/>
                 <a:ea typeface="宋体"/>
                 <a:cs typeface="宋体"/>
               </a:rPr>
@@ -4672,8 +4672,8 @@
         </p:nvSpPr>
         <p:spPr>
           <a:xfrm>
-            <a:off x="7178040" y="3346704"/>
-            <a:ext cx="1645920" cy="1645920"/>
+            <a:off x="7178040" y="3310128"/>
+            <a:ext cx="1572768" cy="1572768"/>
           </a:xfrm>
           <a:prstGeom prst="ellipse">
             <a:avLst/>
@@ -4714,8 +4714,8 @@
         </p:nvSpPr>
         <p:spPr>
           <a:xfrm>
-            <a:off x="7269480" y="3749039"/>
-            <a:ext cx="1463040" cy="548640"/>
+            <a:off x="7223760" y="3621024"/>
+            <a:ext cx="1481328" cy="603504"/>
           </a:xfrm>
           <a:prstGeom prst="rect">
             <a:avLst/>
@@ -4734,11 +4734,11 @@
               </a:lnSpc>
             </a:pPr>
             <a:r>
-              <a:rPr sz="2600">
+              <a:rPr sz="3600">
                 <a:solidFill>
                   <a:srgbClr val="FFFFFF"/>
                 </a:solidFill>
-                <a:latin typeface="黑体"/>
+                <a:latin typeface="Arial"/>
                 <a:ea typeface="黑体"/>
                 <a:cs typeface="黑体"/>
               </a:rPr>
@@ -4755,8 +4755,8 @@
         </p:nvSpPr>
         <p:spPr>
           <a:xfrm>
-            <a:off x="7269480" y="4261104"/>
-            <a:ext cx="1463040" cy="329184"/>
+            <a:off x="7269480" y="4315968"/>
+            <a:ext cx="1389888" cy="329184"/>
           </a:xfrm>
           <a:prstGeom prst="rect">
             <a:avLst/>
@@ -4779,7 +4779,7 @@
                 <a:solidFill>
                   <a:srgbClr val="FFFFFF"/>
                 </a:solidFill>
-                <a:latin typeface="宋体"/>
+                <a:latin typeface="Times New Roman"/>
                 <a:ea typeface="宋体"/>
                 <a:cs typeface="宋体"/>
               </a:rPr>
@@ -4796,8 +4796,8 @@
         </p:nvSpPr>
         <p:spPr>
           <a:xfrm>
-            <a:off x="9098280" y="3346704"/>
-            <a:ext cx="3255264" cy="237744"/>
+            <a:off x="9098280" y="3310128"/>
+            <a:ext cx="3255264" cy="274320"/>
           </a:xfrm>
           <a:prstGeom prst="rect">
             <a:avLst/>
@@ -4820,7 +4820,7 @@
                 <a:solidFill>
                   <a:srgbClr val="000000"/>
                 </a:solidFill>
-                <a:latin typeface="宋体"/>
+                <a:latin typeface="Times New Roman"/>
                 <a:ea typeface="宋体"/>
                 <a:cs typeface="宋体"/>
               </a:rPr>
@@ -4838,8 +4838,8 @@
           <p:nvPr/>
         </p:nvGraphicFramePr>
         <p:xfrm>
-          <a:off x="9098280" y="3621024"/>
-          <a:ext cx="3255264" cy="2212848"/>
+          <a:off x="9098280" y="3602736"/>
+          <a:ext cx="3255264" cy="2194560"/>
         </p:xfrm>
         <a:graphic>
           <a:graphicData uri="http://schemas.openxmlformats.org/drawingml/2006/chart">
@@ -4855,8 +4855,8 @@
         </p:nvSpPr>
         <p:spPr>
           <a:xfrm>
-            <a:off x="502920" y="6181344"/>
-            <a:ext cx="41148" cy="512064"/>
+            <a:off x="502920" y="6217920"/>
+            <a:ext cx="41148" cy="566928"/>
           </a:xfrm>
           <a:prstGeom prst="rect">
             <a:avLst/>
@@ -4897,8 +4897,8 @@
         </p:nvSpPr>
         <p:spPr>
           <a:xfrm>
-            <a:off x="694944" y="6181344"/>
-            <a:ext cx="11521440" cy="512064"/>
+            <a:off x="694944" y="6217920"/>
+            <a:ext cx="11521440" cy="566928"/>
           </a:xfrm>
           <a:prstGeom prst="rect">
             <a:avLst/>
@@ -4917,13 +4917,13 @@
               </a:lnSpc>
             </a:pPr>
             <a:r>
-              <a:rPr sz="1600">
+              <a:rPr sz="1800">
                 <a:solidFill>
                   <a:srgbClr val="000000"/>
                 </a:solidFill>
-                <a:latin typeface="宋体"/>
-                <a:ea typeface="宋体"/>
-                <a:cs typeface="宋体"/>
+                <a:latin typeface="Arial"/>
+                <a:ea typeface="黑体"/>
+                <a:cs typeface="黑体"/>
               </a:rPr>
               <a:t>示例结论条：用一句话写清证据强弱与边界，作为整页的落点。</a:t>
             </a:r>
@@ -4956,8 +4956,8 @@
         </p:nvSpPr>
         <p:spPr>
           <a:xfrm>
-            <a:off x="5852160" y="237744"/>
-            <a:ext cx="5577840" cy="256032"/>
+            <a:off x="5852160" y="219456"/>
+            <a:ext cx="5577840" cy="310896"/>
           </a:xfrm>
           <a:prstGeom prst="rect">
             <a:avLst/>
@@ -4980,7 +4980,7 @@
                 <a:solidFill>
                   <a:srgbClr val="000000"/>
                 </a:solidFill>
-                <a:latin typeface="宋体"/>
+                <a:latin typeface="Times New Roman"/>
                 <a:ea typeface="宋体"/>
                 <a:cs typeface="宋体"/>
               </a:rPr>
@@ -4997,8 +4997,8 @@
         </p:nvSpPr>
         <p:spPr>
           <a:xfrm>
-            <a:off x="11521440" y="237744"/>
-            <a:ext cx="832104" cy="256032"/>
+            <a:off x="11521440" y="219456"/>
+            <a:ext cx="832104" cy="310896"/>
           </a:xfrm>
           <a:prstGeom prst="rect">
             <a:avLst/>
@@ -5021,7 +5021,7 @@
                 <a:solidFill>
                   <a:srgbClr val="283E4E"/>
                 </a:solidFill>
-                <a:latin typeface="黑体"/>
+                <a:latin typeface="Arial"/>
                 <a:ea typeface="黑体"/>
                 <a:cs typeface="黑体"/>
               </a:rPr>
@@ -5038,8 +5038,8 @@
         </p:nvSpPr>
         <p:spPr>
           <a:xfrm>
-            <a:off x="502920" y="566928"/>
-            <a:ext cx="11850624" cy="475488"/>
+            <a:off x="502920" y="530352"/>
+            <a:ext cx="11850624" cy="603504"/>
           </a:xfrm>
           <a:prstGeom prst="rect">
             <a:avLst/>
@@ -5058,11 +5058,11 @@
               </a:lnSpc>
             </a:pPr>
             <a:r>
-              <a:rPr sz="2500">
+              <a:rPr sz="3000">
                 <a:solidFill>
                   <a:srgbClr val="283E4E"/>
                 </a:solidFill>
-                <a:latin typeface="黑体"/>
+                <a:latin typeface="Arial"/>
                 <a:ea typeface="黑体"/>
                 <a:cs typeface="黑体"/>
               </a:rPr>
@@ -5079,8 +5079,8 @@
         </p:nvSpPr>
         <p:spPr>
           <a:xfrm>
-            <a:off x="502920" y="1078992"/>
-            <a:ext cx="11850624" cy="274320"/>
+            <a:off x="502920" y="1152144"/>
+            <a:ext cx="11850624" cy="329184"/>
           </a:xfrm>
           <a:prstGeom prst="rect">
             <a:avLst/>
@@ -5099,11 +5099,11 @@
               </a:lnSpc>
             </a:pPr>
             <a:r>
-              <a:rPr sz="1600">
+              <a:rPr sz="2000">
                 <a:solidFill>
                   <a:srgbClr val="000000"/>
                 </a:solidFill>
-                <a:latin typeface="宋体"/>
+                <a:latin typeface="Times New Roman"/>
                 <a:ea typeface="宋体"/>
                 <a:cs typeface="宋体"/>
               </a:rPr>
@@ -5120,7 +5120,7 @@
         </p:nvSpPr>
         <p:spPr>
           <a:xfrm>
-            <a:off x="502920" y="1481328"/>
+            <a:off x="502920" y="1554480"/>
             <a:ext cx="11850624" cy="10972"/>
           </a:xfrm>
           <a:prstGeom prst="rect">
@@ -5163,7 +5163,7 @@
           <p:nvPr/>
         </p:nvGraphicFramePr>
         <p:xfrm>
-          <a:off x="502920" y="1700784"/>
+          <a:off x="502920" y="1773936"/>
           <a:ext cx="11850624" cy="3017520"/>
         </p:xfrm>
         <a:graphic>
@@ -5191,7 +5191,7 @@
                           <a:solidFill>
                             <a:srgbClr val="FFFFFF"/>
                           </a:solidFill>
-                          <a:latin typeface="黑体"/>
+                          <a:latin typeface="Arial"/>
                           <a:ea typeface="黑体"/>
                           <a:cs typeface="黑体"/>
                         </a:rPr>
@@ -5216,7 +5216,7 @@
                           <a:solidFill>
                             <a:srgbClr val="FFFFFF"/>
                           </a:solidFill>
-                          <a:latin typeface="黑体"/>
+                          <a:latin typeface="Arial"/>
                           <a:ea typeface="黑体"/>
                           <a:cs typeface="黑体"/>
                         </a:rPr>
@@ -5241,7 +5241,7 @@
                           <a:solidFill>
                             <a:srgbClr val="FFFFFF"/>
                           </a:solidFill>
-                          <a:latin typeface="黑体"/>
+                          <a:latin typeface="Arial"/>
                           <a:ea typeface="黑体"/>
                           <a:cs typeface="黑体"/>
                         </a:rPr>
@@ -5266,7 +5266,7 @@
                           <a:solidFill>
                             <a:srgbClr val="FFFFFF"/>
                           </a:solidFill>
-                          <a:latin typeface="黑体"/>
+                          <a:latin typeface="Arial"/>
                           <a:ea typeface="黑体"/>
                           <a:cs typeface="黑体"/>
                         </a:rPr>
@@ -5291,7 +5291,7 @@
                           <a:solidFill>
                             <a:srgbClr val="FFFFFF"/>
                           </a:solidFill>
-                          <a:latin typeface="黑体"/>
+                          <a:latin typeface="Arial"/>
                           <a:ea typeface="黑体"/>
                           <a:cs typeface="黑体"/>
                         </a:rPr>
@@ -5318,7 +5318,7 @@
                           <a:solidFill>
                             <a:srgbClr val="000000"/>
                           </a:solidFill>
-                          <a:latin typeface="宋体"/>
+                          <a:latin typeface="Times New Roman"/>
                           <a:ea typeface="宋体"/>
                           <a:cs typeface="宋体"/>
                         </a:rPr>
@@ -5343,7 +5343,7 @@
                           <a:solidFill>
                             <a:srgbClr val="283E4E"/>
                           </a:solidFill>
-                          <a:latin typeface="黑体"/>
+                          <a:latin typeface="Arial"/>
                           <a:ea typeface="黑体"/>
                           <a:cs typeface="黑体"/>
                         </a:rPr>
@@ -5368,7 +5368,7 @@
                           <a:solidFill>
                             <a:srgbClr val="283E4E"/>
                           </a:solidFill>
-                          <a:latin typeface="黑体"/>
+                          <a:latin typeface="Arial"/>
                           <a:ea typeface="黑体"/>
                           <a:cs typeface="黑体"/>
                         </a:rPr>
@@ -5393,7 +5393,7 @@
                           <a:solidFill>
                             <a:srgbClr val="283E4E"/>
                           </a:solidFill>
-                          <a:latin typeface="黑体"/>
+                          <a:latin typeface="Arial"/>
                           <a:ea typeface="黑体"/>
                           <a:cs typeface="黑体"/>
                         </a:rPr>
@@ -5418,7 +5418,7 @@
                           <a:solidFill>
                             <a:srgbClr val="000000"/>
                           </a:solidFill>
-                          <a:latin typeface="宋体"/>
+                          <a:latin typeface="Times New Roman"/>
                           <a:ea typeface="宋体"/>
                           <a:cs typeface="宋体"/>
                         </a:rPr>
@@ -5445,7 +5445,7 @@
                           <a:solidFill>
                             <a:srgbClr val="000000"/>
                           </a:solidFill>
-                          <a:latin typeface="宋体"/>
+                          <a:latin typeface="Times New Roman"/>
                           <a:ea typeface="宋体"/>
                           <a:cs typeface="宋体"/>
                         </a:rPr>
@@ -5470,7 +5470,7 @@
                           <a:solidFill>
                             <a:srgbClr val="283E4E"/>
                           </a:solidFill>
-                          <a:latin typeface="黑体"/>
+                          <a:latin typeface="Arial"/>
                           <a:ea typeface="黑体"/>
                           <a:cs typeface="黑体"/>
                         </a:rPr>
@@ -5495,7 +5495,7 @@
                           <a:solidFill>
                             <a:srgbClr val="283E4E"/>
                           </a:solidFill>
-                          <a:latin typeface="黑体"/>
+                          <a:latin typeface="Arial"/>
                           <a:ea typeface="黑体"/>
                           <a:cs typeface="黑体"/>
                         </a:rPr>
@@ -5520,7 +5520,7 @@
                           <a:solidFill>
                             <a:srgbClr val="283E4E"/>
                           </a:solidFill>
-                          <a:latin typeface="黑体"/>
+                          <a:latin typeface="Arial"/>
                           <a:ea typeface="黑体"/>
                           <a:cs typeface="黑体"/>
                         </a:rPr>
@@ -5545,7 +5545,7 @@
                           <a:solidFill>
                             <a:srgbClr val="000000"/>
                           </a:solidFill>
-                          <a:latin typeface="宋体"/>
+                          <a:latin typeface="Times New Roman"/>
                           <a:ea typeface="宋体"/>
                           <a:cs typeface="宋体"/>
                         </a:rPr>
@@ -5572,7 +5572,7 @@
                           <a:solidFill>
                             <a:srgbClr val="000000"/>
                           </a:solidFill>
-                          <a:latin typeface="宋体"/>
+                          <a:latin typeface="Times New Roman"/>
                           <a:ea typeface="宋体"/>
                           <a:cs typeface="宋体"/>
                         </a:rPr>
@@ -5597,7 +5597,7 @@
                           <a:solidFill>
                             <a:srgbClr val="283E4E"/>
                           </a:solidFill>
-                          <a:latin typeface="黑体"/>
+                          <a:latin typeface="Arial"/>
                           <a:ea typeface="黑体"/>
                           <a:cs typeface="黑体"/>
                         </a:rPr>
@@ -5622,7 +5622,7 @@
                           <a:solidFill>
                             <a:srgbClr val="283E4E"/>
                           </a:solidFill>
-                          <a:latin typeface="黑体"/>
+                          <a:latin typeface="Arial"/>
                           <a:ea typeface="黑体"/>
                           <a:cs typeface="黑体"/>
                         </a:rPr>
@@ -5647,7 +5647,7 @@
                           <a:solidFill>
                             <a:srgbClr val="283E4E"/>
                           </a:solidFill>
-                          <a:latin typeface="黑体"/>
+                          <a:latin typeface="Arial"/>
                           <a:ea typeface="黑体"/>
                           <a:cs typeface="黑体"/>
                         </a:rPr>
@@ -5672,7 +5672,7 @@
                           <a:solidFill>
                             <a:srgbClr val="000000"/>
                           </a:solidFill>
-                          <a:latin typeface="宋体"/>
+                          <a:latin typeface="Times New Roman"/>
                           <a:ea typeface="宋体"/>
                           <a:cs typeface="宋体"/>
                         </a:rPr>
@@ -5699,7 +5699,7 @@
                           <a:solidFill>
                             <a:srgbClr val="000000"/>
                           </a:solidFill>
-                          <a:latin typeface="宋体"/>
+                          <a:latin typeface="Times New Roman"/>
                           <a:ea typeface="宋体"/>
                           <a:cs typeface="宋体"/>
                         </a:rPr>
@@ -5724,7 +5724,7 @@
                           <a:solidFill>
                             <a:srgbClr val="283E4E"/>
                           </a:solidFill>
-                          <a:latin typeface="黑体"/>
+                          <a:latin typeface="Arial"/>
                           <a:ea typeface="黑体"/>
                           <a:cs typeface="黑体"/>
                         </a:rPr>
@@ -5749,7 +5749,7 @@
                           <a:solidFill>
                             <a:srgbClr val="283E4E"/>
                           </a:solidFill>
-                          <a:latin typeface="黑体"/>
+                          <a:latin typeface="Arial"/>
                           <a:ea typeface="黑体"/>
                           <a:cs typeface="黑体"/>
                         </a:rPr>
@@ -5774,7 +5774,7 @@
                           <a:solidFill>
                             <a:srgbClr val="283E4E"/>
                           </a:solidFill>
-                          <a:latin typeface="黑体"/>
+                          <a:latin typeface="Arial"/>
                           <a:ea typeface="黑体"/>
                           <a:cs typeface="黑体"/>
                         </a:rPr>
@@ -5799,7 +5799,7 @@
                           <a:solidFill>
                             <a:srgbClr val="000000"/>
                           </a:solidFill>
-                          <a:latin typeface="宋体"/>
+                          <a:latin typeface="Times New Roman"/>
                           <a:ea typeface="宋体"/>
                           <a:cs typeface="宋体"/>
                         </a:rPr>
@@ -5884,19 +5884,19 @@
           <a:p>
             <a:pPr algn="l">
               <a:lnSpc>
-                <a:spcPct val="118000"/>
+                <a:spcPct val="120000"/>
               </a:lnSpc>
             </a:pPr>
             <a:r>
-              <a:rPr sz="1700">
+              <a:rPr sz="1800">
                 <a:solidFill>
                   <a:srgbClr val="000000"/>
                 </a:solidFill>
-                <a:latin typeface="宋体"/>
+                <a:latin typeface="Times New Roman"/>
                 <a:ea typeface="宋体"/>
                 <a:cs typeface="宋体"/>
               </a:rPr>
-              <a:t>表格页同样遵守字号下限与三色限制：表头主题色底白字，关键数值主题色，正文黑色。</a:t>
+              <a:t>表格页同样遵守字阶与三色限制：表头黑体白字，数值列主题色，正文宋体黑色，单元格一律 16pt 起。</a:t>
             </a:r>
           </a:p>
         </p:txBody>

--- a/skills/ppt-report-style/assets/example-slide.pptx
+++ b/skills/ppt-report-style/assets/example-slide.pptx
@@ -7,6 +7,13 @@
   <p:sldIdLst>
     <p:sldId id="256" r:id="rId7"/>
     <p:sldId id="257" r:id="rId9"/>
+    <p:sldId id="258" r:id="rId10"/>
+    <p:sldId id="259" r:id="rId11"/>
+    <p:sldId id="260" r:id="rId12"/>
+    <p:sldId id="261" r:id="rId13"/>
+    <p:sldId id="262" r:id="rId14"/>
+    <p:sldId id="263" r:id="rId15"/>
+    <p:sldId id="264" r:id="rId16"/>
   </p:sldIdLst>
   <p:sldSz cx="12858750" cy="7232650" type="screen4x3"/>
   <p:notesSz cx="6858000" cy="9144000"/>
@@ -126,14 +133,14 @@
               <c:strCache>
                 <c:ptCount val="1"/>
                 <c:pt idx="0">
-                  <c:v>s</c:v>
+                  <c:v>示例</c:v>
                 </c:pt>
               </c:strCache>
             </c:strRef>
           </c:tx>
           <c:spPr>
             <a:solidFill>
-              <a:srgbClr val="283E4E"/>
+              <a:srgbClr val="4A6577"/>
             </a:solidFill>
             <a:ln>
               <a:noFill/>
@@ -248,9 +255,7 @@
       </c:catAx>
       <c:valAx>
         <c:axId val="-2113994440"/>
-        <c:scaling>
-          <c:max val="80.0"/>
-        </c:scaling>
+        <c:scaling/>
         <c:delete val="1"/>
         <c:axPos val="l"/>
         <c:majorTickMark val="out"/>
@@ -259,12 +264,6 @@
         <c:crossAx val="-2068027336"/>
         <c:crosses val="autoZero"/>
       </c:valAx>
-      <c:spPr>
-        <a:noFill/>
-        <a:ln>
-          <a:noFill/>
-        </a:ln>
-      </c:spPr>
     </c:plotArea>
     <c:dispBlanksAs val="gap"/>
   </c:chart>
@@ -692,27 +691,7 @@
           <a:lstStyle/>
           <a:p>
             <a:r>
-              <a:t>【示例页 · 讲稿模板】</a:t>
-            </a:r>
-          </a:p>
-          <a:p>
-            <a:r>
-              <a:t>本页只是版式示例，所有数值都是虚构占位数据，不要当作真实结论引用。</a:t>
-            </a:r>
-          </a:p>
-          <a:p>
-            <a:r>
-              <a:t>讲解时按这个节奏走：先用一句话导语说明这一页要回答什么问题；再逐条讲三条实证，每条都是"指标名 + 数值 + 口径"写在同一句里；然后用一句判断收束，把数字背后的含义说清楚；最后用底部结论条点出证据强弱与边界。</a:t>
-            </a:r>
-          </a:p>
-          <a:p>
-            <a:r>
-              <a:t>如果换成真实数据，来源、统计口径、发布时间一律写进备注，不要放到版面上。</a:t>
-            </a:r>
-          </a:p>
-          <a:p>
-            <a:r>
-              <a:t>按这个节奏讲完大约需要一分钟。</a:t>
+              <a:t>【封面 · 示例备注】本页只演示版式：大标题、副标题与必要的标识位置，不承载结论。讲解时用十秒交代主题与场合，不需要把目录念一遍。真实项目里单位、姓名、日期放在固定位置，字号不小于 16pt；来源、口径和备答一律写进备注，不上片。封面不强制写长讲稿，按实际讲解需要写。【封面 · 示例备注】本页只演示版式：大标题、副标题与必要的标识位置，不承载结论。讲解时用十秒交代主题与场合，不需要把目录念一遍。真实项目里单位、姓名、日期放在固定位置，字号不小于 16pt；来源、口径和备答一律写进备注，不上片。封面不强制写长讲稿，按实际讲解需要写。</a:t>
             </a:r>
           </a:p>
         </p:txBody>
@@ -782,27 +761,497 @@
           <a:lstStyle/>
           <a:p>
             <a:r>
-              <a:t>【表格示例页 · 讲稿模板】</a:t>
-            </a:r>
-          </a:p>
-          <a:p>
-            <a:r>
-              <a:t>本页演示"强数据用表格"的样式：表头用主题色底白字，数值列用主题色，正文用黑色，交替行加浅底。</a:t>
-            </a:r>
-          </a:p>
-          <a:p>
-            <a:r>
-              <a:t>讲的时候不要逐格念表，而是先说这张表回答什么问题、结论是什么，再点出两三个关键数字的变化。</a:t>
-            </a:r>
-          </a:p>
-          <a:p>
-            <a:r>
-              <a:t>如果这个表格承载的是需要逐项核对的内容，就把口径与来源写进备注，必要时附一句"该列数据截至某年某月"。</a:t>
-            </a:r>
-          </a:p>
-          <a:p>
-            <a:r>
-              <a:t>表格页通常比图示页快，一分钟左右讲完。</a:t>
+              <a:t>【主图+侧栏示例 · 备注】本页只是版式示例，所有数值都是虚构占位数据，不要当作真实结论引用。讲解节奏：先用一句话说明这一页回答什么问题；再逐条讲三条实证，每条都是指标名、数值、口径写在同一句里；然后用一句判断收束。右栏的图片是实景位，图表是数据位，两者各承担一件事，不要互相替代。如果换成真实数据，来源、统计口径和发布时间一律写进备注。【主图+侧栏示例 · 备注】本页只是版式示例，所有数值都是虚构占位数据，不要当作真实结论引用。讲解节奏：先用一句话说明这一页回答什么问题；再逐条讲三条实证，每条都是指标名、数值、口径写在同一句里；然后用一句判断收束。右栏的图片是实景位，图表是数据位，两者各承担一件事，不要互相替代。如果换成真实数据，来源、统计口径和发布时间一律写进备注。</a:t>
+            </a:r>
+          </a:p>
+        </p:txBody>
+      </p:sp>
+      <p:sp>
+        <p:nvSpPr>
+          <p:cNvPr id="4" name="Slide Number Placeholder 3"/>
+          <p:cNvSpPr>
+            <a:spLocks noGrp="1"/>
+          </p:cNvSpPr>
+          <p:nvPr>
+            <p:ph type="sldNum" idx="5" sz="quarter"/>
+          </p:nvPr>
+        </p:nvSpPr>
+        <p:spPr/>
+      </p:sp>
+    </p:spTree>
+  </p:cSld>
+  <p:clrMapOvr>
+    <a:masterClrMapping/>
+  </p:clrMapOvr>
+</p:notes>
+</file>
+
+<file path=ppt/notesSlides/notesSlide3.xml><?xml version="1.0" encoding="utf-8"?>
+<p:notes xmlns:a="http://schemas.openxmlformats.org/drawingml/2006/main" xmlns:p="http://schemas.openxmlformats.org/presentationml/2006/main" xmlns:r="http://schemas.openxmlformats.org/officeDocument/2006/relationships">
+  <p:cSld>
+    <p:spTree>
+      <p:nvGrpSpPr>
+        <p:cNvPr id="1" name=""/>
+        <p:cNvGrpSpPr/>
+        <p:nvPr/>
+      </p:nvGrpSpPr>
+      <p:grpSpPr>
+        <a:xfrm>
+          <a:off x="0" y="0"/>
+          <a:ext cx="0" cy="0"/>
+          <a:chOff x="0" y="0"/>
+          <a:chExt cx="0" cy="0"/>
+        </a:xfrm>
+      </p:grpSpPr>
+      <p:sp>
+        <p:nvSpPr>
+          <p:cNvPr id="2" name="Slide Image Placeholder 1"/>
+          <p:cNvSpPr>
+            <a:spLocks noGrp="1"/>
+          </p:cNvSpPr>
+          <p:nvPr>
+            <p:ph type="sldImg" idx="2"/>
+          </p:nvPr>
+        </p:nvSpPr>
+        <p:spPr/>
+      </p:sp>
+      <p:sp>
+        <p:nvSpPr>
+          <p:cNvPr id="3" name="Notes Placeholder 2"/>
+          <p:cNvSpPr>
+            <a:spLocks noGrp="1"/>
+          </p:cNvSpPr>
+          <p:nvPr>
+            <p:ph type="body" idx="3" sz="quarter"/>
+          </p:nvPr>
+        </p:nvSpPr>
+        <p:spPr/>
+        <p:txBody>
+          <a:bodyPr/>
+          <a:lstStyle/>
+          <a:p>
+            <a:r>
+              <a:t>【表格示例 · 备注】本页演示强数据用表格：表头用主题色底白字，数值列用主题色，正文黑色，交替行加浅底，重点行用辅助色浅底标示。讲的时候不要逐格念表，先说这张表回答什么问题、结论是什么，再点两三个关键数字的变化。如果表格承担逐项核对，就把口径与来源写进备注，必要时补一句数据截止月份。【表格示例 · 备注】本页演示强数据用表格：表头用主题色底白字，数值列用主题色，正文黑色，交替行加浅底，重点行用辅助色浅底标示。讲的时候不要逐格念表，先说这张表回答什么问题、结论是什么，再点两三个关键数字的变化。如果表格承担逐项核对，就把口径与来源写进备注，必要时补一句数据截止月份。</a:t>
+            </a:r>
+          </a:p>
+        </p:txBody>
+      </p:sp>
+      <p:sp>
+        <p:nvSpPr>
+          <p:cNvPr id="4" name="Slide Number Placeholder 3"/>
+          <p:cNvSpPr>
+            <a:spLocks noGrp="1"/>
+          </p:cNvSpPr>
+          <p:nvPr>
+            <p:ph type="sldNum" idx="5" sz="quarter"/>
+          </p:nvPr>
+        </p:nvSpPr>
+        <p:spPr/>
+      </p:sp>
+    </p:spTree>
+  </p:cSld>
+  <p:clrMapOvr>
+    <a:masterClrMapping/>
+  </p:clrMapOvr>
+</p:notes>
+</file>
+
+<file path=ppt/notesSlides/notesSlide4.xml><?xml version="1.0" encoding="utf-8"?>
+<p:notes xmlns:a="http://schemas.openxmlformats.org/drawingml/2006/main" xmlns:p="http://schemas.openxmlformats.org/presentationml/2006/main" xmlns:r="http://schemas.openxmlformats.org/officeDocument/2006/relationships">
+  <p:cSld>
+    <p:spTree>
+      <p:nvGrpSpPr>
+        <p:cNvPr id="1" name=""/>
+        <p:cNvGrpSpPr/>
+        <p:nvPr/>
+      </p:nvGrpSpPr>
+      <p:grpSpPr>
+        <a:xfrm>
+          <a:off x="0" y="0"/>
+          <a:ext cx="0" cy="0"/>
+          <a:chOff x="0" y="0"/>
+          <a:chExt cx="0" cy="0"/>
+        </a:xfrm>
+      </p:grpSpPr>
+      <p:sp>
+        <p:nvSpPr>
+          <p:cNvPr id="2" name="Slide Image Placeholder 1"/>
+          <p:cNvSpPr>
+            <a:spLocks noGrp="1"/>
+          </p:cNvSpPr>
+          <p:nvPr>
+            <p:ph type="sldImg" idx="2"/>
+          </p:nvPr>
+        </p:nvSpPr>
+        <p:spPr/>
+      </p:sp>
+      <p:sp>
+        <p:nvSpPr>
+          <p:cNvPr id="3" name="Notes Placeholder 2"/>
+          <p:cNvSpPr>
+            <a:spLocks noGrp="1"/>
+          </p:cNvSpPr>
+          <p:nvPr>
+            <p:ph type="body" idx="3" sz="quarter"/>
+          </p:nvPr>
+        </p:nvSpPr>
+        <p:spPr/>
+        <p:txBody>
+          <a:bodyPr/>
+          <a:lstStyle/>
+          <a:p>
+            <a:r>
+              <a:t>【对比页 · 备注】左右双栏适合两组并列信息，中缝的平行四边形是关系标记，不是装饰。讲解时先给对照的标准，再逐条比，最后落到一句判断。对比页不要用箭头硬造因果关系，因果关系应该放到流程页或因果图里。【对比页 · 备注】左右双栏适合两组并列信息，中缝的平行四边形是关系标记，不是装饰。讲解时先给对照的标准，再逐条比，最后落到一句判断。对比页不要用箭头硬造因果关系，因果关系应该放到流程页或因果图里。</a:t>
+            </a:r>
+          </a:p>
+        </p:txBody>
+      </p:sp>
+      <p:sp>
+        <p:nvSpPr>
+          <p:cNvPr id="4" name="Slide Number Placeholder 3"/>
+          <p:cNvSpPr>
+            <a:spLocks noGrp="1"/>
+          </p:cNvSpPr>
+          <p:nvPr>
+            <p:ph type="sldNum" idx="5" sz="quarter"/>
+          </p:nvPr>
+        </p:nvSpPr>
+        <p:spPr/>
+      </p:sp>
+    </p:spTree>
+  </p:cSld>
+  <p:clrMapOvr>
+    <a:masterClrMapping/>
+  </p:clrMapOvr>
+</p:notes>
+</file>
+
+<file path=ppt/notesSlides/notesSlide5.xml><?xml version="1.0" encoding="utf-8"?>
+<p:notes xmlns:a="http://schemas.openxmlformats.org/drawingml/2006/main" xmlns:p="http://schemas.openxmlformats.org/presentationml/2006/main" xmlns:r="http://schemas.openxmlformats.org/officeDocument/2006/relationships">
+  <p:cSld>
+    <p:spTree>
+      <p:nvGrpSpPr>
+        <p:cNvPr id="1" name=""/>
+        <p:cNvGrpSpPr/>
+        <p:nvPr/>
+      </p:nvGrpSpPr>
+      <p:grpSpPr>
+        <a:xfrm>
+          <a:off x="0" y="0"/>
+          <a:ext cx="0" cy="0"/>
+          <a:chOff x="0" y="0"/>
+          <a:chExt cx="0" cy="0"/>
+        </a:xfrm>
+      </p:grpSpPr>
+      <p:sp>
+        <p:nvSpPr>
+          <p:cNvPr id="2" name="Slide Image Placeholder 1"/>
+          <p:cNvSpPr>
+            <a:spLocks noGrp="1"/>
+          </p:cNvSpPr>
+          <p:nvPr>
+            <p:ph type="sldImg" idx="2"/>
+          </p:nvPr>
+        </p:nvSpPr>
+        <p:spPr/>
+      </p:sp>
+      <p:sp>
+        <p:nvSpPr>
+          <p:cNvPr id="3" name="Notes Placeholder 2"/>
+          <p:cNvSpPr>
+            <a:spLocks noGrp="1"/>
+          </p:cNvSpPr>
+          <p:nvPr>
+            <p:ph type="body" idx="3" sz="quarter"/>
+          </p:nvPr>
+        </p:nvSpPr>
+        <p:spPr/>
+        <p:txBody>
+          <a:bodyPr/>
+          <a:lstStyle/>
+          <a:p>
+            <a:r>
+              <a:t>【流程页 · 备注】本页演示流程关系：箭头形表达先后顺序，圆形序号标记步骤，上导语下结论形成闭环。讲的时候按步骤顺序走，每一步只说一件事，最后用结论句收束。如果步骤超过五步，先考虑拆成两页，不要靠缩小字号硬塞。【流程页 · 备注】本页演示流程关系：箭头形表达先后顺序，圆形序号标记步骤，上导语下结论形成闭环。讲的时候按步骤顺序走，每一步只说一件事，最后用结论句收束。如果步骤超过五步，先考虑拆成两页，不要靠缩小字号硬塞。</a:t>
+            </a:r>
+          </a:p>
+        </p:txBody>
+      </p:sp>
+      <p:sp>
+        <p:nvSpPr>
+          <p:cNvPr id="4" name="Slide Number Placeholder 3"/>
+          <p:cNvSpPr>
+            <a:spLocks noGrp="1"/>
+          </p:cNvSpPr>
+          <p:nvPr>
+            <p:ph type="sldNum" idx="5" sz="quarter"/>
+          </p:nvPr>
+        </p:nvSpPr>
+        <p:spPr/>
+      </p:sp>
+    </p:spTree>
+  </p:cSld>
+  <p:clrMapOvr>
+    <a:masterClrMapping/>
+  </p:clrMapOvr>
+</p:notes>
+</file>
+
+<file path=ppt/notesSlides/notesSlide6.xml><?xml version="1.0" encoding="utf-8"?>
+<p:notes xmlns:a="http://schemas.openxmlformats.org/drawingml/2006/main" xmlns:p="http://schemas.openxmlformats.org/presentationml/2006/main" xmlns:r="http://schemas.openxmlformats.org/officeDocument/2006/relationships">
+  <p:cSld>
+    <p:spTree>
+      <p:nvGrpSpPr>
+        <p:cNvPr id="1" name=""/>
+        <p:cNvGrpSpPr/>
+        <p:nvPr/>
+      </p:nvGrpSpPr>
+      <p:grpSpPr>
+        <a:xfrm>
+          <a:off x="0" y="0"/>
+          <a:ext cx="0" cy="0"/>
+          <a:chOff x="0" y="0"/>
+          <a:chExt cx="0" cy="0"/>
+        </a:xfrm>
+      </p:grpSpPr>
+      <p:sp>
+        <p:nvSpPr>
+          <p:cNvPr id="2" name="Slide Image Placeholder 1"/>
+          <p:cNvSpPr>
+            <a:spLocks noGrp="1"/>
+          </p:cNvSpPr>
+          <p:nvPr>
+            <p:ph type="sldImg" idx="2"/>
+          </p:nvPr>
+        </p:nvSpPr>
+        <p:spPr/>
+      </p:sp>
+      <p:sp>
+        <p:nvSpPr>
+          <p:cNvPr id="3" name="Notes Placeholder 2"/>
+          <p:cNvSpPr>
+            <a:spLocks noGrp="1"/>
+          </p:cNvSpPr>
+          <p:nvPr>
+            <p:ph type="body" idx="3" sz="quarter"/>
+          </p:nvPr>
+        </p:nvSpPr>
+        <p:spPr/>
+        <p:txBody>
+          <a:bodyPr/>
+          <a:lstStyle/>
+          <a:p>
+            <a:r>
+              <a:t>【时间线页 · 备注】时间关系用一条主轴表达，节点在上、说明在下，视觉上能看出先后。讲的时候只强调真正改变方向的两三个事件，其余可以一句带过。时间线不要用来堆日常进度，那样等于把待办清单搬上大屏。【时间线页 · 备注】时间关系用一条主轴表达，节点在上、说明在下，视觉上能看出先后。讲的时候只强调真正改变方向的两三个事件，其余可以一句带过。时间线不要用来堆日常进度，那样等于把待办清单搬上大屏。</a:t>
+            </a:r>
+          </a:p>
+        </p:txBody>
+      </p:sp>
+      <p:sp>
+        <p:nvSpPr>
+          <p:cNvPr id="4" name="Slide Number Placeholder 3"/>
+          <p:cNvSpPr>
+            <a:spLocks noGrp="1"/>
+          </p:cNvSpPr>
+          <p:nvPr>
+            <p:ph type="sldNum" idx="5" sz="quarter"/>
+          </p:nvPr>
+        </p:nvSpPr>
+        <p:spPr/>
+      </p:sp>
+    </p:spTree>
+  </p:cSld>
+  <p:clrMapOvr>
+    <a:masterClrMapping/>
+  </p:clrMapOvr>
+</p:notes>
+</file>
+
+<file path=ppt/notesSlides/notesSlide7.xml><?xml version="1.0" encoding="utf-8"?>
+<p:notes xmlns:a="http://schemas.openxmlformats.org/drawingml/2006/main" xmlns:p="http://schemas.openxmlformats.org/presentationml/2006/main" xmlns:r="http://schemas.openxmlformats.org/officeDocument/2006/relationships">
+  <p:cSld>
+    <p:spTree>
+      <p:nvGrpSpPr>
+        <p:cNvPr id="1" name=""/>
+        <p:cNvGrpSpPr/>
+        <p:nvPr/>
+      </p:nvGrpSpPr>
+      <p:grpSpPr>
+        <a:xfrm>
+          <a:off x="0" y="0"/>
+          <a:ext cx="0" cy="0"/>
+          <a:chOff x="0" y="0"/>
+          <a:chExt cx="0" cy="0"/>
+        </a:xfrm>
+      </p:grpSpPr>
+      <p:sp>
+        <p:nvSpPr>
+          <p:cNvPr id="2" name="Slide Image Placeholder 1"/>
+          <p:cNvSpPr>
+            <a:spLocks noGrp="1"/>
+          </p:cNvSpPr>
+          <p:nvPr>
+            <p:ph type="sldImg" idx="2"/>
+          </p:nvPr>
+        </p:nvSpPr>
+        <p:spPr/>
+      </p:sp>
+      <p:sp>
+        <p:nvSpPr>
+          <p:cNvPr id="3" name="Notes Placeholder 2"/>
+          <p:cNvSpPr>
+            <a:spLocks noGrp="1"/>
+          </p:cNvSpPr>
+          <p:nvPr>
+            <p:ph type="body" idx="3" sz="quarter"/>
+          </p:nvPr>
+        </p:nvSpPr>
+        <p:spPr/>
+        <p:txBody>
+          <a:bodyPr/>
+          <a:lstStyle/>
+          <a:p>
+            <a:r>
+              <a:t>【层级页 · 备注】层级关系用宽度变化表达：越往上越概括，越往下越具体。讲的时候先给上层结论，再往下拆，最后落到具体实证。同级信息保持同宽同高，不要用字号大小暗示层级，否则读者会先去猜哪个更重要。【层级页 · 备注】层级关系用宽度变化表达：越往上越概括，越往下越具体。讲的时候先给上层结论，再往下拆，最后落到具体实证。同级信息保持同宽同高，不要用字号大小暗示层级，否则读者会先去猜哪个更重要。</a:t>
+            </a:r>
+          </a:p>
+        </p:txBody>
+      </p:sp>
+      <p:sp>
+        <p:nvSpPr>
+          <p:cNvPr id="4" name="Slide Number Placeholder 3"/>
+          <p:cNvSpPr>
+            <a:spLocks noGrp="1"/>
+          </p:cNvSpPr>
+          <p:nvPr>
+            <p:ph type="sldNum" idx="5" sz="quarter"/>
+          </p:nvPr>
+        </p:nvSpPr>
+        <p:spPr/>
+      </p:sp>
+    </p:spTree>
+  </p:cSld>
+  <p:clrMapOvr>
+    <a:masterClrMapping/>
+  </p:clrMapOvr>
+</p:notes>
+</file>
+
+<file path=ppt/notesSlides/notesSlide8.xml><?xml version="1.0" encoding="utf-8"?>
+<p:notes xmlns:a="http://schemas.openxmlformats.org/drawingml/2006/main" xmlns:p="http://schemas.openxmlformats.org/presentationml/2006/main" xmlns:r="http://schemas.openxmlformats.org/officeDocument/2006/relationships">
+  <p:cSld>
+    <p:spTree>
+      <p:nvGrpSpPr>
+        <p:cNvPr id="1" name=""/>
+        <p:cNvGrpSpPr/>
+        <p:nvPr/>
+      </p:nvGrpSpPr>
+      <p:grpSpPr>
+        <a:xfrm>
+          <a:off x="0" y="0"/>
+          <a:ext cx="0" cy="0"/>
+          <a:chOff x="0" y="0"/>
+          <a:chExt cx="0" cy="0"/>
+        </a:xfrm>
+      </p:grpSpPr>
+      <p:sp>
+        <p:nvSpPr>
+          <p:cNvPr id="2" name="Slide Image Placeholder 1"/>
+          <p:cNvSpPr>
+            <a:spLocks noGrp="1"/>
+          </p:cNvSpPr>
+          <p:nvPr>
+            <p:ph type="sldImg" idx="2"/>
+          </p:nvPr>
+        </p:nvSpPr>
+        <p:spPr/>
+      </p:sp>
+      <p:sp>
+        <p:nvSpPr>
+          <p:cNvPr id="3" name="Notes Placeholder 2"/>
+          <p:cNvSpPr>
+            <a:spLocks noGrp="1"/>
+          </p:cNvSpPr>
+          <p:nvPr>
+            <p:ph type="body" idx="3" sz="quarter"/>
+          </p:nvPr>
+        </p:nvSpPr>
+        <p:spPr/>
+        <p:txBody>
+          <a:bodyPr/>
+          <a:lstStyle/>
+          <a:p>
+            <a:r>
+              <a:t>【循环页 · 备注】闭环、迭代、聚合关系用中心圆加周边节点表达。讲的时候先给中心概念的准确定义，再说明每个节点做什么，最后点出回路的价值：回到起点时标准或能力已经变化。如果四个节点之间其实是先后关系，应该改成流程页或时间线，而不是画成闭环。【循环页 · 备注】闭环、迭代、聚合关系用中心圆加周边节点表达。讲的时候先给中心概念的准确定义，再说明每个节点做什么，最后点出回路的价值：回到起点时标准或能力已经变化。如果四个节点之间其实是先后关系，应该改成流程页或时间线，而不是画成闭环。</a:t>
+            </a:r>
+          </a:p>
+        </p:txBody>
+      </p:sp>
+      <p:sp>
+        <p:nvSpPr>
+          <p:cNvPr id="4" name="Slide Number Placeholder 3"/>
+          <p:cNvSpPr>
+            <a:spLocks noGrp="1"/>
+          </p:cNvSpPr>
+          <p:nvPr>
+            <p:ph type="sldNum" idx="5" sz="quarter"/>
+          </p:nvPr>
+        </p:nvSpPr>
+        <p:spPr/>
+      </p:sp>
+    </p:spTree>
+  </p:cSld>
+  <p:clrMapOvr>
+    <a:masterClrMapping/>
+  </p:clrMapOvr>
+</p:notes>
+</file>
+
+<file path=ppt/notesSlides/notesSlide9.xml><?xml version="1.0" encoding="utf-8"?>
+<p:notes xmlns:a="http://schemas.openxmlformats.org/drawingml/2006/main" xmlns:p="http://schemas.openxmlformats.org/presentationml/2006/main" xmlns:r="http://schemas.openxmlformats.org/officeDocument/2006/relationships">
+  <p:cSld>
+    <p:spTree>
+      <p:nvGrpSpPr>
+        <p:cNvPr id="1" name=""/>
+        <p:cNvGrpSpPr/>
+        <p:nvPr/>
+      </p:nvGrpSpPr>
+      <p:grpSpPr>
+        <a:xfrm>
+          <a:off x="0" y="0"/>
+          <a:ext cx="0" cy="0"/>
+          <a:chOff x="0" y="0"/>
+          <a:chExt cx="0" cy="0"/>
+        </a:xfrm>
+      </p:grpSpPr>
+      <p:sp>
+        <p:nvSpPr>
+          <p:cNvPr id="2" name="Slide Image Placeholder 1"/>
+          <p:cNvSpPr>
+            <a:spLocks noGrp="1"/>
+          </p:cNvSpPr>
+          <p:nvPr>
+            <p:ph type="sldImg" idx="2"/>
+          </p:nvPr>
+        </p:nvSpPr>
+        <p:spPr/>
+      </p:sp>
+      <p:sp>
+        <p:nvSpPr>
+          <p:cNvPr id="3" name="Notes Placeholder 2"/>
+          <p:cNvSpPr>
+            <a:spLocks noGrp="1"/>
+          </p:cNvSpPr>
+          <p:nvPr>
+            <p:ph type="body" idx="3" sz="quarter"/>
+          </p:nvPr>
+        </p:nvSpPr>
+        <p:spPr/>
+        <p:txBody>
+          <a:bodyPr/>
+          <a:lstStyle/>
+          <a:p>
+            <a:r>
+              <a:t>【纯文字页 · 备注】这一页演示纯文字页的合规做法：允许不加图形和配图，但必须有字号层级、留白和对齐。讲的时候放慢语速，把这句判断说完整，不要急着翻页。整套演示里纯文字页占比建议不超过两成，超出就说明多数页面没有把关系画出来。【纯文字页 · 备注】这一页演示纯文字页的合规做法：允许不加图形和配图，但必须有字号层级、留白和对齐。讲的时候放慢语速，把这句判断说完整，不要急着翻页。整套演示里纯文字页占比建议不超过两成，超出就说明多数页面没有把关系画出来。</a:t>
             </a:r>
           </a:p>
         </p:txBody>
@@ -3810,178 +4259,14 @@
       <p:grpSpPr/>
       <p:sp>
         <p:nvSpPr>
-          <p:cNvPr id="2" name="TextBox 1"/>
-          <p:cNvSpPr txBox="1"/>
-          <p:nvPr/>
-        </p:nvSpPr>
-        <p:spPr>
-          <a:xfrm>
-            <a:off x="5852160" y="219456"/>
-            <a:ext cx="5577840" cy="310896"/>
-          </a:xfrm>
-          <a:prstGeom prst="rect">
-            <a:avLst/>
-          </a:prstGeom>
-          <a:noFill/>
-        </p:spPr>
-        <p:txBody>
-          <a:bodyPr wrap="square" anchor="t" lIns="0" rIns="0" tIns="0" bIns="0">
-            <a:spAutoFit/>
-          </a:bodyPr>
-          <a:lstStyle/>
-          <a:p>
-            <a:pPr algn="r">
-              <a:lnSpc>
-                <a:spcPct val="100000"/>
-              </a:lnSpc>
-            </a:pPr>
-            <a:r>
-              <a:rPr sz="1600">
-                <a:solidFill>
-                  <a:srgbClr val="000000"/>
-                </a:solidFill>
-                <a:latin typeface="Times New Roman"/>
-                <a:ea typeface="宋体"/>
-                <a:cs typeface="宋体"/>
-              </a:rPr>
-              <a:t>示例 · 汇报页骨架</a:t>
-            </a:r>
-          </a:p>
-        </p:txBody>
-      </p:sp>
-      <p:sp>
-        <p:nvSpPr>
-          <p:cNvPr id="3" name="TextBox 2"/>
-          <p:cNvSpPr txBox="1"/>
-          <p:nvPr/>
-        </p:nvSpPr>
-        <p:spPr>
-          <a:xfrm>
-            <a:off x="11521440" y="219456"/>
-            <a:ext cx="832104" cy="310896"/>
-          </a:xfrm>
-          <a:prstGeom prst="rect">
-            <a:avLst/>
-          </a:prstGeom>
-          <a:noFill/>
-        </p:spPr>
-        <p:txBody>
-          <a:bodyPr wrap="square" anchor="t" lIns="0" rIns="0" tIns="0" bIns="0">
-            <a:spAutoFit/>
-          </a:bodyPr>
-          <a:lstStyle/>
-          <a:p>
-            <a:pPr algn="r">
-              <a:lnSpc>
-                <a:spcPct val="100000"/>
-              </a:lnSpc>
-            </a:pPr>
-            <a:r>
-              <a:rPr sz="1600">
-                <a:solidFill>
-                  <a:srgbClr val="283E4E"/>
-                </a:solidFill>
-                <a:latin typeface="Arial"/>
-                <a:ea typeface="黑体"/>
-                <a:cs typeface="黑体"/>
-              </a:rPr>
-              <a:t>01</a:t>
-            </a:r>
-          </a:p>
-        </p:txBody>
-      </p:sp>
-      <p:sp>
-        <p:nvSpPr>
-          <p:cNvPr id="4" name="TextBox 3"/>
-          <p:cNvSpPr txBox="1"/>
-          <p:nvPr/>
-        </p:nvSpPr>
-        <p:spPr>
-          <a:xfrm>
-            <a:off x="502920" y="530352"/>
-            <a:ext cx="11850624" cy="603504"/>
-          </a:xfrm>
-          <a:prstGeom prst="rect">
-            <a:avLst/>
-          </a:prstGeom>
-          <a:noFill/>
-        </p:spPr>
-        <p:txBody>
-          <a:bodyPr wrap="square" anchor="t" lIns="0" rIns="0" tIns="0" bIns="0">
-            <a:spAutoFit/>
-          </a:bodyPr>
-          <a:lstStyle/>
-          <a:p>
-            <a:pPr algn="l">
-              <a:lnSpc>
-                <a:spcPct val="100000"/>
-              </a:lnSpc>
-            </a:pPr>
-            <a:r>
-              <a:rPr sz="3000">
-                <a:solidFill>
-                  <a:srgbClr val="283E4E"/>
-                </a:solidFill>
-                <a:latin typeface="Arial"/>
-                <a:ea typeface="黑体"/>
-                <a:cs typeface="黑体"/>
-              </a:rPr>
-              <a:t>示例页：左文右图与几何记忆点</a:t>
-            </a:r>
-          </a:p>
-        </p:txBody>
-      </p:sp>
-      <p:sp>
-        <p:nvSpPr>
-          <p:cNvPr id="5" name="TextBox 4"/>
-          <p:cNvSpPr txBox="1"/>
-          <p:nvPr/>
-        </p:nvSpPr>
-        <p:spPr>
-          <a:xfrm>
-            <a:off x="502920" y="1152144"/>
-            <a:ext cx="11850624" cy="329184"/>
-          </a:xfrm>
-          <a:prstGeom prst="rect">
-            <a:avLst/>
-          </a:prstGeom>
-          <a:noFill/>
-        </p:spPr>
-        <p:txBody>
-          <a:bodyPr wrap="square" anchor="t" lIns="0" rIns="0" tIns="0" bIns="0">
-            <a:spAutoFit/>
-          </a:bodyPr>
-          <a:lstStyle/>
-          <a:p>
-            <a:pPr algn="l">
-              <a:lnSpc>
-                <a:spcPct val="100000"/>
-              </a:lnSpc>
-            </a:pPr>
-            <a:r>
-              <a:rPr sz="2000">
-                <a:solidFill>
-                  <a:srgbClr val="000000"/>
-                </a:solidFill>
-                <a:latin typeface="Times New Roman"/>
-                <a:ea typeface="宋体"/>
-                <a:cs typeface="宋体"/>
-              </a:rPr>
-              <a:t>本示例仅演示版式与视觉规范，数值均为虚构占位数据。</a:t>
-            </a:r>
-          </a:p>
-        </p:txBody>
-      </p:sp>
-      <p:sp>
-        <p:nvSpPr>
-          <p:cNvPr id="6" name="Rectangle 5"/>
+          <p:cNvPr id="2" name="Rectangle 1"/>
           <p:cNvSpPr/>
           <p:nvPr/>
         </p:nvSpPr>
         <p:spPr>
           <a:xfrm>
-            <a:off x="502920" y="1554480"/>
-            <a:ext cx="11850624" cy="10972"/>
+            <a:off x="502920" y="1188720"/>
+            <a:ext cx="41148" cy="1325880"/>
           </a:xfrm>
           <a:prstGeom prst="rect">
             <a:avLst/>
@@ -4016,14 +4301,162 @@
       </p:sp>
       <p:sp>
         <p:nvSpPr>
+          <p:cNvPr id="3" name="TextBox 2"/>
+          <p:cNvSpPr txBox="1"/>
+          <p:nvPr/>
+        </p:nvSpPr>
+        <p:spPr>
+          <a:xfrm>
+            <a:off x="731520" y="1234440"/>
+            <a:ext cx="11247120" cy="731520"/>
+          </a:xfrm>
+          <a:prstGeom prst="rect">
+            <a:avLst/>
+          </a:prstGeom>
+          <a:noFill/>
+        </p:spPr>
+        <p:txBody>
+          <a:bodyPr wrap="square" anchor="t" lIns="0" rIns="0" tIns="0" bIns="0">
+            <a:spAutoFit/>
+          </a:bodyPr>
+          <a:lstStyle/>
+          <a:p>
+            <a:pPr algn="l">
+              <a:lnSpc>
+                <a:spcPct val="100000"/>
+              </a:lnSpc>
+            </a:pPr>
+            <a:r>
+              <a:rPr sz="4400">
+                <a:solidFill>
+                  <a:srgbClr val="283E4E"/>
+                </a:solidFill>
+                <a:latin typeface="Arial"/>
+                <a:ea typeface="黑体"/>
+                <a:cs typeface="黑体"/>
+              </a:rPr>
+              <a:t>示例演示：把内容关系画对</a:t>
+            </a:r>
+          </a:p>
+        </p:txBody>
+      </p:sp>
+      <p:sp>
+        <p:nvSpPr>
+          <p:cNvPr id="4" name="TextBox 3"/>
+          <p:cNvSpPr txBox="1"/>
+          <p:nvPr/>
+        </p:nvSpPr>
+        <p:spPr>
+          <a:xfrm>
+            <a:off x="731520" y="2011680"/>
+            <a:ext cx="11247120" cy="402336"/>
+          </a:xfrm>
+          <a:prstGeom prst="rect">
+            <a:avLst/>
+          </a:prstGeom>
+          <a:noFill/>
+        </p:spPr>
+        <p:txBody>
+          <a:bodyPr wrap="square" anchor="t" lIns="0" rIns="0" tIns="0" bIns="0">
+            <a:spAutoFit/>
+          </a:bodyPr>
+          <a:lstStyle/>
+          <a:p>
+            <a:pPr algn="l">
+              <a:lnSpc>
+                <a:spcPct val="100000"/>
+              </a:lnSpc>
+            </a:pPr>
+            <a:r>
+              <a:rPr sz="2000">
+                <a:solidFill>
+                  <a:srgbClr val="000000"/>
+                </a:solidFill>
+                <a:latin typeface="Times New Roman"/>
+                <a:ea typeface="宋体"/>
+                <a:cs typeface="宋体"/>
+              </a:rPr>
+              <a:t>副标题占位：这是一份纯占位数据的版式示例，不含任何真实结论。</a:t>
+            </a:r>
+          </a:p>
+        </p:txBody>
+      </p:sp>
+      <p:sp>
+        <p:nvSpPr>
+          <p:cNvPr id="5" name="TextBox 4"/>
+          <p:cNvSpPr txBox="1"/>
+          <p:nvPr/>
+        </p:nvSpPr>
+        <p:spPr>
+          <a:xfrm>
+            <a:off x="731520" y="2560320"/>
+            <a:ext cx="11247120" cy="310896"/>
+          </a:xfrm>
+          <a:prstGeom prst="rect">
+            <a:avLst/>
+          </a:prstGeom>
+          <a:noFill/>
+        </p:spPr>
+        <p:txBody>
+          <a:bodyPr wrap="square" anchor="t" lIns="0" rIns="0" tIns="0" bIns="0">
+            <a:spAutoFit/>
+          </a:bodyPr>
+          <a:lstStyle/>
+          <a:p>
+            <a:pPr algn="l">
+              <a:lnSpc>
+                <a:spcPct val="100000"/>
+              </a:lnSpc>
+            </a:pPr>
+            <a:r>
+              <a:rPr sz="1600">
+                <a:solidFill>
+                  <a:srgbClr val="4A6577"/>
+                </a:solidFill>
+                <a:latin typeface="Times New Roman"/>
+                <a:ea typeface="宋体"/>
+                <a:cs typeface="宋体"/>
+              </a:rPr>
+              <a:t>示例单位 · 示例作者 · 示例日期</a:t>
+            </a:r>
+          </a:p>
+        </p:txBody>
+      </p:sp>
+      <p:pic>
+        <p:nvPicPr>
+          <p:cNvPr id="6" name="Picture 5" descr="placeholder-photo.png"/>
+          <p:cNvPicPr>
+            <a:picLocks noChangeAspect="1"/>
+          </p:cNvPicPr>
+          <p:nvPr/>
+        </p:nvPicPr>
+        <p:blipFill>
+          <a:blip r:embed="rId2"/>
+          <a:srcRect t="2688" b="2688"/>
+          <a:stretch>
+            <a:fillRect/>
+          </a:stretch>
+        </p:blipFill>
+        <p:spPr>
+          <a:xfrm>
+            <a:off x="502920" y="3108960"/>
+            <a:ext cx="5669280" cy="3017520"/>
+          </a:xfrm>
+          <a:prstGeom prst="rect">
+            <a:avLst/>
+          </a:prstGeom>
+        </p:spPr>
+      </p:pic>
+      <p:sp>
+        <p:nvSpPr>
           <p:cNvPr id="7" name="Rectangle 6"/>
           <p:cNvSpPr/>
           <p:nvPr/>
         </p:nvSpPr>
         <p:spPr>
           <a:xfrm>
-            <a:off x="502920" y="1664208"/>
-            <a:ext cx="6492240" cy="960120"/>
+            <a:off x="6446520" y="3108960"/>
+            <a:ext cx="5907024" cy="3017520"/>
           </a:xfrm>
           <a:prstGeom prst="rect">
             <a:avLst/>
@@ -4064,8 +4497,8 @@
         </p:nvSpPr>
         <p:spPr>
           <a:xfrm>
-            <a:off x="502920" y="1664208"/>
-            <a:ext cx="41148" cy="960120"/>
+            <a:off x="6446520" y="3108960"/>
+            <a:ext cx="41148" cy="3017520"/>
           </a:xfrm>
           <a:prstGeom prst="rect">
             <a:avLst/>
@@ -4106,8 +4539,8 @@
         </p:nvSpPr>
         <p:spPr>
           <a:xfrm>
-            <a:off x="694944" y="1755648"/>
-            <a:ext cx="6163056" cy="777240"/>
+            <a:off x="6675120" y="3291840"/>
+            <a:ext cx="5449824" cy="2651760"/>
           </a:xfrm>
           <a:prstGeom prst="rect">
             <a:avLst/>
@@ -4122,7 +4555,7 @@
           <a:p>
             <a:pPr algn="l">
               <a:lnSpc>
-                <a:spcPct val="120000"/>
+                <a:spcPct val="125000"/>
               </a:lnSpc>
             </a:pPr>
             <a:r>
@@ -4134,798 +4567,7 @@
                 <a:ea typeface="楷体"/>
                 <a:cs typeface="楷体"/>
               </a:rPr>
-              <a:t>这是导语块：演示位置、字号、行距与浅底强调样式，文字内容为占位示意。</a:t>
-            </a:r>
-          </a:p>
-        </p:txBody>
-      </p:sp>
-      <p:sp>
-        <p:nvSpPr>
-          <p:cNvPr id="10" name="Rectangle 9"/>
-          <p:cNvSpPr/>
-          <p:nvPr/>
-        </p:nvSpPr>
-        <p:spPr>
-          <a:xfrm>
-            <a:off x="502920" y="2715768"/>
-            <a:ext cx="41148" cy="658368"/>
-          </a:xfrm>
-          <a:prstGeom prst="rect">
-            <a:avLst/>
-          </a:prstGeom>
-          <a:solidFill>
-            <a:srgbClr val="283E4E"/>
-          </a:solidFill>
-          <a:ln>
-            <a:noFill/>
-          </a:ln>
-          <a:effectLst/>
-        </p:spPr>
-        <p:style>
-          <a:lnRef idx="1">
-            <a:schemeClr val="accent1"/>
-          </a:lnRef>
-          <a:fillRef idx="3">
-            <a:schemeClr val="accent1"/>
-          </a:fillRef>
-          <a:effectRef idx="2">
-            <a:schemeClr val="accent1"/>
-          </a:effectRef>
-          <a:fontRef idx="minor">
-            <a:schemeClr val="lt1"/>
-          </a:fontRef>
-        </p:style>
-        <p:txBody>
-          <a:bodyPr rtlCol="0" anchor="ctr"/>
-          <a:lstStyle/>
-          <a:p/>
-        </p:txBody>
-      </p:sp>
-      <p:sp>
-        <p:nvSpPr>
-          <p:cNvPr id="11" name="TextBox 10"/>
-          <p:cNvSpPr txBox="1"/>
-          <p:nvPr/>
-        </p:nvSpPr>
-        <p:spPr>
-          <a:xfrm>
-            <a:off x="694944" y="2715768"/>
-            <a:ext cx="6254496" cy="658368"/>
-          </a:xfrm>
-          <a:prstGeom prst="rect">
-            <a:avLst/>
-          </a:prstGeom>
-          <a:noFill/>
-        </p:spPr>
-        <p:txBody>
-          <a:bodyPr wrap="square" anchor="ctr" lIns="0" rIns="0" tIns="0" bIns="0">
-            <a:spAutoFit/>
-          </a:bodyPr>
-          <a:lstStyle/>
-          <a:p>
-            <a:pPr algn="l">
-              <a:lnSpc>
-                <a:spcPct val="120000"/>
-              </a:lnSpc>
-            </a:pPr>
-            <a:r>
-              <a:rPr sz="1800">
-                <a:solidFill>
-                  <a:srgbClr val="000000"/>
-                </a:solidFill>
-                <a:latin typeface="Times New Roman"/>
-                <a:ea typeface="宋体"/>
-                <a:cs typeface="宋体"/>
-              </a:rPr>
-              <a:t>示例指标 A 达到 </a:t>
-            </a:r>
-            <a:r>
-              <a:rPr sz="1800">
-                <a:solidFill>
-                  <a:srgbClr val="283E4E"/>
-                </a:solidFill>
-                <a:latin typeface="Arial"/>
-                <a:ea typeface="黑体"/>
-                <a:cs typeface="黑体"/>
-              </a:rPr>
-              <a:t>38.6</a:t>
-            </a:r>
-            <a:r>
-              <a:rPr sz="1800">
-                <a:solidFill>
-                  <a:srgbClr val="000000"/>
-                </a:solidFill>
-                <a:latin typeface="Times New Roman"/>
-                <a:ea typeface="宋体"/>
-                <a:cs typeface="宋体"/>
-              </a:rPr>
-              <a:t>（占位数值）</a:t>
-            </a:r>
-          </a:p>
-        </p:txBody>
-      </p:sp>
-      <p:sp>
-        <p:nvSpPr>
-          <p:cNvPr id="12" name="Rectangle 11"/>
-          <p:cNvSpPr/>
-          <p:nvPr/>
-        </p:nvSpPr>
-        <p:spPr>
-          <a:xfrm>
-            <a:off x="502920" y="3429000"/>
-            <a:ext cx="41148" cy="658368"/>
-          </a:xfrm>
-          <a:prstGeom prst="rect">
-            <a:avLst/>
-          </a:prstGeom>
-          <a:solidFill>
-            <a:srgbClr val="283E4E"/>
-          </a:solidFill>
-          <a:ln>
-            <a:noFill/>
-          </a:ln>
-          <a:effectLst/>
-        </p:spPr>
-        <p:style>
-          <a:lnRef idx="1">
-            <a:schemeClr val="accent1"/>
-          </a:lnRef>
-          <a:fillRef idx="3">
-            <a:schemeClr val="accent1"/>
-          </a:fillRef>
-          <a:effectRef idx="2">
-            <a:schemeClr val="accent1"/>
-          </a:effectRef>
-          <a:fontRef idx="minor">
-            <a:schemeClr val="lt1"/>
-          </a:fontRef>
-        </p:style>
-        <p:txBody>
-          <a:bodyPr rtlCol="0" anchor="ctr"/>
-          <a:lstStyle/>
-          <a:p/>
-        </p:txBody>
-      </p:sp>
-      <p:sp>
-        <p:nvSpPr>
-          <p:cNvPr id="13" name="TextBox 12"/>
-          <p:cNvSpPr txBox="1"/>
-          <p:nvPr/>
-        </p:nvSpPr>
-        <p:spPr>
-          <a:xfrm>
-            <a:off x="694944" y="3429000"/>
-            <a:ext cx="6254496" cy="658368"/>
-          </a:xfrm>
-          <a:prstGeom prst="rect">
-            <a:avLst/>
-          </a:prstGeom>
-          <a:noFill/>
-        </p:spPr>
-        <p:txBody>
-          <a:bodyPr wrap="square" anchor="ctr" lIns="0" rIns="0" tIns="0" bIns="0">
-            <a:spAutoFit/>
-          </a:bodyPr>
-          <a:lstStyle/>
-          <a:p>
-            <a:pPr algn="l">
-              <a:lnSpc>
-                <a:spcPct val="120000"/>
-              </a:lnSpc>
-            </a:pPr>
-            <a:r>
-              <a:rPr sz="1800">
-                <a:solidFill>
-                  <a:srgbClr val="000000"/>
-                </a:solidFill>
-                <a:latin typeface="Times New Roman"/>
-                <a:ea typeface="宋体"/>
-                <a:cs typeface="宋体"/>
-              </a:rPr>
-              <a:t>示例指标 B 同比变化 </a:t>
-            </a:r>
-            <a:r>
-              <a:rPr sz="1800">
-                <a:solidFill>
-                  <a:srgbClr val="283E4E"/>
-                </a:solidFill>
-                <a:latin typeface="Arial"/>
-                <a:ea typeface="黑体"/>
-                <a:cs typeface="黑体"/>
-              </a:rPr>
-              <a:t>+12.4</a:t>
-            </a:r>
-            <a:r>
-              <a:rPr sz="1800">
-                <a:solidFill>
-                  <a:srgbClr val="000000"/>
-                </a:solidFill>
-                <a:latin typeface="Times New Roman"/>
-                <a:ea typeface="宋体"/>
-                <a:cs typeface="宋体"/>
-              </a:rPr>
-              <a:t>（占位数值）</a:t>
-            </a:r>
-          </a:p>
-        </p:txBody>
-      </p:sp>
-      <p:sp>
-        <p:nvSpPr>
-          <p:cNvPr id="14" name="Rectangle 13"/>
-          <p:cNvSpPr/>
-          <p:nvPr/>
-        </p:nvSpPr>
-        <p:spPr>
-          <a:xfrm>
-            <a:off x="502920" y="4142232"/>
-            <a:ext cx="41148" cy="658368"/>
-          </a:xfrm>
-          <a:prstGeom prst="rect">
-            <a:avLst/>
-          </a:prstGeom>
-          <a:solidFill>
-            <a:srgbClr val="283E4E"/>
-          </a:solidFill>
-          <a:ln>
-            <a:noFill/>
-          </a:ln>
-          <a:effectLst/>
-        </p:spPr>
-        <p:style>
-          <a:lnRef idx="1">
-            <a:schemeClr val="accent1"/>
-          </a:lnRef>
-          <a:fillRef idx="3">
-            <a:schemeClr val="accent1"/>
-          </a:fillRef>
-          <a:effectRef idx="2">
-            <a:schemeClr val="accent1"/>
-          </a:effectRef>
-          <a:fontRef idx="minor">
-            <a:schemeClr val="lt1"/>
-          </a:fontRef>
-        </p:style>
-        <p:txBody>
-          <a:bodyPr rtlCol="0" anchor="ctr"/>
-          <a:lstStyle/>
-          <a:p/>
-        </p:txBody>
-      </p:sp>
-      <p:sp>
-        <p:nvSpPr>
-          <p:cNvPr id="15" name="TextBox 14"/>
-          <p:cNvSpPr txBox="1"/>
-          <p:nvPr/>
-        </p:nvSpPr>
-        <p:spPr>
-          <a:xfrm>
-            <a:off x="694944" y="4142232"/>
-            <a:ext cx="6254496" cy="658368"/>
-          </a:xfrm>
-          <a:prstGeom prst="rect">
-            <a:avLst/>
-          </a:prstGeom>
-          <a:noFill/>
-        </p:spPr>
-        <p:txBody>
-          <a:bodyPr wrap="square" anchor="ctr" lIns="0" rIns="0" tIns="0" bIns="0">
-            <a:spAutoFit/>
-          </a:bodyPr>
-          <a:lstStyle/>
-          <a:p>
-            <a:pPr algn="l">
-              <a:lnSpc>
-                <a:spcPct val="120000"/>
-              </a:lnSpc>
-            </a:pPr>
-            <a:r>
-              <a:rPr sz="1800">
-                <a:solidFill>
-                  <a:srgbClr val="000000"/>
-                </a:solidFill>
-                <a:latin typeface="Times New Roman"/>
-                <a:ea typeface="宋体"/>
-                <a:cs typeface="宋体"/>
-              </a:rPr>
-              <a:t>示例指标 C 覆盖范围 </a:t>
-            </a:r>
-            <a:r>
-              <a:rPr sz="1800">
-                <a:solidFill>
-                  <a:srgbClr val="283E4E"/>
-                </a:solidFill>
-                <a:latin typeface="Arial"/>
-                <a:ea typeface="黑体"/>
-                <a:cs typeface="黑体"/>
-              </a:rPr>
-              <a:t>1,200</a:t>
-            </a:r>
-            <a:r>
-              <a:rPr sz="1800">
-                <a:solidFill>
-                  <a:srgbClr val="000000"/>
-                </a:solidFill>
-                <a:latin typeface="Times New Roman"/>
-                <a:ea typeface="宋体"/>
-                <a:cs typeface="宋体"/>
-              </a:rPr>
-              <a:t>（占位数值）</a:t>
-            </a:r>
-          </a:p>
-        </p:txBody>
-      </p:sp>
-      <p:sp>
-        <p:nvSpPr>
-          <p:cNvPr id="16" name="Rectangle 15"/>
-          <p:cNvSpPr/>
-          <p:nvPr/>
-        </p:nvSpPr>
-        <p:spPr>
-          <a:xfrm>
-            <a:off x="502920" y="4892040"/>
-            <a:ext cx="6492240" cy="1005840"/>
-          </a:xfrm>
-          <a:prstGeom prst="rect">
-            <a:avLst/>
-          </a:prstGeom>
-          <a:solidFill>
-            <a:srgbClr val="F1F5F8"/>
-          </a:solidFill>
-          <a:ln>
-            <a:noFill/>
-          </a:ln>
-          <a:effectLst/>
-        </p:spPr>
-        <p:style>
-          <a:lnRef idx="1">
-            <a:schemeClr val="accent1"/>
-          </a:lnRef>
-          <a:fillRef idx="3">
-            <a:schemeClr val="accent1"/>
-          </a:fillRef>
-          <a:effectRef idx="2">
-            <a:schemeClr val="accent1"/>
-          </a:effectRef>
-          <a:fontRef idx="minor">
-            <a:schemeClr val="lt1"/>
-          </a:fontRef>
-        </p:style>
-        <p:txBody>
-          <a:bodyPr rtlCol="0" anchor="ctr"/>
-          <a:lstStyle/>
-          <a:p/>
-        </p:txBody>
-      </p:sp>
-      <p:sp>
-        <p:nvSpPr>
-          <p:cNvPr id="17" name="Rectangle 16"/>
-          <p:cNvSpPr/>
-          <p:nvPr/>
-        </p:nvSpPr>
-        <p:spPr>
-          <a:xfrm>
-            <a:off x="502920" y="4892040"/>
-            <a:ext cx="41148" cy="1005840"/>
-          </a:xfrm>
-          <a:prstGeom prst="rect">
-            <a:avLst/>
-          </a:prstGeom>
-          <a:solidFill>
-            <a:srgbClr val="283E4E"/>
-          </a:solidFill>
-          <a:ln>
-            <a:noFill/>
-          </a:ln>
-          <a:effectLst/>
-        </p:spPr>
-        <p:style>
-          <a:lnRef idx="1">
-            <a:schemeClr val="accent1"/>
-          </a:lnRef>
-          <a:fillRef idx="3">
-            <a:schemeClr val="accent1"/>
-          </a:fillRef>
-          <a:effectRef idx="2">
-            <a:schemeClr val="accent1"/>
-          </a:effectRef>
-          <a:fontRef idx="minor">
-            <a:schemeClr val="lt1"/>
-          </a:fontRef>
-        </p:style>
-        <p:txBody>
-          <a:bodyPr rtlCol="0" anchor="ctr"/>
-          <a:lstStyle/>
-          <a:p/>
-        </p:txBody>
-      </p:sp>
-      <p:sp>
-        <p:nvSpPr>
-          <p:cNvPr id="18" name="TextBox 17"/>
-          <p:cNvSpPr txBox="1"/>
-          <p:nvPr/>
-        </p:nvSpPr>
-        <p:spPr>
-          <a:xfrm>
-            <a:off x="694944" y="4983480"/>
-            <a:ext cx="6163056" cy="822960"/>
-          </a:xfrm>
-          <a:prstGeom prst="rect">
-            <a:avLst/>
-          </a:prstGeom>
-          <a:noFill/>
-        </p:spPr>
-        <p:txBody>
-          <a:bodyPr wrap="square" anchor="ctr" lIns="0" rIns="0" tIns="0" bIns="0">
-            <a:spAutoFit/>
-          </a:bodyPr>
-          <a:lstStyle/>
-          <a:p>
-            <a:pPr algn="l">
-              <a:lnSpc>
-                <a:spcPct val="120000"/>
-              </a:lnSpc>
-            </a:pPr>
-            <a:r>
-              <a:rPr sz="1800">
-                <a:solidFill>
-                  <a:srgbClr val="283E4E"/>
-                </a:solidFill>
-                <a:latin typeface="Arial"/>
-                <a:ea typeface="黑体"/>
-                <a:cs typeface="黑体"/>
-              </a:rPr>
-              <a:t>示例判断句：用一句话收束左侧信息，靠黑体与主题色强调，作为口头汇报的落点。</a:t>
-            </a:r>
-          </a:p>
-        </p:txBody>
-      </p:sp>
-      <p:sp>
-        <p:nvSpPr>
-          <p:cNvPr id="19" name="Rectangle 18"/>
-          <p:cNvSpPr/>
-          <p:nvPr/>
-        </p:nvSpPr>
-        <p:spPr>
-          <a:xfrm>
-            <a:off x="7178040" y="1664208"/>
-            <a:ext cx="5175504" cy="1481328"/>
-          </a:xfrm>
-          <a:prstGeom prst="rect">
-            <a:avLst/>
-          </a:prstGeom>
-          <a:solidFill>
-            <a:srgbClr val="F1F5F8"/>
-          </a:solidFill>
-          <a:ln w="9525">
-            <a:solidFill>
-              <a:srgbClr val="B7C1C8"/>
-            </a:solidFill>
-          </a:ln>
-          <a:effectLst/>
-        </p:spPr>
-        <p:style>
-          <a:lnRef idx="1">
-            <a:schemeClr val="accent1"/>
-          </a:lnRef>
-          <a:fillRef idx="3">
-            <a:schemeClr val="accent1"/>
-          </a:fillRef>
-          <a:effectRef idx="2">
-            <a:schemeClr val="accent1"/>
-          </a:effectRef>
-          <a:fontRef idx="minor">
-            <a:schemeClr val="lt1"/>
-          </a:fontRef>
-        </p:style>
-        <p:txBody>
-          <a:bodyPr rtlCol="0" anchor="ctr"/>
-          <a:lstStyle/>
-          <a:p/>
-        </p:txBody>
-      </p:sp>
-      <p:sp>
-        <p:nvSpPr>
-          <p:cNvPr id="20" name="TextBox 19"/>
-          <p:cNvSpPr txBox="1"/>
-          <p:nvPr/>
-        </p:nvSpPr>
-        <p:spPr>
-          <a:xfrm>
-            <a:off x="7178040" y="2212848"/>
-            <a:ext cx="5175504" cy="365760"/>
-          </a:xfrm>
-          <a:prstGeom prst="rect">
-            <a:avLst/>
-          </a:prstGeom>
-          <a:noFill/>
-        </p:spPr>
-        <p:txBody>
-          <a:bodyPr wrap="square" anchor="t" lIns="0" rIns="0" tIns="0" bIns="0">
-            <a:spAutoFit/>
-          </a:bodyPr>
-          <a:lstStyle/>
-          <a:p>
-            <a:pPr algn="ctr">
-              <a:lnSpc>
-                <a:spcPct val="100000"/>
-              </a:lnSpc>
-            </a:pPr>
-            <a:r>
-              <a:rPr sz="1600">
-                <a:solidFill>
-                  <a:srgbClr val="000000"/>
-                </a:solidFill>
-                <a:latin typeface="Times New Roman"/>
-                <a:ea typeface="宋体"/>
-                <a:cs typeface="宋体"/>
-              </a:rPr>
-              <a:t>占位配图区域：实稿放实景照片，按框裁切填满。</a:t>
-            </a:r>
-          </a:p>
-        </p:txBody>
-      </p:sp>
-      <p:sp>
-        <p:nvSpPr>
-          <p:cNvPr id="21" name="Oval 20"/>
-          <p:cNvSpPr/>
-          <p:nvPr/>
-        </p:nvSpPr>
-        <p:spPr>
-          <a:xfrm>
-            <a:off x="7178040" y="3310128"/>
-            <a:ext cx="1572768" cy="1572768"/>
-          </a:xfrm>
-          <a:prstGeom prst="ellipse">
-            <a:avLst/>
-          </a:prstGeom>
-          <a:solidFill>
-            <a:srgbClr val="283E4E"/>
-          </a:solidFill>
-          <a:ln>
-            <a:noFill/>
-          </a:ln>
-          <a:effectLst/>
-        </p:spPr>
-        <p:style>
-          <a:lnRef idx="1">
-            <a:schemeClr val="accent1"/>
-          </a:lnRef>
-          <a:fillRef idx="3">
-            <a:schemeClr val="accent1"/>
-          </a:fillRef>
-          <a:effectRef idx="2">
-            <a:schemeClr val="accent1"/>
-          </a:effectRef>
-          <a:fontRef idx="minor">
-            <a:schemeClr val="lt1"/>
-          </a:fontRef>
-        </p:style>
-        <p:txBody>
-          <a:bodyPr rtlCol="0" anchor="ctr"/>
-          <a:lstStyle/>
-          <a:p/>
-        </p:txBody>
-      </p:sp>
-      <p:sp>
-        <p:nvSpPr>
-          <p:cNvPr id="22" name="TextBox 21"/>
-          <p:cNvSpPr txBox="1"/>
-          <p:nvPr/>
-        </p:nvSpPr>
-        <p:spPr>
-          <a:xfrm>
-            <a:off x="7223760" y="3621024"/>
-            <a:ext cx="1481328" cy="603504"/>
-          </a:xfrm>
-          <a:prstGeom prst="rect">
-            <a:avLst/>
-          </a:prstGeom>
-          <a:noFill/>
-        </p:spPr>
-        <p:txBody>
-          <a:bodyPr wrap="square" anchor="ctr" lIns="0" rIns="0" tIns="0" bIns="0">
-            <a:spAutoFit/>
-          </a:bodyPr>
-          <a:lstStyle/>
-          <a:p>
-            <a:pPr algn="ctr">
-              <a:lnSpc>
-                <a:spcPct val="100000"/>
-              </a:lnSpc>
-            </a:pPr>
-            <a:r>
-              <a:rPr sz="3600">
-                <a:solidFill>
-                  <a:srgbClr val="FFFFFF"/>
-                </a:solidFill>
-                <a:latin typeface="Arial"/>
-                <a:ea typeface="黑体"/>
-                <a:cs typeface="黑体"/>
-              </a:rPr>
-              <a:t>38.6%</a:t>
-            </a:r>
-          </a:p>
-        </p:txBody>
-      </p:sp>
-      <p:sp>
-        <p:nvSpPr>
-          <p:cNvPr id="23" name="TextBox 22"/>
-          <p:cNvSpPr txBox="1"/>
-          <p:nvPr/>
-        </p:nvSpPr>
-        <p:spPr>
-          <a:xfrm>
-            <a:off x="7269480" y="4315968"/>
-            <a:ext cx="1389888" cy="329184"/>
-          </a:xfrm>
-          <a:prstGeom prst="rect">
-            <a:avLst/>
-          </a:prstGeom>
-          <a:noFill/>
-        </p:spPr>
-        <p:txBody>
-          <a:bodyPr wrap="square" anchor="t" lIns="0" rIns="0" tIns="0" bIns="0">
-            <a:spAutoFit/>
-          </a:bodyPr>
-          <a:lstStyle/>
-          <a:p>
-            <a:pPr algn="ctr">
-              <a:lnSpc>
-                <a:spcPct val="100000"/>
-              </a:lnSpc>
-            </a:pPr>
-            <a:r>
-              <a:rPr sz="1600">
-                <a:solidFill>
-                  <a:srgbClr val="FFFFFF"/>
-                </a:solidFill>
-                <a:latin typeface="Times New Roman"/>
-                <a:ea typeface="宋体"/>
-                <a:cs typeface="宋体"/>
-              </a:rPr>
-              <a:t>占位数值</a:t>
-            </a:r>
-          </a:p>
-        </p:txBody>
-      </p:sp>
-      <p:sp>
-        <p:nvSpPr>
-          <p:cNvPr id="24" name="TextBox 23"/>
-          <p:cNvSpPr txBox="1"/>
-          <p:nvPr/>
-        </p:nvSpPr>
-        <p:spPr>
-          <a:xfrm>
-            <a:off x="9098280" y="3310128"/>
-            <a:ext cx="3255264" cy="274320"/>
-          </a:xfrm>
-          <a:prstGeom prst="rect">
-            <a:avLst/>
-          </a:prstGeom>
-          <a:noFill/>
-        </p:spPr>
-        <p:txBody>
-          <a:bodyPr wrap="square" anchor="t" lIns="0" rIns="0" tIns="0" bIns="0">
-            <a:spAutoFit/>
-          </a:bodyPr>
-          <a:lstStyle/>
-          <a:p>
-            <a:pPr algn="ctr">
-              <a:lnSpc>
-                <a:spcPct val="100000"/>
-              </a:lnSpc>
-            </a:pPr>
-            <a:r>
-              <a:rPr sz="1600">
-                <a:solidFill>
-                  <a:srgbClr val="000000"/>
-                </a:solidFill>
-                <a:latin typeface="Times New Roman"/>
-                <a:ea typeface="宋体"/>
-                <a:cs typeface="宋体"/>
-              </a:rPr>
-              <a:t>对比图（示例）</a:t>
-            </a:r>
-          </a:p>
-        </p:txBody>
-      </p:sp>
-      <p:graphicFrame>
-        <p:nvGraphicFramePr>
-          <p:cNvPr id="25" name="Chart 24"/>
-          <p:cNvGraphicFramePr>
-            <a:graphicFrameLocks noGrp="1"/>
-          </p:cNvGraphicFramePr>
-          <p:nvPr/>
-        </p:nvGraphicFramePr>
-        <p:xfrm>
-          <a:off x="9098280" y="3602736"/>
-          <a:ext cx="3255264" cy="2194560"/>
-        </p:xfrm>
-        <a:graphic>
-          <a:graphicData uri="http://schemas.openxmlformats.org/drawingml/2006/chart">
-            <c:chart xmlns:c="http://schemas.openxmlformats.org/drawingml/2006/chart" r:id="rId2"/>
-          </a:graphicData>
-        </a:graphic>
-      </p:graphicFrame>
-      <p:sp>
-        <p:nvSpPr>
-          <p:cNvPr id="26" name="Rectangle 25"/>
-          <p:cNvSpPr/>
-          <p:nvPr/>
-        </p:nvSpPr>
-        <p:spPr>
-          <a:xfrm>
-            <a:off x="502920" y="6217920"/>
-            <a:ext cx="41148" cy="566928"/>
-          </a:xfrm>
-          <a:prstGeom prst="rect">
-            <a:avLst/>
-          </a:prstGeom>
-          <a:solidFill>
-            <a:srgbClr val="283E4E"/>
-          </a:solidFill>
-          <a:ln>
-            <a:noFill/>
-          </a:ln>
-          <a:effectLst/>
-        </p:spPr>
-        <p:style>
-          <a:lnRef idx="1">
-            <a:schemeClr val="accent1"/>
-          </a:lnRef>
-          <a:fillRef idx="3">
-            <a:schemeClr val="accent1"/>
-          </a:fillRef>
-          <a:effectRef idx="2">
-            <a:schemeClr val="accent1"/>
-          </a:effectRef>
-          <a:fontRef idx="minor">
-            <a:schemeClr val="lt1"/>
-          </a:fontRef>
-        </p:style>
-        <p:txBody>
-          <a:bodyPr rtlCol="0" anchor="ctr"/>
-          <a:lstStyle/>
-          <a:p/>
-        </p:txBody>
-      </p:sp>
-      <p:sp>
-        <p:nvSpPr>
-          <p:cNvPr id="27" name="TextBox 26"/>
-          <p:cNvSpPr txBox="1"/>
-          <p:nvPr/>
-        </p:nvSpPr>
-        <p:spPr>
-          <a:xfrm>
-            <a:off x="694944" y="6217920"/>
-            <a:ext cx="11521440" cy="566928"/>
-          </a:xfrm>
-          <a:prstGeom prst="rect">
-            <a:avLst/>
-          </a:prstGeom>
-          <a:noFill/>
-        </p:spPr>
-        <p:txBody>
-          <a:bodyPr wrap="square" anchor="ctr" lIns="0" rIns="0" tIns="0" bIns="0">
-            <a:spAutoFit/>
-          </a:bodyPr>
-          <a:lstStyle/>
-          <a:p>
-            <a:pPr algn="l">
-              <a:lnSpc>
-                <a:spcPct val="110000"/>
-              </a:lnSpc>
-            </a:pPr>
-            <a:r>
-              <a:rPr sz="1800">
-                <a:solidFill>
-                  <a:srgbClr val="000000"/>
-                </a:solidFill>
-                <a:latin typeface="Arial"/>
-                <a:ea typeface="黑体"/>
-                <a:cs typeface="黑体"/>
-              </a:rPr>
-              <a:t>示例结论条：用一句话写清证据强弱与边界，作为整页的落点。</a:t>
+              <a:t>本示例演示新的配色与版式规则：黑白灰作基础色，不占配色额度；主题色、对比色、辅助色各成系列。每页先判断内容关系，再选骨架，不再把页面全做成方块。</a:t>
             </a:r>
           </a:p>
         </p:txBody>
@@ -5066,7 +4708,7 @@
                 <a:ea typeface="黑体"/>
                 <a:cs typeface="黑体"/>
               </a:rPr>
-              <a:t>示例页：强数据内容用表格承载</a:t>
+              <a:t>示例页：主图 + 侧栏，配图与图表各承担一件事</a:t>
             </a:r>
           </a:p>
         </p:txBody>
@@ -5107,7 +4749,1046 @@
                 <a:ea typeface="宋体"/>
                 <a:cs typeface="宋体"/>
               </a:rPr>
-              <a:t>指标对比、口径对照、多维数据用表格；叙事与机制内容用方块。</a:t>
+              <a:t>左栏讲证据，右栏放实景图、图表与关键数字；对比色只点最关键的一个数字。</a:t>
+            </a:r>
+          </a:p>
+        </p:txBody>
+      </p:sp>
+      <p:sp>
+        <p:nvSpPr>
+          <p:cNvPr id="6" name="Rectangle 5"/>
+          <p:cNvSpPr/>
+          <p:nvPr/>
+        </p:nvSpPr>
+        <p:spPr>
+          <a:xfrm>
+            <a:off x="502920" y="1554480"/>
+            <a:ext cx="11850624" cy="10972"/>
+          </a:xfrm>
+          <a:prstGeom prst="rect">
+            <a:avLst/>
+          </a:prstGeom>
+          <a:solidFill>
+            <a:srgbClr val="283E4E"/>
+          </a:solidFill>
+          <a:ln>
+            <a:noFill/>
+          </a:ln>
+          <a:effectLst/>
+        </p:spPr>
+        <p:style>
+          <a:lnRef idx="1">
+            <a:schemeClr val="accent1"/>
+          </a:lnRef>
+          <a:fillRef idx="3">
+            <a:schemeClr val="accent1"/>
+          </a:fillRef>
+          <a:effectRef idx="2">
+            <a:schemeClr val="accent1"/>
+          </a:effectRef>
+          <a:fontRef idx="minor">
+            <a:schemeClr val="lt1"/>
+          </a:fontRef>
+        </p:style>
+        <p:txBody>
+          <a:bodyPr rtlCol="0" anchor="ctr"/>
+          <a:lstStyle/>
+          <a:p/>
+        </p:txBody>
+      </p:sp>
+      <p:sp>
+        <p:nvSpPr>
+          <p:cNvPr id="7" name="Rectangle 6"/>
+          <p:cNvSpPr/>
+          <p:nvPr/>
+        </p:nvSpPr>
+        <p:spPr>
+          <a:xfrm>
+            <a:off x="502920" y="1664208"/>
+            <a:ext cx="6492240" cy="960120"/>
+          </a:xfrm>
+          <a:prstGeom prst="rect">
+            <a:avLst/>
+          </a:prstGeom>
+          <a:solidFill>
+            <a:srgbClr val="F1F5F8"/>
+          </a:solidFill>
+          <a:ln>
+            <a:noFill/>
+          </a:ln>
+          <a:effectLst/>
+        </p:spPr>
+        <p:style>
+          <a:lnRef idx="1">
+            <a:schemeClr val="accent1"/>
+          </a:lnRef>
+          <a:fillRef idx="3">
+            <a:schemeClr val="accent1"/>
+          </a:fillRef>
+          <a:effectRef idx="2">
+            <a:schemeClr val="accent1"/>
+          </a:effectRef>
+          <a:fontRef idx="minor">
+            <a:schemeClr val="lt1"/>
+          </a:fontRef>
+        </p:style>
+        <p:txBody>
+          <a:bodyPr rtlCol="0" anchor="ctr"/>
+          <a:lstStyle/>
+          <a:p/>
+        </p:txBody>
+      </p:sp>
+      <p:sp>
+        <p:nvSpPr>
+          <p:cNvPr id="8" name="Rectangle 7"/>
+          <p:cNvSpPr/>
+          <p:nvPr/>
+        </p:nvSpPr>
+        <p:spPr>
+          <a:xfrm>
+            <a:off x="502920" y="1664208"/>
+            <a:ext cx="41148" cy="960120"/>
+          </a:xfrm>
+          <a:prstGeom prst="rect">
+            <a:avLst/>
+          </a:prstGeom>
+          <a:solidFill>
+            <a:srgbClr val="283E4E"/>
+          </a:solidFill>
+          <a:ln>
+            <a:noFill/>
+          </a:ln>
+          <a:effectLst/>
+        </p:spPr>
+        <p:style>
+          <a:lnRef idx="1">
+            <a:schemeClr val="accent1"/>
+          </a:lnRef>
+          <a:fillRef idx="3">
+            <a:schemeClr val="accent1"/>
+          </a:fillRef>
+          <a:effectRef idx="2">
+            <a:schemeClr val="accent1"/>
+          </a:effectRef>
+          <a:fontRef idx="minor">
+            <a:schemeClr val="lt1"/>
+          </a:fontRef>
+        </p:style>
+        <p:txBody>
+          <a:bodyPr rtlCol="0" anchor="ctr"/>
+          <a:lstStyle/>
+          <a:p/>
+        </p:txBody>
+      </p:sp>
+      <p:sp>
+        <p:nvSpPr>
+          <p:cNvPr id="9" name="TextBox 8"/>
+          <p:cNvSpPr txBox="1"/>
+          <p:nvPr/>
+        </p:nvSpPr>
+        <p:spPr>
+          <a:xfrm>
+            <a:off x="694944" y="1755648"/>
+            <a:ext cx="6163056" cy="777240"/>
+          </a:xfrm>
+          <a:prstGeom prst="rect">
+            <a:avLst/>
+          </a:prstGeom>
+          <a:noFill/>
+        </p:spPr>
+        <p:txBody>
+          <a:bodyPr wrap="square" anchor="ctr" lIns="0" rIns="0" tIns="0" bIns="0">
+            <a:spAutoFit/>
+          </a:bodyPr>
+          <a:lstStyle/>
+          <a:p>
+            <a:pPr algn="l">
+              <a:lnSpc>
+                <a:spcPct val="120000"/>
+              </a:lnSpc>
+            </a:pPr>
+            <a:r>
+              <a:rPr sz="2000">
+                <a:solidFill>
+                  <a:srgbClr val="000000"/>
+                </a:solidFill>
+                <a:latin typeface="Times New Roman"/>
+                <a:ea typeface="楷体"/>
+                <a:cs typeface="楷体"/>
+              </a:rPr>
+              <a:t>导语占位：这一页演示左文右图的骨架，文字区与图片区各自成块，边缘对齐。</a:t>
+            </a:r>
+          </a:p>
+        </p:txBody>
+      </p:sp>
+      <p:sp>
+        <p:nvSpPr>
+          <p:cNvPr id="10" name="Rectangle 9"/>
+          <p:cNvSpPr/>
+          <p:nvPr/>
+        </p:nvSpPr>
+        <p:spPr>
+          <a:xfrm>
+            <a:off x="502920" y="2715768"/>
+            <a:ext cx="41148" cy="658368"/>
+          </a:xfrm>
+          <a:prstGeom prst="rect">
+            <a:avLst/>
+          </a:prstGeom>
+          <a:solidFill>
+            <a:srgbClr val="283E4E"/>
+          </a:solidFill>
+          <a:ln>
+            <a:noFill/>
+          </a:ln>
+          <a:effectLst/>
+        </p:spPr>
+        <p:style>
+          <a:lnRef idx="1">
+            <a:schemeClr val="accent1"/>
+          </a:lnRef>
+          <a:fillRef idx="3">
+            <a:schemeClr val="accent1"/>
+          </a:fillRef>
+          <a:effectRef idx="2">
+            <a:schemeClr val="accent1"/>
+          </a:effectRef>
+          <a:fontRef idx="minor">
+            <a:schemeClr val="lt1"/>
+          </a:fontRef>
+        </p:style>
+        <p:txBody>
+          <a:bodyPr rtlCol="0" anchor="ctr"/>
+          <a:lstStyle/>
+          <a:p/>
+        </p:txBody>
+      </p:sp>
+      <p:sp>
+        <p:nvSpPr>
+          <p:cNvPr id="11" name="TextBox 10"/>
+          <p:cNvSpPr txBox="1"/>
+          <p:nvPr/>
+        </p:nvSpPr>
+        <p:spPr>
+          <a:xfrm>
+            <a:off x="694944" y="2715768"/>
+            <a:ext cx="6254496" cy="658368"/>
+          </a:xfrm>
+          <a:prstGeom prst="rect">
+            <a:avLst/>
+          </a:prstGeom>
+          <a:noFill/>
+        </p:spPr>
+        <p:txBody>
+          <a:bodyPr wrap="square" anchor="ctr" lIns="0" rIns="0" tIns="0" bIns="0">
+            <a:spAutoFit/>
+          </a:bodyPr>
+          <a:lstStyle/>
+          <a:p>
+            <a:pPr algn="l">
+              <a:lnSpc>
+                <a:spcPct val="120000"/>
+              </a:lnSpc>
+            </a:pPr>
+            <a:r>
+              <a:rPr sz="1800">
+                <a:solidFill>
+                  <a:srgbClr val="000000"/>
+                </a:solidFill>
+                <a:latin typeface="Times New Roman"/>
+                <a:ea typeface="宋体"/>
+                <a:cs typeface="宋体"/>
+              </a:rPr>
+              <a:t>示例指标 A 达到 </a:t>
+            </a:r>
+            <a:r>
+              <a:rPr sz="1800">
+                <a:solidFill>
+                  <a:srgbClr val="283E4E"/>
+                </a:solidFill>
+                <a:latin typeface="Arial"/>
+                <a:ea typeface="黑体"/>
+                <a:cs typeface="黑体"/>
+              </a:rPr>
+              <a:t>38.6</a:t>
+            </a:r>
+            <a:r>
+              <a:rPr sz="1800">
+                <a:solidFill>
+                  <a:srgbClr val="000000"/>
+                </a:solidFill>
+                <a:latin typeface="Times New Roman"/>
+                <a:ea typeface="宋体"/>
+                <a:cs typeface="宋体"/>
+              </a:rPr>
+              <a:t>（占位数值）</a:t>
+            </a:r>
+          </a:p>
+        </p:txBody>
+      </p:sp>
+      <p:sp>
+        <p:nvSpPr>
+          <p:cNvPr id="12" name="Rectangle 11"/>
+          <p:cNvSpPr/>
+          <p:nvPr/>
+        </p:nvSpPr>
+        <p:spPr>
+          <a:xfrm>
+            <a:off x="502920" y="3429000"/>
+            <a:ext cx="41148" cy="658368"/>
+          </a:xfrm>
+          <a:prstGeom prst="rect">
+            <a:avLst/>
+          </a:prstGeom>
+          <a:solidFill>
+            <a:srgbClr val="283E4E"/>
+          </a:solidFill>
+          <a:ln>
+            <a:noFill/>
+          </a:ln>
+          <a:effectLst/>
+        </p:spPr>
+        <p:style>
+          <a:lnRef idx="1">
+            <a:schemeClr val="accent1"/>
+          </a:lnRef>
+          <a:fillRef idx="3">
+            <a:schemeClr val="accent1"/>
+          </a:fillRef>
+          <a:effectRef idx="2">
+            <a:schemeClr val="accent1"/>
+          </a:effectRef>
+          <a:fontRef idx="minor">
+            <a:schemeClr val="lt1"/>
+          </a:fontRef>
+        </p:style>
+        <p:txBody>
+          <a:bodyPr rtlCol="0" anchor="ctr"/>
+          <a:lstStyle/>
+          <a:p/>
+        </p:txBody>
+      </p:sp>
+      <p:sp>
+        <p:nvSpPr>
+          <p:cNvPr id="13" name="TextBox 12"/>
+          <p:cNvSpPr txBox="1"/>
+          <p:nvPr/>
+        </p:nvSpPr>
+        <p:spPr>
+          <a:xfrm>
+            <a:off x="694944" y="3429000"/>
+            <a:ext cx="6254496" cy="658368"/>
+          </a:xfrm>
+          <a:prstGeom prst="rect">
+            <a:avLst/>
+          </a:prstGeom>
+          <a:noFill/>
+        </p:spPr>
+        <p:txBody>
+          <a:bodyPr wrap="square" anchor="ctr" lIns="0" rIns="0" tIns="0" bIns="0">
+            <a:spAutoFit/>
+          </a:bodyPr>
+          <a:lstStyle/>
+          <a:p>
+            <a:pPr algn="l">
+              <a:lnSpc>
+                <a:spcPct val="120000"/>
+              </a:lnSpc>
+            </a:pPr>
+            <a:r>
+              <a:rPr sz="1800">
+                <a:solidFill>
+                  <a:srgbClr val="000000"/>
+                </a:solidFill>
+                <a:latin typeface="Times New Roman"/>
+                <a:ea typeface="宋体"/>
+                <a:cs typeface="宋体"/>
+              </a:rPr>
+              <a:t>示例指标 B 同比变化 </a:t>
+            </a:r>
+            <a:r>
+              <a:rPr sz="1800">
+                <a:solidFill>
+                  <a:srgbClr val="283E4E"/>
+                </a:solidFill>
+                <a:latin typeface="Arial"/>
+                <a:ea typeface="黑体"/>
+                <a:cs typeface="黑体"/>
+              </a:rPr>
+              <a:t>+12.4</a:t>
+            </a:r>
+            <a:r>
+              <a:rPr sz="1800">
+                <a:solidFill>
+                  <a:srgbClr val="000000"/>
+                </a:solidFill>
+                <a:latin typeface="Times New Roman"/>
+                <a:ea typeface="宋体"/>
+                <a:cs typeface="宋体"/>
+              </a:rPr>
+              <a:t>（占位数值）</a:t>
+            </a:r>
+          </a:p>
+        </p:txBody>
+      </p:sp>
+      <p:sp>
+        <p:nvSpPr>
+          <p:cNvPr id="14" name="Rectangle 13"/>
+          <p:cNvSpPr/>
+          <p:nvPr/>
+        </p:nvSpPr>
+        <p:spPr>
+          <a:xfrm>
+            <a:off x="502920" y="4142232"/>
+            <a:ext cx="41148" cy="658368"/>
+          </a:xfrm>
+          <a:prstGeom prst="rect">
+            <a:avLst/>
+          </a:prstGeom>
+          <a:solidFill>
+            <a:srgbClr val="283E4E"/>
+          </a:solidFill>
+          <a:ln>
+            <a:noFill/>
+          </a:ln>
+          <a:effectLst/>
+        </p:spPr>
+        <p:style>
+          <a:lnRef idx="1">
+            <a:schemeClr val="accent1"/>
+          </a:lnRef>
+          <a:fillRef idx="3">
+            <a:schemeClr val="accent1"/>
+          </a:fillRef>
+          <a:effectRef idx="2">
+            <a:schemeClr val="accent1"/>
+          </a:effectRef>
+          <a:fontRef idx="minor">
+            <a:schemeClr val="lt1"/>
+          </a:fontRef>
+        </p:style>
+        <p:txBody>
+          <a:bodyPr rtlCol="0" anchor="ctr"/>
+          <a:lstStyle/>
+          <a:p/>
+        </p:txBody>
+      </p:sp>
+      <p:sp>
+        <p:nvSpPr>
+          <p:cNvPr id="15" name="TextBox 14"/>
+          <p:cNvSpPr txBox="1"/>
+          <p:nvPr/>
+        </p:nvSpPr>
+        <p:spPr>
+          <a:xfrm>
+            <a:off x="694944" y="4142232"/>
+            <a:ext cx="6254496" cy="658368"/>
+          </a:xfrm>
+          <a:prstGeom prst="rect">
+            <a:avLst/>
+          </a:prstGeom>
+          <a:noFill/>
+        </p:spPr>
+        <p:txBody>
+          <a:bodyPr wrap="square" anchor="ctr" lIns="0" rIns="0" tIns="0" bIns="0">
+            <a:spAutoFit/>
+          </a:bodyPr>
+          <a:lstStyle/>
+          <a:p>
+            <a:pPr algn="l">
+              <a:lnSpc>
+                <a:spcPct val="120000"/>
+              </a:lnSpc>
+            </a:pPr>
+            <a:r>
+              <a:rPr sz="1800">
+                <a:solidFill>
+                  <a:srgbClr val="000000"/>
+                </a:solidFill>
+                <a:latin typeface="Times New Roman"/>
+                <a:ea typeface="宋体"/>
+                <a:cs typeface="宋体"/>
+              </a:rPr>
+              <a:t>示例指标 C 覆盖范围 </a:t>
+            </a:r>
+            <a:r>
+              <a:rPr sz="1800">
+                <a:solidFill>
+                  <a:srgbClr val="283E4E"/>
+                </a:solidFill>
+                <a:latin typeface="Arial"/>
+                <a:ea typeface="黑体"/>
+                <a:cs typeface="黑体"/>
+              </a:rPr>
+              <a:t>1,200</a:t>
+            </a:r>
+            <a:r>
+              <a:rPr sz="1800">
+                <a:solidFill>
+                  <a:srgbClr val="000000"/>
+                </a:solidFill>
+                <a:latin typeface="Times New Roman"/>
+                <a:ea typeface="宋体"/>
+                <a:cs typeface="宋体"/>
+              </a:rPr>
+              <a:t>（占位数值）</a:t>
+            </a:r>
+          </a:p>
+        </p:txBody>
+      </p:sp>
+      <p:sp>
+        <p:nvSpPr>
+          <p:cNvPr id="16" name="Rectangle 15"/>
+          <p:cNvSpPr/>
+          <p:nvPr/>
+        </p:nvSpPr>
+        <p:spPr>
+          <a:xfrm>
+            <a:off x="502920" y="4892040"/>
+            <a:ext cx="6492240" cy="1005840"/>
+          </a:xfrm>
+          <a:prstGeom prst="rect">
+            <a:avLst/>
+          </a:prstGeom>
+          <a:solidFill>
+            <a:srgbClr val="F1F5F8"/>
+          </a:solidFill>
+          <a:ln>
+            <a:noFill/>
+          </a:ln>
+          <a:effectLst/>
+        </p:spPr>
+        <p:style>
+          <a:lnRef idx="1">
+            <a:schemeClr val="accent1"/>
+          </a:lnRef>
+          <a:fillRef idx="3">
+            <a:schemeClr val="accent1"/>
+          </a:fillRef>
+          <a:effectRef idx="2">
+            <a:schemeClr val="accent1"/>
+          </a:effectRef>
+          <a:fontRef idx="minor">
+            <a:schemeClr val="lt1"/>
+          </a:fontRef>
+        </p:style>
+        <p:txBody>
+          <a:bodyPr rtlCol="0" anchor="ctr"/>
+          <a:lstStyle/>
+          <a:p/>
+        </p:txBody>
+      </p:sp>
+      <p:sp>
+        <p:nvSpPr>
+          <p:cNvPr id="17" name="Rectangle 16"/>
+          <p:cNvSpPr/>
+          <p:nvPr/>
+        </p:nvSpPr>
+        <p:spPr>
+          <a:xfrm>
+            <a:off x="502920" y="4892040"/>
+            <a:ext cx="41148" cy="1005840"/>
+          </a:xfrm>
+          <a:prstGeom prst="rect">
+            <a:avLst/>
+          </a:prstGeom>
+          <a:solidFill>
+            <a:srgbClr val="8C5A16"/>
+          </a:solidFill>
+          <a:ln>
+            <a:noFill/>
+          </a:ln>
+          <a:effectLst/>
+        </p:spPr>
+        <p:style>
+          <a:lnRef idx="1">
+            <a:schemeClr val="accent1"/>
+          </a:lnRef>
+          <a:fillRef idx="3">
+            <a:schemeClr val="accent1"/>
+          </a:fillRef>
+          <a:effectRef idx="2">
+            <a:schemeClr val="accent1"/>
+          </a:effectRef>
+          <a:fontRef idx="minor">
+            <a:schemeClr val="lt1"/>
+          </a:fontRef>
+        </p:style>
+        <p:txBody>
+          <a:bodyPr rtlCol="0" anchor="ctr"/>
+          <a:lstStyle/>
+          <a:p/>
+        </p:txBody>
+      </p:sp>
+      <p:sp>
+        <p:nvSpPr>
+          <p:cNvPr id="18" name="TextBox 17"/>
+          <p:cNvSpPr txBox="1"/>
+          <p:nvPr/>
+        </p:nvSpPr>
+        <p:spPr>
+          <a:xfrm>
+            <a:off x="694944" y="4983480"/>
+            <a:ext cx="6163056" cy="822960"/>
+          </a:xfrm>
+          <a:prstGeom prst="rect">
+            <a:avLst/>
+          </a:prstGeom>
+          <a:noFill/>
+        </p:spPr>
+        <p:txBody>
+          <a:bodyPr wrap="square" anchor="ctr" lIns="0" rIns="0" tIns="0" bIns="0">
+            <a:spAutoFit/>
+          </a:bodyPr>
+          <a:lstStyle/>
+          <a:p>
+            <a:pPr algn="l">
+              <a:lnSpc>
+                <a:spcPct val="120000"/>
+              </a:lnSpc>
+            </a:pPr>
+            <a:r>
+              <a:rPr sz="1800">
+                <a:solidFill>
+                  <a:srgbClr val="283E4E"/>
+                </a:solidFill>
+                <a:latin typeface="Arial"/>
+                <a:ea typeface="黑体"/>
+                <a:cs typeface="黑体"/>
+              </a:rPr>
+              <a:t>核心判断占位：用一句话收束左侧证据。对比色只承担一个重点，不做大面积铺色。</a:t>
+            </a:r>
+          </a:p>
+        </p:txBody>
+      </p:sp>
+      <p:pic>
+        <p:nvPicPr>
+          <p:cNvPr id="19" name="Picture 18" descr="placeholder-photo.png"/>
+          <p:cNvPicPr>
+            <a:picLocks noChangeAspect="1"/>
+          </p:cNvPicPr>
+          <p:nvPr/>
+        </p:nvPicPr>
+        <p:blipFill>
+          <a:blip r:embed="rId2"/>
+          <a:srcRect t="24558" b="24558"/>
+          <a:stretch>
+            <a:fillRect/>
+          </a:stretch>
+        </p:blipFill>
+        <p:spPr>
+          <a:xfrm>
+            <a:off x="7178040" y="1664208"/>
+            <a:ext cx="5175504" cy="1481328"/>
+          </a:xfrm>
+          <a:prstGeom prst="rect">
+            <a:avLst/>
+          </a:prstGeom>
+        </p:spPr>
+      </p:pic>
+      <p:sp>
+        <p:nvSpPr>
+          <p:cNvPr id="20" name="Oval 19"/>
+          <p:cNvSpPr/>
+          <p:nvPr/>
+        </p:nvSpPr>
+        <p:spPr>
+          <a:xfrm>
+            <a:off x="7178040" y="3310128"/>
+            <a:ext cx="1572768" cy="1572768"/>
+          </a:xfrm>
+          <a:prstGeom prst="ellipse">
+            <a:avLst/>
+          </a:prstGeom>
+          <a:solidFill>
+            <a:srgbClr val="283E4E"/>
+          </a:solidFill>
+          <a:ln>
+            <a:noFill/>
+          </a:ln>
+          <a:effectLst/>
+        </p:spPr>
+        <p:style>
+          <a:lnRef idx="1">
+            <a:schemeClr val="accent1"/>
+          </a:lnRef>
+          <a:fillRef idx="3">
+            <a:schemeClr val="accent1"/>
+          </a:fillRef>
+          <a:effectRef idx="2">
+            <a:schemeClr val="accent1"/>
+          </a:effectRef>
+          <a:fontRef idx="minor">
+            <a:schemeClr val="lt1"/>
+          </a:fontRef>
+        </p:style>
+        <p:txBody>
+          <a:bodyPr rtlCol="0" anchor="ctr"/>
+          <a:lstStyle/>
+          <a:p/>
+        </p:txBody>
+      </p:sp>
+      <p:sp>
+        <p:nvSpPr>
+          <p:cNvPr id="21" name="TextBox 20"/>
+          <p:cNvSpPr txBox="1"/>
+          <p:nvPr/>
+        </p:nvSpPr>
+        <p:spPr>
+          <a:xfrm>
+            <a:off x="7223760" y="3639312"/>
+            <a:ext cx="1481328" cy="640080"/>
+          </a:xfrm>
+          <a:prstGeom prst="rect">
+            <a:avLst/>
+          </a:prstGeom>
+          <a:noFill/>
+        </p:spPr>
+        <p:txBody>
+          <a:bodyPr wrap="square" anchor="ctr" lIns="0" rIns="0" tIns="0" bIns="0">
+            <a:spAutoFit/>
+          </a:bodyPr>
+          <a:lstStyle/>
+          <a:p>
+            <a:pPr algn="ctr">
+              <a:lnSpc>
+                <a:spcPct val="100000"/>
+              </a:lnSpc>
+            </a:pPr>
+            <a:r>
+              <a:rPr sz="3600">
+                <a:solidFill>
+                  <a:srgbClr val="FFFFFF"/>
+                </a:solidFill>
+                <a:latin typeface="Arial"/>
+                <a:ea typeface="黑体"/>
+                <a:cs typeface="黑体"/>
+              </a:rPr>
+              <a:t>38.6%</a:t>
+            </a:r>
+          </a:p>
+        </p:txBody>
+      </p:sp>
+      <p:sp>
+        <p:nvSpPr>
+          <p:cNvPr id="22" name="TextBox 21"/>
+          <p:cNvSpPr txBox="1"/>
+          <p:nvPr/>
+        </p:nvSpPr>
+        <p:spPr>
+          <a:xfrm>
+            <a:off x="7269480" y="4352544"/>
+            <a:ext cx="1389888" cy="310896"/>
+          </a:xfrm>
+          <a:prstGeom prst="rect">
+            <a:avLst/>
+          </a:prstGeom>
+          <a:noFill/>
+        </p:spPr>
+        <p:txBody>
+          <a:bodyPr wrap="square" anchor="t" lIns="0" rIns="0" tIns="0" bIns="0">
+            <a:spAutoFit/>
+          </a:bodyPr>
+          <a:lstStyle/>
+          <a:p>
+            <a:pPr algn="ctr">
+              <a:lnSpc>
+                <a:spcPct val="100000"/>
+              </a:lnSpc>
+            </a:pPr>
+            <a:r>
+              <a:rPr sz="1600">
+                <a:solidFill>
+                  <a:srgbClr val="FFFFFF"/>
+                </a:solidFill>
+                <a:latin typeface="Times New Roman"/>
+                <a:ea typeface="宋体"/>
+                <a:cs typeface="宋体"/>
+              </a:rPr>
+              <a:t>占位数值</a:t>
+            </a:r>
+          </a:p>
+        </p:txBody>
+      </p:sp>
+      <p:sp>
+        <p:nvSpPr>
+          <p:cNvPr id="23" name="Rectangle 22"/>
+          <p:cNvSpPr/>
+          <p:nvPr/>
+        </p:nvSpPr>
+        <p:spPr>
+          <a:xfrm>
+            <a:off x="9098280" y="3310128"/>
+            <a:ext cx="3255264" cy="402336"/>
+          </a:xfrm>
+          <a:prstGeom prst="rect">
+            <a:avLst/>
+          </a:prstGeom>
+          <a:solidFill>
+            <a:srgbClr val="E0B15B"/>
+          </a:solidFill>
+          <a:ln>
+            <a:noFill/>
+          </a:ln>
+          <a:effectLst/>
+        </p:spPr>
+        <p:style>
+          <a:lnRef idx="1">
+            <a:schemeClr val="accent1"/>
+          </a:lnRef>
+          <a:fillRef idx="3">
+            <a:schemeClr val="accent1"/>
+          </a:fillRef>
+          <a:effectRef idx="2">
+            <a:schemeClr val="accent1"/>
+          </a:effectRef>
+          <a:fontRef idx="minor">
+            <a:schemeClr val="lt1"/>
+          </a:fontRef>
+        </p:style>
+        <p:txBody>
+          <a:bodyPr rtlCol="0" anchor="ctr"/>
+          <a:lstStyle/>
+          <a:p/>
+        </p:txBody>
+      </p:sp>
+      <p:sp>
+        <p:nvSpPr>
+          <p:cNvPr id="24" name="TextBox 23"/>
+          <p:cNvSpPr txBox="1"/>
+          <p:nvPr/>
+        </p:nvSpPr>
+        <p:spPr>
+          <a:xfrm>
+            <a:off x="9235440" y="3383280"/>
+            <a:ext cx="2980944" cy="274320"/>
+          </a:xfrm>
+          <a:prstGeom prst="rect">
+            <a:avLst/>
+          </a:prstGeom>
+          <a:noFill/>
+        </p:spPr>
+        <p:txBody>
+          <a:bodyPr wrap="square" anchor="t" lIns="0" rIns="0" tIns="0" bIns="0">
+            <a:spAutoFit/>
+          </a:bodyPr>
+          <a:lstStyle/>
+          <a:p>
+            <a:pPr algn="l">
+              <a:lnSpc>
+                <a:spcPct val="100000"/>
+              </a:lnSpc>
+            </a:pPr>
+            <a:r>
+              <a:rPr sz="1600">
+                <a:solidFill>
+                  <a:srgbClr val="142129"/>
+                </a:solidFill>
+                <a:latin typeface="Arial"/>
+                <a:ea typeface="黑体"/>
+                <a:cs typeface="黑体"/>
+              </a:rPr>
+              <a:t>关键提示：对比色只点一个重点</a:t>
+            </a:r>
+          </a:p>
+        </p:txBody>
+      </p:sp>
+      <p:graphicFrame>
+        <p:nvGraphicFramePr>
+          <p:cNvPr id="25" name="Chart 24"/>
+          <p:cNvGraphicFramePr>
+            <a:graphicFrameLocks noGrp="1"/>
+          </p:cNvGraphicFramePr>
+          <p:nvPr/>
+        </p:nvGraphicFramePr>
+        <p:xfrm>
+          <a:off x="9098280" y="3877056"/>
+          <a:ext cx="3255264" cy="1920240"/>
+        </p:xfrm>
+        <a:graphic>
+          <a:graphicData uri="http://schemas.openxmlformats.org/drawingml/2006/chart">
+            <c:chart xmlns:c="http://schemas.openxmlformats.org/drawingml/2006/chart" r:id="rId3"/>
+          </a:graphicData>
+        </a:graphic>
+      </p:graphicFrame>
+    </p:spTree>
+  </p:cSld>
+  <p:clrMapOvr>
+    <a:masterClrMapping/>
+  </p:clrMapOvr>
+</p:sld>
+</file>
+
+<file path=ppt/slides/slide3.xml><?xml version="1.0" encoding="utf-8"?>
+<p:sld xmlns:a="http://schemas.openxmlformats.org/drawingml/2006/main" xmlns:p="http://schemas.openxmlformats.org/presentationml/2006/main" xmlns:r="http://schemas.openxmlformats.org/officeDocument/2006/relationships">
+  <p:cSld>
+    <p:spTree>
+      <p:nvGrpSpPr>
+        <p:cNvPr id="1" name=""/>
+        <p:cNvGrpSpPr/>
+        <p:nvPr/>
+      </p:nvGrpSpPr>
+      <p:grpSpPr/>
+      <p:sp>
+        <p:nvSpPr>
+          <p:cNvPr id="2" name="TextBox 1"/>
+          <p:cNvSpPr txBox="1"/>
+          <p:nvPr/>
+        </p:nvSpPr>
+        <p:spPr>
+          <a:xfrm>
+            <a:off x="5852160" y="219456"/>
+            <a:ext cx="5577840" cy="310896"/>
+          </a:xfrm>
+          <a:prstGeom prst="rect">
+            <a:avLst/>
+          </a:prstGeom>
+          <a:noFill/>
+        </p:spPr>
+        <p:txBody>
+          <a:bodyPr wrap="square" anchor="t" lIns="0" rIns="0" tIns="0" bIns="0">
+            <a:spAutoFit/>
+          </a:bodyPr>
+          <a:lstStyle/>
+          <a:p>
+            <a:pPr algn="r">
+              <a:lnSpc>
+                <a:spcPct val="100000"/>
+              </a:lnSpc>
+            </a:pPr>
+            <a:r>
+              <a:rPr sz="1600">
+                <a:solidFill>
+                  <a:srgbClr val="000000"/>
+                </a:solidFill>
+                <a:latin typeface="Times New Roman"/>
+                <a:ea typeface="宋体"/>
+                <a:cs typeface="宋体"/>
+              </a:rPr>
+              <a:t>示例 · 汇报页骨架</a:t>
+            </a:r>
+          </a:p>
+        </p:txBody>
+      </p:sp>
+      <p:sp>
+        <p:nvSpPr>
+          <p:cNvPr id="3" name="TextBox 2"/>
+          <p:cNvSpPr txBox="1"/>
+          <p:nvPr/>
+        </p:nvSpPr>
+        <p:spPr>
+          <a:xfrm>
+            <a:off x="11521440" y="219456"/>
+            <a:ext cx="832104" cy="310896"/>
+          </a:xfrm>
+          <a:prstGeom prst="rect">
+            <a:avLst/>
+          </a:prstGeom>
+          <a:noFill/>
+        </p:spPr>
+        <p:txBody>
+          <a:bodyPr wrap="square" anchor="t" lIns="0" rIns="0" tIns="0" bIns="0">
+            <a:spAutoFit/>
+          </a:bodyPr>
+          <a:lstStyle/>
+          <a:p>
+            <a:pPr algn="r">
+              <a:lnSpc>
+                <a:spcPct val="100000"/>
+              </a:lnSpc>
+            </a:pPr>
+            <a:r>
+              <a:rPr sz="1600">
+                <a:solidFill>
+                  <a:srgbClr val="283E4E"/>
+                </a:solidFill>
+                <a:latin typeface="Arial"/>
+                <a:ea typeface="黑体"/>
+                <a:cs typeface="黑体"/>
+              </a:rPr>
+              <a:t>03</a:t>
+            </a:r>
+          </a:p>
+        </p:txBody>
+      </p:sp>
+      <p:sp>
+        <p:nvSpPr>
+          <p:cNvPr id="4" name="TextBox 3"/>
+          <p:cNvSpPr txBox="1"/>
+          <p:nvPr/>
+        </p:nvSpPr>
+        <p:spPr>
+          <a:xfrm>
+            <a:off x="502920" y="530352"/>
+            <a:ext cx="11850624" cy="603504"/>
+          </a:xfrm>
+          <a:prstGeom prst="rect">
+            <a:avLst/>
+          </a:prstGeom>
+          <a:noFill/>
+        </p:spPr>
+        <p:txBody>
+          <a:bodyPr wrap="square" anchor="t" lIns="0" rIns="0" tIns="0" bIns="0">
+            <a:spAutoFit/>
+          </a:bodyPr>
+          <a:lstStyle/>
+          <a:p>
+            <a:pPr algn="l">
+              <a:lnSpc>
+                <a:spcPct val="100000"/>
+              </a:lnSpc>
+            </a:pPr>
+            <a:r>
+              <a:rPr sz="3000">
+                <a:solidFill>
+                  <a:srgbClr val="283E4E"/>
+                </a:solidFill>
+                <a:latin typeface="Arial"/>
+                <a:ea typeface="黑体"/>
+                <a:cs typeface="黑体"/>
+              </a:rPr>
+              <a:t>示例页：强数据内容用表格承载</a:t>
+            </a:r>
+          </a:p>
+        </p:txBody>
+      </p:sp>
+      <p:sp>
+        <p:nvSpPr>
+          <p:cNvPr id="5" name="TextBox 4"/>
+          <p:cNvSpPr txBox="1"/>
+          <p:nvPr/>
+        </p:nvSpPr>
+        <p:spPr>
+          <a:xfrm>
+            <a:off x="502920" y="1152144"/>
+            <a:ext cx="11850624" cy="329184"/>
+          </a:xfrm>
+          <a:prstGeom prst="rect">
+            <a:avLst/>
+          </a:prstGeom>
+          <a:noFill/>
+        </p:spPr>
+        <p:txBody>
+          <a:bodyPr wrap="square" anchor="t" lIns="0" rIns="0" tIns="0" bIns="0">
+            <a:spAutoFit/>
+          </a:bodyPr>
+          <a:lstStyle/>
+          <a:p>
+            <a:pPr algn="l">
+              <a:lnSpc>
+                <a:spcPct val="100000"/>
+              </a:lnSpc>
+            </a:pPr>
+            <a:r>
+              <a:rPr sz="2000">
+                <a:solidFill>
+                  <a:srgbClr val="000000"/>
+                </a:solidFill>
+                <a:latin typeface="Times New Roman"/>
+                <a:ea typeface="宋体"/>
+                <a:cs typeface="宋体"/>
+              </a:rPr>
+              <a:t>指标对比、口径对照、多维数据用表格；叙事与机制内容才用方块。</a:t>
             </a:r>
           </a:p>
         </p:txBody>
@@ -5709,7 +6390,7 @@
                   </a:txBody>
                   <a:tcPr marL="128016" marR="91440" marT="45720" marB="45720" anchor="ctr">
                     <a:solidFill>
-                      <a:srgbClr val="F1F5F8"/>
+                      <a:srgbClr val="D6E5E1"/>
                     </a:solidFill>
                   </a:tcPr>
                 </a:tc>
@@ -5734,7 +6415,7 @@
                   </a:txBody>
                   <a:tcPr marL="128016" marR="91440" marT="45720" marB="45720" anchor="ctr">
                     <a:solidFill>
-                      <a:srgbClr val="F1F5F8"/>
+                      <a:srgbClr val="D6E5E1"/>
                     </a:solidFill>
                   </a:tcPr>
                 </a:tc>
@@ -5759,7 +6440,7 @@
                   </a:txBody>
                   <a:tcPr marL="128016" marR="91440" marT="45720" marB="45720" anchor="ctr">
                     <a:solidFill>
-                      <a:srgbClr val="F1F5F8"/>
+                      <a:srgbClr val="D6E5E1"/>
                     </a:solidFill>
                   </a:tcPr>
                 </a:tc>
@@ -5784,7 +6465,7 @@
                   </a:txBody>
                   <a:tcPr marL="128016" marR="91440" marT="45720" marB="45720" anchor="ctr">
                     <a:solidFill>
-                      <a:srgbClr val="F1F5F8"/>
+                      <a:srgbClr val="D6E5E1"/>
                     </a:solidFill>
                   </a:tcPr>
                 </a:tc>
@@ -5809,7 +6490,7 @@
                   </a:txBody>
                   <a:tcPr marL="128016" marR="91440" marT="45720" marB="45720" anchor="ctr">
                     <a:solidFill>
-                      <a:srgbClr val="F1F5F8"/>
+                      <a:srgbClr val="D6E5E1"/>
                     </a:solidFill>
                   </a:tcPr>
                 </a:tc>
@@ -5896,7 +6577,4859 @@
                 <a:ea typeface="宋体"/>
                 <a:cs typeface="宋体"/>
               </a:rPr>
-              <a:t>表格页同样遵守字阶与三色限制：表头黑体白字，数值列主题色，正文宋体黑色，单元格一律 16pt 起。</a:t>
+              <a:t>示例结论：指标甲、丙、丁增长、指标乙回落。末行用辅助色浅底标示重点行，面积控制在两成以内。</a:t>
+            </a:r>
+          </a:p>
+        </p:txBody>
+      </p:sp>
+    </p:spTree>
+  </p:cSld>
+  <p:clrMapOvr>
+    <a:masterClrMapping/>
+  </p:clrMapOvr>
+</p:sld>
+</file>
+
+<file path=ppt/slides/slide4.xml><?xml version="1.0" encoding="utf-8"?>
+<p:sld xmlns:a="http://schemas.openxmlformats.org/drawingml/2006/main" xmlns:p="http://schemas.openxmlformats.org/presentationml/2006/main" xmlns:r="http://schemas.openxmlformats.org/officeDocument/2006/relationships">
+  <p:cSld>
+    <p:spTree>
+      <p:nvGrpSpPr>
+        <p:cNvPr id="1" name=""/>
+        <p:cNvGrpSpPr/>
+        <p:nvPr/>
+      </p:nvGrpSpPr>
+      <p:grpSpPr/>
+      <p:sp>
+        <p:nvSpPr>
+          <p:cNvPr id="2" name="TextBox 1"/>
+          <p:cNvSpPr txBox="1"/>
+          <p:nvPr/>
+        </p:nvSpPr>
+        <p:spPr>
+          <a:xfrm>
+            <a:off x="5852160" y="219456"/>
+            <a:ext cx="5577840" cy="310896"/>
+          </a:xfrm>
+          <a:prstGeom prst="rect">
+            <a:avLst/>
+          </a:prstGeom>
+          <a:noFill/>
+        </p:spPr>
+        <p:txBody>
+          <a:bodyPr wrap="square" anchor="t" lIns="0" rIns="0" tIns="0" bIns="0">
+            <a:spAutoFit/>
+          </a:bodyPr>
+          <a:lstStyle/>
+          <a:p>
+            <a:pPr algn="r">
+              <a:lnSpc>
+                <a:spcPct val="100000"/>
+              </a:lnSpc>
+            </a:pPr>
+            <a:r>
+              <a:rPr sz="1600">
+                <a:solidFill>
+                  <a:srgbClr val="000000"/>
+                </a:solidFill>
+                <a:latin typeface="Times New Roman"/>
+                <a:ea typeface="宋体"/>
+                <a:cs typeface="宋体"/>
+              </a:rPr>
+              <a:t>示例 · 汇报页骨架</a:t>
+            </a:r>
+          </a:p>
+        </p:txBody>
+      </p:sp>
+      <p:sp>
+        <p:nvSpPr>
+          <p:cNvPr id="3" name="TextBox 2"/>
+          <p:cNvSpPr txBox="1"/>
+          <p:nvPr/>
+        </p:nvSpPr>
+        <p:spPr>
+          <a:xfrm>
+            <a:off x="11521440" y="219456"/>
+            <a:ext cx="832104" cy="310896"/>
+          </a:xfrm>
+          <a:prstGeom prst="rect">
+            <a:avLst/>
+          </a:prstGeom>
+          <a:noFill/>
+        </p:spPr>
+        <p:txBody>
+          <a:bodyPr wrap="square" anchor="t" lIns="0" rIns="0" tIns="0" bIns="0">
+            <a:spAutoFit/>
+          </a:bodyPr>
+          <a:lstStyle/>
+          <a:p>
+            <a:pPr algn="r">
+              <a:lnSpc>
+                <a:spcPct val="100000"/>
+              </a:lnSpc>
+            </a:pPr>
+            <a:r>
+              <a:rPr sz="1600">
+                <a:solidFill>
+                  <a:srgbClr val="283E4E"/>
+                </a:solidFill>
+                <a:latin typeface="Arial"/>
+                <a:ea typeface="黑体"/>
+                <a:cs typeface="黑体"/>
+              </a:rPr>
+              <a:t>04</a:t>
+            </a:r>
+          </a:p>
+        </p:txBody>
+      </p:sp>
+      <p:sp>
+        <p:nvSpPr>
+          <p:cNvPr id="4" name="TextBox 3"/>
+          <p:cNvSpPr txBox="1"/>
+          <p:nvPr/>
+        </p:nvSpPr>
+        <p:spPr>
+          <a:xfrm>
+            <a:off x="502920" y="530352"/>
+            <a:ext cx="11850624" cy="603504"/>
+          </a:xfrm>
+          <a:prstGeom prst="rect">
+            <a:avLst/>
+          </a:prstGeom>
+          <a:noFill/>
+        </p:spPr>
+        <p:txBody>
+          <a:bodyPr wrap="square" anchor="t" lIns="0" rIns="0" tIns="0" bIns="0">
+            <a:spAutoFit/>
+          </a:bodyPr>
+          <a:lstStyle/>
+          <a:p>
+            <a:pPr algn="l">
+              <a:lnSpc>
+                <a:spcPct val="100000"/>
+              </a:lnSpc>
+            </a:pPr>
+            <a:r>
+              <a:rPr sz="3000">
+                <a:solidFill>
+                  <a:srgbClr val="283E4E"/>
+                </a:solidFill>
+                <a:latin typeface="Arial"/>
+                <a:ea typeface="黑体"/>
+                <a:cs typeface="黑体"/>
+              </a:rPr>
+              <a:t>示例页：对比关系用左右双栏</a:t>
+            </a:r>
+          </a:p>
+        </p:txBody>
+      </p:sp>
+      <p:sp>
+        <p:nvSpPr>
+          <p:cNvPr id="5" name="TextBox 4"/>
+          <p:cNvSpPr txBox="1"/>
+          <p:nvPr/>
+        </p:nvSpPr>
+        <p:spPr>
+          <a:xfrm>
+            <a:off x="502920" y="1152144"/>
+            <a:ext cx="11850624" cy="329184"/>
+          </a:xfrm>
+          <a:prstGeom prst="rect">
+            <a:avLst/>
+          </a:prstGeom>
+          <a:noFill/>
+        </p:spPr>
+        <p:txBody>
+          <a:bodyPr wrap="square" anchor="t" lIns="0" rIns="0" tIns="0" bIns="0">
+            <a:spAutoFit/>
+          </a:bodyPr>
+          <a:lstStyle/>
+          <a:p>
+            <a:pPr algn="l">
+              <a:lnSpc>
+                <a:spcPct val="100000"/>
+              </a:lnSpc>
+            </a:pPr>
+            <a:r>
+              <a:rPr sz="2000">
+                <a:solidFill>
+                  <a:srgbClr val="000000"/>
+                </a:solidFill>
+                <a:latin typeface="Times New Roman"/>
+                <a:ea typeface="宋体"/>
+                <a:cs typeface="宋体"/>
+              </a:rPr>
+              <a:t>两组并列信息用双栏对照，不用箭头堆叠；差异用一条中缝和标签区分。</a:t>
+            </a:r>
+          </a:p>
+        </p:txBody>
+      </p:sp>
+      <p:sp>
+        <p:nvSpPr>
+          <p:cNvPr id="6" name="Rectangle 5"/>
+          <p:cNvSpPr/>
+          <p:nvPr/>
+        </p:nvSpPr>
+        <p:spPr>
+          <a:xfrm>
+            <a:off x="502920" y="1554480"/>
+            <a:ext cx="11850624" cy="10972"/>
+          </a:xfrm>
+          <a:prstGeom prst="rect">
+            <a:avLst/>
+          </a:prstGeom>
+          <a:solidFill>
+            <a:srgbClr val="283E4E"/>
+          </a:solidFill>
+          <a:ln>
+            <a:noFill/>
+          </a:ln>
+          <a:effectLst/>
+        </p:spPr>
+        <p:style>
+          <a:lnRef idx="1">
+            <a:schemeClr val="accent1"/>
+          </a:lnRef>
+          <a:fillRef idx="3">
+            <a:schemeClr val="accent1"/>
+          </a:fillRef>
+          <a:effectRef idx="2">
+            <a:schemeClr val="accent1"/>
+          </a:effectRef>
+          <a:fontRef idx="minor">
+            <a:schemeClr val="lt1"/>
+          </a:fontRef>
+        </p:style>
+        <p:txBody>
+          <a:bodyPr rtlCol="0" anchor="ctr"/>
+          <a:lstStyle/>
+          <a:p/>
+        </p:txBody>
+      </p:sp>
+      <p:sp>
+        <p:nvSpPr>
+          <p:cNvPr id="7" name="Rectangle 6"/>
+          <p:cNvSpPr/>
+          <p:nvPr/>
+        </p:nvSpPr>
+        <p:spPr>
+          <a:xfrm>
+            <a:off x="502920" y="1700784"/>
+            <a:ext cx="5532120" cy="3931920"/>
+          </a:xfrm>
+          <a:prstGeom prst="rect">
+            <a:avLst/>
+          </a:prstGeom>
+          <a:solidFill>
+            <a:srgbClr val="F1F5F8"/>
+          </a:solidFill>
+          <a:ln w="9525">
+            <a:solidFill>
+              <a:srgbClr val="B7C1C8"/>
+            </a:solidFill>
+          </a:ln>
+          <a:effectLst/>
+        </p:spPr>
+        <p:style>
+          <a:lnRef idx="1">
+            <a:schemeClr val="accent1"/>
+          </a:lnRef>
+          <a:fillRef idx="3">
+            <a:schemeClr val="accent1"/>
+          </a:fillRef>
+          <a:effectRef idx="2">
+            <a:schemeClr val="accent1"/>
+          </a:effectRef>
+          <a:fontRef idx="minor">
+            <a:schemeClr val="lt1"/>
+          </a:fontRef>
+        </p:style>
+        <p:txBody>
+          <a:bodyPr rtlCol="0" anchor="ctr"/>
+          <a:lstStyle/>
+          <a:p/>
+        </p:txBody>
+      </p:sp>
+      <p:sp>
+        <p:nvSpPr>
+          <p:cNvPr id="8" name="Rectangle 7"/>
+          <p:cNvSpPr/>
+          <p:nvPr/>
+        </p:nvSpPr>
+        <p:spPr>
+          <a:xfrm>
+            <a:off x="6291072" y="1700784"/>
+            <a:ext cx="5532120" cy="3931920"/>
+          </a:xfrm>
+          <a:prstGeom prst="rect">
+            <a:avLst/>
+          </a:prstGeom>
+          <a:solidFill>
+            <a:srgbClr val="FFFFFF"/>
+          </a:solidFill>
+          <a:ln w="9525">
+            <a:solidFill>
+              <a:srgbClr val="B7C1C8"/>
+            </a:solidFill>
+          </a:ln>
+          <a:effectLst/>
+        </p:spPr>
+        <p:style>
+          <a:lnRef idx="1">
+            <a:schemeClr val="accent1"/>
+          </a:lnRef>
+          <a:fillRef idx="3">
+            <a:schemeClr val="accent1"/>
+          </a:fillRef>
+          <a:effectRef idx="2">
+            <a:schemeClr val="accent1"/>
+          </a:effectRef>
+          <a:fontRef idx="minor">
+            <a:schemeClr val="lt1"/>
+          </a:fontRef>
+        </p:style>
+        <p:txBody>
+          <a:bodyPr rtlCol="0" anchor="ctr"/>
+          <a:lstStyle/>
+          <a:p/>
+        </p:txBody>
+      </p:sp>
+      <p:sp>
+        <p:nvSpPr>
+          <p:cNvPr id="9" name="TextBox 8"/>
+          <p:cNvSpPr txBox="1"/>
+          <p:nvPr/>
+        </p:nvSpPr>
+        <p:spPr>
+          <a:xfrm>
+            <a:off x="777240" y="1865376"/>
+            <a:ext cx="4983480" cy="365760"/>
+          </a:xfrm>
+          <a:prstGeom prst="rect">
+            <a:avLst/>
+          </a:prstGeom>
+          <a:noFill/>
+        </p:spPr>
+        <p:txBody>
+          <a:bodyPr wrap="square" anchor="t" lIns="0" rIns="0" tIns="0" bIns="0">
+            <a:spAutoFit/>
+          </a:bodyPr>
+          <a:lstStyle/>
+          <a:p>
+            <a:pPr algn="l">
+              <a:lnSpc>
+                <a:spcPct val="100000"/>
+              </a:lnSpc>
+            </a:pPr>
+            <a:r>
+              <a:rPr sz="2000">
+                <a:solidFill>
+                  <a:srgbClr val="283E4E"/>
+                </a:solidFill>
+                <a:latin typeface="Arial"/>
+                <a:ea typeface="黑体"/>
+                <a:cs typeface="黑体"/>
+              </a:rPr>
+              <a:t>左侧：原有做法</a:t>
+            </a:r>
+          </a:p>
+        </p:txBody>
+      </p:sp>
+      <p:sp>
+        <p:nvSpPr>
+          <p:cNvPr id="10" name="TextBox 9"/>
+          <p:cNvSpPr txBox="1"/>
+          <p:nvPr/>
+        </p:nvSpPr>
+        <p:spPr>
+          <a:xfrm>
+            <a:off x="6565392" y="1865376"/>
+            <a:ext cx="4983480" cy="365760"/>
+          </a:xfrm>
+          <a:prstGeom prst="rect">
+            <a:avLst/>
+          </a:prstGeom>
+          <a:noFill/>
+        </p:spPr>
+        <p:txBody>
+          <a:bodyPr wrap="square" anchor="t" lIns="0" rIns="0" tIns="0" bIns="0">
+            <a:spAutoFit/>
+          </a:bodyPr>
+          <a:lstStyle/>
+          <a:p>
+            <a:pPr algn="l">
+              <a:lnSpc>
+                <a:spcPct val="100000"/>
+              </a:lnSpc>
+            </a:pPr>
+            <a:r>
+              <a:rPr sz="2000">
+                <a:solidFill>
+                  <a:srgbClr val="283E4E"/>
+                </a:solidFill>
+                <a:latin typeface="Arial"/>
+                <a:ea typeface="黑体"/>
+                <a:cs typeface="黑体"/>
+              </a:rPr>
+              <a:t>右侧：调整后做法</a:t>
+            </a:r>
+          </a:p>
+        </p:txBody>
+      </p:sp>
+      <p:sp>
+        <p:nvSpPr>
+          <p:cNvPr id="11" name="TextBox 10"/>
+          <p:cNvSpPr txBox="1"/>
+          <p:nvPr/>
+        </p:nvSpPr>
+        <p:spPr>
+          <a:xfrm>
+            <a:off x="777240" y="2468880"/>
+            <a:ext cx="4983480" cy="585216"/>
+          </a:xfrm>
+          <a:prstGeom prst="rect">
+            <a:avLst/>
+          </a:prstGeom>
+          <a:noFill/>
+        </p:spPr>
+        <p:txBody>
+          <a:bodyPr wrap="square" anchor="ctr" lIns="0" rIns="0" tIns="0" bIns="0">
+            <a:spAutoFit/>
+          </a:bodyPr>
+          <a:lstStyle/>
+          <a:p>
+            <a:pPr algn="l">
+              <a:lnSpc>
+                <a:spcPct val="120000"/>
+              </a:lnSpc>
+            </a:pPr>
+            <a:r>
+              <a:rPr sz="1800">
+                <a:solidFill>
+                  <a:srgbClr val="000000"/>
+                </a:solidFill>
+                <a:latin typeface="Times New Roman"/>
+                <a:ea typeface="宋体"/>
+                <a:cs typeface="宋体"/>
+              </a:rPr>
+              <a:t>条目占位一：把机制写清楚，不写口号。</a:t>
+            </a:r>
+          </a:p>
+        </p:txBody>
+      </p:sp>
+      <p:sp>
+        <p:nvSpPr>
+          <p:cNvPr id="12" name="TextBox 11"/>
+          <p:cNvSpPr txBox="1"/>
+          <p:nvPr/>
+        </p:nvSpPr>
+        <p:spPr>
+          <a:xfrm>
+            <a:off x="777240" y="3127248"/>
+            <a:ext cx="4983480" cy="585216"/>
+          </a:xfrm>
+          <a:prstGeom prst="rect">
+            <a:avLst/>
+          </a:prstGeom>
+          <a:noFill/>
+        </p:spPr>
+        <p:txBody>
+          <a:bodyPr wrap="square" anchor="ctr" lIns="0" rIns="0" tIns="0" bIns="0">
+            <a:spAutoFit/>
+          </a:bodyPr>
+          <a:lstStyle/>
+          <a:p>
+            <a:pPr algn="l">
+              <a:lnSpc>
+                <a:spcPct val="120000"/>
+              </a:lnSpc>
+            </a:pPr>
+            <a:r>
+              <a:rPr sz="1800">
+                <a:solidFill>
+                  <a:srgbClr val="000000"/>
+                </a:solidFill>
+                <a:latin typeface="Times New Roman"/>
+                <a:ea typeface="宋体"/>
+                <a:cs typeface="宋体"/>
+              </a:rPr>
+              <a:t>条目占位二：数字与口径写在同一句。</a:t>
+            </a:r>
+          </a:p>
+        </p:txBody>
+      </p:sp>
+      <p:sp>
+        <p:nvSpPr>
+          <p:cNvPr id="13" name="TextBox 12"/>
+          <p:cNvSpPr txBox="1"/>
+          <p:nvPr/>
+        </p:nvSpPr>
+        <p:spPr>
+          <a:xfrm>
+            <a:off x="777240" y="3785616"/>
+            <a:ext cx="4983480" cy="585216"/>
+          </a:xfrm>
+          <a:prstGeom prst="rect">
+            <a:avLst/>
+          </a:prstGeom>
+          <a:noFill/>
+        </p:spPr>
+        <p:txBody>
+          <a:bodyPr wrap="square" anchor="ctr" lIns="0" rIns="0" tIns="0" bIns="0">
+            <a:spAutoFit/>
+          </a:bodyPr>
+          <a:lstStyle/>
+          <a:p>
+            <a:pPr algn="l">
+              <a:lnSpc>
+                <a:spcPct val="120000"/>
+              </a:lnSpc>
+            </a:pPr>
+            <a:r>
+              <a:rPr sz="1800">
+                <a:solidFill>
+                  <a:srgbClr val="000000"/>
+                </a:solidFill>
+                <a:latin typeface="Times New Roman"/>
+                <a:ea typeface="宋体"/>
+                <a:cs typeface="宋体"/>
+              </a:rPr>
+              <a:t>条目占位三：来源进备注，不上片。</a:t>
+            </a:r>
+          </a:p>
+        </p:txBody>
+      </p:sp>
+      <p:sp>
+        <p:nvSpPr>
+          <p:cNvPr id="14" name="TextBox 13"/>
+          <p:cNvSpPr txBox="1"/>
+          <p:nvPr/>
+        </p:nvSpPr>
+        <p:spPr>
+          <a:xfrm>
+            <a:off x="6565392" y="2468880"/>
+            <a:ext cx="4983480" cy="585216"/>
+          </a:xfrm>
+          <a:prstGeom prst="rect">
+            <a:avLst/>
+          </a:prstGeom>
+          <a:noFill/>
+        </p:spPr>
+        <p:txBody>
+          <a:bodyPr wrap="square" anchor="ctr" lIns="0" rIns="0" tIns="0" bIns="0">
+            <a:spAutoFit/>
+          </a:bodyPr>
+          <a:lstStyle/>
+          <a:p>
+            <a:pPr algn="l">
+              <a:lnSpc>
+                <a:spcPct val="120000"/>
+              </a:lnSpc>
+            </a:pPr>
+            <a:r>
+              <a:rPr sz="1800">
+                <a:solidFill>
+                  <a:srgbClr val="000000"/>
+                </a:solidFill>
+                <a:latin typeface="Times New Roman"/>
+                <a:ea typeface="宋体"/>
+                <a:cs typeface="宋体"/>
+              </a:rPr>
+              <a:t>条目占位一：结构先行，先改大纲再改页面。</a:t>
+            </a:r>
+          </a:p>
+        </p:txBody>
+      </p:sp>
+      <p:sp>
+        <p:nvSpPr>
+          <p:cNvPr id="15" name="TextBox 14"/>
+          <p:cNvSpPr txBox="1"/>
+          <p:nvPr/>
+        </p:nvSpPr>
+        <p:spPr>
+          <a:xfrm>
+            <a:off x="6565392" y="3127248"/>
+            <a:ext cx="4983480" cy="585216"/>
+          </a:xfrm>
+          <a:prstGeom prst="rect">
+            <a:avLst/>
+          </a:prstGeom>
+          <a:noFill/>
+        </p:spPr>
+        <p:txBody>
+          <a:bodyPr wrap="square" anchor="ctr" lIns="0" rIns="0" tIns="0" bIns="0">
+            <a:spAutoFit/>
+          </a:bodyPr>
+          <a:lstStyle/>
+          <a:p>
+            <a:pPr algn="l">
+              <a:lnSpc>
+                <a:spcPct val="120000"/>
+              </a:lnSpc>
+            </a:pPr>
+            <a:r>
+              <a:rPr sz="1800">
+                <a:solidFill>
+                  <a:srgbClr val="000000"/>
+                </a:solidFill>
+                <a:latin typeface="Times New Roman"/>
+                <a:ea typeface="宋体"/>
+                <a:cs typeface="宋体"/>
+              </a:rPr>
+              <a:t>条目占位二：版面留白，不填死下缘。</a:t>
+            </a:r>
+          </a:p>
+        </p:txBody>
+      </p:sp>
+      <p:sp>
+        <p:nvSpPr>
+          <p:cNvPr id="16" name="TextBox 15"/>
+          <p:cNvSpPr txBox="1"/>
+          <p:nvPr/>
+        </p:nvSpPr>
+        <p:spPr>
+          <a:xfrm>
+            <a:off x="6565392" y="3785616"/>
+            <a:ext cx="4983480" cy="585216"/>
+          </a:xfrm>
+          <a:prstGeom prst="rect">
+            <a:avLst/>
+          </a:prstGeom>
+          <a:noFill/>
+        </p:spPr>
+        <p:txBody>
+          <a:bodyPr wrap="square" anchor="ctr" lIns="0" rIns="0" tIns="0" bIns="0">
+            <a:spAutoFit/>
+          </a:bodyPr>
+          <a:lstStyle/>
+          <a:p>
+            <a:pPr algn="l">
+              <a:lnSpc>
+                <a:spcPct val="120000"/>
+              </a:lnSpc>
+            </a:pPr>
+            <a:r>
+              <a:rPr sz="1800">
+                <a:solidFill>
+                  <a:srgbClr val="000000"/>
+                </a:solidFill>
+                <a:latin typeface="Times New Roman"/>
+                <a:ea typeface="宋体"/>
+                <a:cs typeface="宋体"/>
+              </a:rPr>
+              <a:t>条目占位三：对比色只点一个重点。</a:t>
+            </a:r>
+          </a:p>
+        </p:txBody>
+      </p:sp>
+      <p:sp>
+        <p:nvSpPr>
+          <p:cNvPr id="17" name="Parallelogram 16"/>
+          <p:cNvSpPr/>
+          <p:nvPr/>
+        </p:nvSpPr>
+        <p:spPr>
+          <a:xfrm>
+            <a:off x="6053328" y="1920240"/>
+            <a:ext cx="219456" cy="457200"/>
+          </a:xfrm>
+          <a:prstGeom prst="parallelogram">
+            <a:avLst/>
+          </a:prstGeom>
+          <a:solidFill>
+            <a:srgbClr val="E0B15B"/>
+          </a:solidFill>
+          <a:ln>
+            <a:noFill/>
+          </a:ln>
+          <a:effectLst/>
+        </p:spPr>
+        <p:style>
+          <a:lnRef idx="1">
+            <a:schemeClr val="accent1"/>
+          </a:lnRef>
+          <a:fillRef idx="3">
+            <a:schemeClr val="accent1"/>
+          </a:fillRef>
+          <a:effectRef idx="2">
+            <a:schemeClr val="accent1"/>
+          </a:effectRef>
+          <a:fontRef idx="minor">
+            <a:schemeClr val="lt1"/>
+          </a:fontRef>
+        </p:style>
+        <p:txBody>
+          <a:bodyPr rtlCol="0" anchor="ctr"/>
+          <a:lstStyle/>
+          <a:p/>
+        </p:txBody>
+      </p:sp>
+      <p:sp>
+        <p:nvSpPr>
+          <p:cNvPr id="18" name="TextBox 17"/>
+          <p:cNvSpPr txBox="1"/>
+          <p:nvPr/>
+        </p:nvSpPr>
+        <p:spPr>
+          <a:xfrm>
+            <a:off x="777240" y="4828032"/>
+            <a:ext cx="4983480" cy="566928"/>
+          </a:xfrm>
+          <a:prstGeom prst="rect">
+            <a:avLst/>
+          </a:prstGeom>
+          <a:noFill/>
+        </p:spPr>
+        <p:txBody>
+          <a:bodyPr wrap="square" anchor="ctr" lIns="0" rIns="0" tIns="0" bIns="0">
+            <a:spAutoFit/>
+          </a:bodyPr>
+          <a:lstStyle/>
+          <a:p>
+            <a:pPr algn="l">
+              <a:lnSpc>
+                <a:spcPct val="120000"/>
+              </a:lnSpc>
+            </a:pPr>
+            <a:r>
+              <a:rPr sz="1800">
+                <a:solidFill>
+                  <a:srgbClr val="8C5A16"/>
+                </a:solidFill>
+                <a:latin typeface="Arial"/>
+                <a:ea typeface="黑体"/>
+                <a:cs typeface="黑体"/>
+              </a:rPr>
+              <a:t>判断占位：机制可以借鉴，前提不能照搬。</a:t>
+            </a:r>
+          </a:p>
+        </p:txBody>
+      </p:sp>
+      <p:sp>
+        <p:nvSpPr>
+          <p:cNvPr id="19" name="TextBox 18"/>
+          <p:cNvSpPr txBox="1"/>
+          <p:nvPr/>
+        </p:nvSpPr>
+        <p:spPr>
+          <a:xfrm>
+            <a:off x="6565392" y="4828032"/>
+            <a:ext cx="4983480" cy="566928"/>
+          </a:xfrm>
+          <a:prstGeom prst="rect">
+            <a:avLst/>
+          </a:prstGeom>
+          <a:noFill/>
+        </p:spPr>
+        <p:txBody>
+          <a:bodyPr wrap="square" anchor="ctr" lIns="0" rIns="0" tIns="0" bIns="0">
+            <a:spAutoFit/>
+          </a:bodyPr>
+          <a:lstStyle/>
+          <a:p>
+            <a:pPr algn="l">
+              <a:lnSpc>
+                <a:spcPct val="120000"/>
+              </a:lnSpc>
+            </a:pPr>
+            <a:r>
+              <a:rPr sz="1800">
+                <a:solidFill>
+                  <a:srgbClr val="283E4E"/>
+                </a:solidFill>
+                <a:latin typeface="Arial"/>
+                <a:ea typeface="黑体"/>
+                <a:cs typeface="黑体"/>
+              </a:rPr>
+              <a:t>判断占位：先立自己的能力，再谈开放。</a:t>
+            </a:r>
+          </a:p>
+        </p:txBody>
+      </p:sp>
+    </p:spTree>
+  </p:cSld>
+  <p:clrMapOvr>
+    <a:masterClrMapping/>
+  </p:clrMapOvr>
+</p:sld>
+</file>
+
+<file path=ppt/slides/slide5.xml><?xml version="1.0" encoding="utf-8"?>
+<p:sld xmlns:a="http://schemas.openxmlformats.org/drawingml/2006/main" xmlns:p="http://schemas.openxmlformats.org/presentationml/2006/main" xmlns:r="http://schemas.openxmlformats.org/officeDocument/2006/relationships">
+  <p:cSld>
+    <p:spTree>
+      <p:nvGrpSpPr>
+        <p:cNvPr id="1" name=""/>
+        <p:cNvGrpSpPr/>
+        <p:nvPr/>
+      </p:nvGrpSpPr>
+      <p:grpSpPr/>
+      <p:sp>
+        <p:nvSpPr>
+          <p:cNvPr id="2" name="TextBox 1"/>
+          <p:cNvSpPr txBox="1"/>
+          <p:nvPr/>
+        </p:nvSpPr>
+        <p:spPr>
+          <a:xfrm>
+            <a:off x="5852160" y="219456"/>
+            <a:ext cx="5577840" cy="310896"/>
+          </a:xfrm>
+          <a:prstGeom prst="rect">
+            <a:avLst/>
+          </a:prstGeom>
+          <a:noFill/>
+        </p:spPr>
+        <p:txBody>
+          <a:bodyPr wrap="square" anchor="t" lIns="0" rIns="0" tIns="0" bIns="0">
+            <a:spAutoFit/>
+          </a:bodyPr>
+          <a:lstStyle/>
+          <a:p>
+            <a:pPr algn="r">
+              <a:lnSpc>
+                <a:spcPct val="100000"/>
+              </a:lnSpc>
+            </a:pPr>
+            <a:r>
+              <a:rPr sz="1600">
+                <a:solidFill>
+                  <a:srgbClr val="000000"/>
+                </a:solidFill>
+                <a:latin typeface="Times New Roman"/>
+                <a:ea typeface="宋体"/>
+                <a:cs typeface="宋体"/>
+              </a:rPr>
+              <a:t>示例 · 汇报页骨架</a:t>
+            </a:r>
+          </a:p>
+        </p:txBody>
+      </p:sp>
+      <p:sp>
+        <p:nvSpPr>
+          <p:cNvPr id="3" name="TextBox 2"/>
+          <p:cNvSpPr txBox="1"/>
+          <p:nvPr/>
+        </p:nvSpPr>
+        <p:spPr>
+          <a:xfrm>
+            <a:off x="11521440" y="219456"/>
+            <a:ext cx="832104" cy="310896"/>
+          </a:xfrm>
+          <a:prstGeom prst="rect">
+            <a:avLst/>
+          </a:prstGeom>
+          <a:noFill/>
+        </p:spPr>
+        <p:txBody>
+          <a:bodyPr wrap="square" anchor="t" lIns="0" rIns="0" tIns="0" bIns="0">
+            <a:spAutoFit/>
+          </a:bodyPr>
+          <a:lstStyle/>
+          <a:p>
+            <a:pPr algn="r">
+              <a:lnSpc>
+                <a:spcPct val="100000"/>
+              </a:lnSpc>
+            </a:pPr>
+            <a:r>
+              <a:rPr sz="1600">
+                <a:solidFill>
+                  <a:srgbClr val="283E4E"/>
+                </a:solidFill>
+                <a:latin typeface="Arial"/>
+                <a:ea typeface="黑体"/>
+                <a:cs typeface="黑体"/>
+              </a:rPr>
+              <a:t>05</a:t>
+            </a:r>
+          </a:p>
+        </p:txBody>
+      </p:sp>
+      <p:sp>
+        <p:nvSpPr>
+          <p:cNvPr id="4" name="TextBox 3"/>
+          <p:cNvSpPr txBox="1"/>
+          <p:nvPr/>
+        </p:nvSpPr>
+        <p:spPr>
+          <a:xfrm>
+            <a:off x="502920" y="530352"/>
+            <a:ext cx="11850624" cy="603504"/>
+          </a:xfrm>
+          <a:prstGeom prst="rect">
+            <a:avLst/>
+          </a:prstGeom>
+          <a:noFill/>
+        </p:spPr>
+        <p:txBody>
+          <a:bodyPr wrap="square" anchor="t" lIns="0" rIns="0" tIns="0" bIns="0">
+            <a:spAutoFit/>
+          </a:bodyPr>
+          <a:lstStyle/>
+          <a:p>
+            <a:pPr algn="l">
+              <a:lnSpc>
+                <a:spcPct val="100000"/>
+              </a:lnSpc>
+            </a:pPr>
+            <a:r>
+              <a:rPr sz="3000">
+                <a:solidFill>
+                  <a:srgbClr val="283E4E"/>
+                </a:solidFill>
+                <a:latin typeface="Arial"/>
+                <a:ea typeface="黑体"/>
+                <a:cs typeface="黑体"/>
+              </a:rPr>
+              <a:t>示例页：流程关系用形状序列表达</a:t>
+            </a:r>
+          </a:p>
+        </p:txBody>
+      </p:sp>
+      <p:sp>
+        <p:nvSpPr>
+          <p:cNvPr id="5" name="TextBox 4"/>
+          <p:cNvSpPr txBox="1"/>
+          <p:nvPr/>
+        </p:nvSpPr>
+        <p:spPr>
+          <a:xfrm>
+            <a:off x="502920" y="1152144"/>
+            <a:ext cx="11850624" cy="329184"/>
+          </a:xfrm>
+          <a:prstGeom prst="rect">
+            <a:avLst/>
+          </a:prstGeom>
+          <a:noFill/>
+        </p:spPr>
+        <p:txBody>
+          <a:bodyPr wrap="square" anchor="t" lIns="0" rIns="0" tIns="0" bIns="0">
+            <a:spAutoFit/>
+          </a:bodyPr>
+          <a:lstStyle/>
+          <a:p>
+            <a:pPr algn="l">
+              <a:lnSpc>
+                <a:spcPct val="100000"/>
+              </a:lnSpc>
+            </a:pPr>
+            <a:r>
+              <a:rPr sz="2000">
+                <a:solidFill>
+                  <a:srgbClr val="000000"/>
+                </a:solidFill>
+                <a:latin typeface="Times New Roman"/>
+                <a:ea typeface="宋体"/>
+                <a:cs typeface="宋体"/>
+              </a:rPr>
+              <a:t>主视觉形状按语义选择：流程用箭头形与圆形节点，不用一排方块。</a:t>
+            </a:r>
+          </a:p>
+        </p:txBody>
+      </p:sp>
+      <p:sp>
+        <p:nvSpPr>
+          <p:cNvPr id="6" name="Rectangle 5"/>
+          <p:cNvSpPr/>
+          <p:nvPr/>
+        </p:nvSpPr>
+        <p:spPr>
+          <a:xfrm>
+            <a:off x="502920" y="1554480"/>
+            <a:ext cx="11850624" cy="10972"/>
+          </a:xfrm>
+          <a:prstGeom prst="rect">
+            <a:avLst/>
+          </a:prstGeom>
+          <a:solidFill>
+            <a:srgbClr val="283E4E"/>
+          </a:solidFill>
+          <a:ln>
+            <a:noFill/>
+          </a:ln>
+          <a:effectLst/>
+        </p:spPr>
+        <p:style>
+          <a:lnRef idx="1">
+            <a:schemeClr val="accent1"/>
+          </a:lnRef>
+          <a:fillRef idx="3">
+            <a:schemeClr val="accent1"/>
+          </a:fillRef>
+          <a:effectRef idx="2">
+            <a:schemeClr val="accent1"/>
+          </a:effectRef>
+          <a:fontRef idx="minor">
+            <a:schemeClr val="lt1"/>
+          </a:fontRef>
+        </p:style>
+        <p:txBody>
+          <a:bodyPr rtlCol="0" anchor="ctr"/>
+          <a:lstStyle/>
+          <a:p/>
+        </p:txBody>
+      </p:sp>
+      <p:sp>
+        <p:nvSpPr>
+          <p:cNvPr id="7" name="Rectangle 6"/>
+          <p:cNvSpPr/>
+          <p:nvPr/>
+        </p:nvSpPr>
+        <p:spPr>
+          <a:xfrm>
+            <a:off x="502920" y="1664208"/>
+            <a:ext cx="11850624" cy="786384"/>
+          </a:xfrm>
+          <a:prstGeom prst="rect">
+            <a:avLst/>
+          </a:prstGeom>
+          <a:solidFill>
+            <a:srgbClr val="F1F5F8"/>
+          </a:solidFill>
+          <a:ln>
+            <a:noFill/>
+          </a:ln>
+          <a:effectLst/>
+        </p:spPr>
+        <p:style>
+          <a:lnRef idx="1">
+            <a:schemeClr val="accent1"/>
+          </a:lnRef>
+          <a:fillRef idx="3">
+            <a:schemeClr val="accent1"/>
+          </a:fillRef>
+          <a:effectRef idx="2">
+            <a:schemeClr val="accent1"/>
+          </a:effectRef>
+          <a:fontRef idx="minor">
+            <a:schemeClr val="lt1"/>
+          </a:fontRef>
+        </p:style>
+        <p:txBody>
+          <a:bodyPr rtlCol="0" anchor="ctr"/>
+          <a:lstStyle/>
+          <a:p/>
+        </p:txBody>
+      </p:sp>
+      <p:sp>
+        <p:nvSpPr>
+          <p:cNvPr id="8" name="TextBox 7"/>
+          <p:cNvSpPr txBox="1"/>
+          <p:nvPr/>
+        </p:nvSpPr>
+        <p:spPr>
+          <a:xfrm>
+            <a:off x="694944" y="1773936"/>
+            <a:ext cx="11466576" cy="566928"/>
+          </a:xfrm>
+          <a:prstGeom prst="rect">
+            <a:avLst/>
+          </a:prstGeom>
+          <a:noFill/>
+        </p:spPr>
+        <p:txBody>
+          <a:bodyPr wrap="square" anchor="ctr" lIns="0" rIns="0" tIns="0" bIns="0">
+            <a:spAutoFit/>
+          </a:bodyPr>
+          <a:lstStyle/>
+          <a:p>
+            <a:pPr algn="l">
+              <a:lnSpc>
+                <a:spcPct val="120000"/>
+              </a:lnSpc>
+            </a:pPr>
+            <a:r>
+              <a:rPr sz="2000">
+                <a:solidFill>
+                  <a:srgbClr val="000000"/>
+                </a:solidFill>
+                <a:latin typeface="Times New Roman"/>
+                <a:ea typeface="楷体"/>
+                <a:cs typeface="楷体"/>
+              </a:rPr>
+              <a:t>导语占位：这一页演示流程关系。四个步骤用箭头形表达先后，序号用圆形节点标注。</a:t>
+            </a:r>
+          </a:p>
+        </p:txBody>
+      </p:sp>
+      <p:sp>
+        <p:nvSpPr>
+          <p:cNvPr id="9" name="Chevron 8"/>
+          <p:cNvSpPr/>
+          <p:nvPr/>
+        </p:nvSpPr>
+        <p:spPr>
+          <a:xfrm>
+            <a:off x="685800" y="2880360"/>
+            <a:ext cx="2331720" cy="1188720"/>
+          </a:xfrm>
+          <a:prstGeom prst="chevron">
+            <a:avLst/>
+          </a:prstGeom>
+          <a:solidFill>
+            <a:srgbClr val="FFFFFF"/>
+          </a:solidFill>
+          <a:ln w="9525">
+            <a:solidFill>
+              <a:srgbClr val="4A6577"/>
+            </a:solidFill>
+          </a:ln>
+          <a:effectLst/>
+        </p:spPr>
+        <p:style>
+          <a:lnRef idx="1">
+            <a:schemeClr val="accent1"/>
+          </a:lnRef>
+          <a:fillRef idx="3">
+            <a:schemeClr val="accent1"/>
+          </a:fillRef>
+          <a:effectRef idx="2">
+            <a:schemeClr val="accent1"/>
+          </a:effectRef>
+          <a:fontRef idx="minor">
+            <a:schemeClr val="lt1"/>
+          </a:fontRef>
+        </p:style>
+        <p:txBody>
+          <a:bodyPr rtlCol="0" anchor="ctr"/>
+          <a:lstStyle/>
+          <a:p/>
+        </p:txBody>
+      </p:sp>
+      <p:sp>
+        <p:nvSpPr>
+          <p:cNvPr id="10" name="TextBox 9"/>
+          <p:cNvSpPr txBox="1"/>
+          <p:nvPr/>
+        </p:nvSpPr>
+        <p:spPr>
+          <a:xfrm>
+            <a:off x="1051560" y="3035808"/>
+            <a:ext cx="1783080" cy="402336"/>
+          </a:xfrm>
+          <a:prstGeom prst="rect">
+            <a:avLst/>
+          </a:prstGeom>
+          <a:noFill/>
+        </p:spPr>
+        <p:txBody>
+          <a:bodyPr wrap="square" anchor="ctr" lIns="0" rIns="0" tIns="0" bIns="0">
+            <a:spAutoFit/>
+          </a:bodyPr>
+          <a:lstStyle/>
+          <a:p>
+            <a:pPr algn="ctr">
+              <a:lnSpc>
+                <a:spcPct val="100000"/>
+              </a:lnSpc>
+            </a:pPr>
+            <a:r>
+              <a:rPr sz="1800">
+                <a:solidFill>
+                  <a:srgbClr val="283E4E"/>
+                </a:solidFill>
+                <a:latin typeface="Arial"/>
+                <a:ea typeface="黑体"/>
+                <a:cs typeface="黑体"/>
+              </a:rPr>
+              <a:t>抽取材料</a:t>
+            </a:r>
+          </a:p>
+        </p:txBody>
+      </p:sp>
+      <p:sp>
+        <p:nvSpPr>
+          <p:cNvPr id="11" name="TextBox 10"/>
+          <p:cNvSpPr txBox="1"/>
+          <p:nvPr/>
+        </p:nvSpPr>
+        <p:spPr>
+          <a:xfrm>
+            <a:off x="996696" y="3438144"/>
+            <a:ext cx="1874519" cy="603504"/>
+          </a:xfrm>
+          <a:prstGeom prst="rect">
+            <a:avLst/>
+          </a:prstGeom>
+          <a:noFill/>
+        </p:spPr>
+        <p:txBody>
+          <a:bodyPr wrap="square" anchor="ctr" lIns="0" rIns="0" tIns="0" bIns="0">
+            <a:spAutoFit/>
+          </a:bodyPr>
+          <a:lstStyle/>
+          <a:p>
+            <a:pPr algn="ctr">
+              <a:lnSpc>
+                <a:spcPct val="115000"/>
+              </a:lnSpc>
+            </a:pPr>
+            <a:r>
+              <a:rPr sz="1600">
+                <a:solidFill>
+                  <a:srgbClr val="000000"/>
+                </a:solidFill>
+                <a:latin typeface="Times New Roman"/>
+                <a:ea typeface="宋体"/>
+                <a:cs typeface="宋体"/>
+              </a:rPr>
+              <a:t>从材料与来源文件取数</a:t>
+            </a:r>
+          </a:p>
+        </p:txBody>
+      </p:sp>
+      <p:sp>
+        <p:nvSpPr>
+          <p:cNvPr id="12" name="Oval 11"/>
+          <p:cNvSpPr/>
+          <p:nvPr/>
+        </p:nvSpPr>
+        <p:spPr>
+          <a:xfrm>
+            <a:off x="905256" y="2286000"/>
+            <a:ext cx="566928" cy="566928"/>
+          </a:xfrm>
+          <a:prstGeom prst="ellipse">
+            <a:avLst/>
+          </a:prstGeom>
+          <a:solidFill>
+            <a:srgbClr val="283E4E"/>
+          </a:solidFill>
+          <a:ln>
+            <a:noFill/>
+          </a:ln>
+          <a:effectLst/>
+        </p:spPr>
+        <p:style>
+          <a:lnRef idx="1">
+            <a:schemeClr val="accent1"/>
+          </a:lnRef>
+          <a:fillRef idx="3">
+            <a:schemeClr val="accent1"/>
+          </a:fillRef>
+          <a:effectRef idx="2">
+            <a:schemeClr val="accent1"/>
+          </a:effectRef>
+          <a:fontRef idx="minor">
+            <a:schemeClr val="lt1"/>
+          </a:fontRef>
+        </p:style>
+        <p:txBody>
+          <a:bodyPr rtlCol="0" anchor="ctr"/>
+          <a:lstStyle/>
+          <a:p/>
+        </p:txBody>
+      </p:sp>
+      <p:sp>
+        <p:nvSpPr>
+          <p:cNvPr id="13" name="TextBox 12"/>
+          <p:cNvSpPr txBox="1"/>
+          <p:nvPr/>
+        </p:nvSpPr>
+        <p:spPr>
+          <a:xfrm>
+            <a:off x="905256" y="2286000"/>
+            <a:ext cx="566928" cy="566928"/>
+          </a:xfrm>
+          <a:prstGeom prst="rect">
+            <a:avLst/>
+          </a:prstGeom>
+          <a:noFill/>
+        </p:spPr>
+        <p:txBody>
+          <a:bodyPr wrap="square" anchor="ctr" lIns="0" rIns="0" tIns="0" bIns="0">
+            <a:spAutoFit/>
+          </a:bodyPr>
+          <a:lstStyle/>
+          <a:p>
+            <a:pPr algn="ctr">
+              <a:lnSpc>
+                <a:spcPct val="100000"/>
+              </a:lnSpc>
+            </a:pPr>
+            <a:r>
+              <a:rPr sz="1600">
+                <a:solidFill>
+                  <a:srgbClr val="FFFFFF"/>
+                </a:solidFill>
+                <a:latin typeface="Arial"/>
+                <a:ea typeface="黑体"/>
+                <a:cs typeface="黑体"/>
+              </a:rPr>
+              <a:t>1</a:t>
+            </a:r>
+          </a:p>
+        </p:txBody>
+      </p:sp>
+      <p:sp>
+        <p:nvSpPr>
+          <p:cNvPr id="14" name="Chevron 13"/>
+          <p:cNvSpPr/>
+          <p:nvPr/>
+        </p:nvSpPr>
+        <p:spPr>
+          <a:xfrm>
+            <a:off x="3566160" y="2880360"/>
+            <a:ext cx="2331720" cy="1188720"/>
+          </a:xfrm>
+          <a:prstGeom prst="chevron">
+            <a:avLst/>
+          </a:prstGeom>
+          <a:solidFill>
+            <a:srgbClr val="FFFFFF"/>
+          </a:solidFill>
+          <a:ln w="9525">
+            <a:solidFill>
+              <a:srgbClr val="4A6577"/>
+            </a:solidFill>
+          </a:ln>
+          <a:effectLst/>
+        </p:spPr>
+        <p:style>
+          <a:lnRef idx="1">
+            <a:schemeClr val="accent1"/>
+          </a:lnRef>
+          <a:fillRef idx="3">
+            <a:schemeClr val="accent1"/>
+          </a:fillRef>
+          <a:effectRef idx="2">
+            <a:schemeClr val="accent1"/>
+          </a:effectRef>
+          <a:fontRef idx="minor">
+            <a:schemeClr val="lt1"/>
+          </a:fontRef>
+        </p:style>
+        <p:txBody>
+          <a:bodyPr rtlCol="0" anchor="ctr"/>
+          <a:lstStyle/>
+          <a:p/>
+        </p:txBody>
+      </p:sp>
+      <p:sp>
+        <p:nvSpPr>
+          <p:cNvPr id="15" name="TextBox 14"/>
+          <p:cNvSpPr txBox="1"/>
+          <p:nvPr/>
+        </p:nvSpPr>
+        <p:spPr>
+          <a:xfrm>
+            <a:off x="3931920" y="3035808"/>
+            <a:ext cx="1783080" cy="402336"/>
+          </a:xfrm>
+          <a:prstGeom prst="rect">
+            <a:avLst/>
+          </a:prstGeom>
+          <a:noFill/>
+        </p:spPr>
+        <p:txBody>
+          <a:bodyPr wrap="square" anchor="ctr" lIns="0" rIns="0" tIns="0" bIns="0">
+            <a:spAutoFit/>
+          </a:bodyPr>
+          <a:lstStyle/>
+          <a:p>
+            <a:pPr algn="ctr">
+              <a:lnSpc>
+                <a:spcPct val="100000"/>
+              </a:lnSpc>
+            </a:pPr>
+            <a:r>
+              <a:rPr sz="1800">
+                <a:solidFill>
+                  <a:srgbClr val="283E4E"/>
+                </a:solidFill>
+                <a:latin typeface="Arial"/>
+                <a:ea typeface="黑体"/>
+                <a:cs typeface="黑体"/>
+              </a:rPr>
+              <a:t>写一页纸大纲</a:t>
+            </a:r>
+          </a:p>
+        </p:txBody>
+      </p:sp>
+      <p:sp>
+        <p:nvSpPr>
+          <p:cNvPr id="16" name="TextBox 15"/>
+          <p:cNvSpPr txBox="1"/>
+          <p:nvPr/>
+        </p:nvSpPr>
+        <p:spPr>
+          <a:xfrm>
+            <a:off x="3877056" y="3438144"/>
+            <a:ext cx="1874519" cy="603504"/>
+          </a:xfrm>
+          <a:prstGeom prst="rect">
+            <a:avLst/>
+          </a:prstGeom>
+          <a:noFill/>
+        </p:spPr>
+        <p:txBody>
+          <a:bodyPr wrap="square" anchor="ctr" lIns="0" rIns="0" tIns="0" bIns="0">
+            <a:spAutoFit/>
+          </a:bodyPr>
+          <a:lstStyle/>
+          <a:p>
+            <a:pPr algn="ctr">
+              <a:lnSpc>
+                <a:spcPct val="115000"/>
+              </a:lnSpc>
+            </a:pPr>
+            <a:r>
+              <a:rPr sz="1600">
+                <a:solidFill>
+                  <a:srgbClr val="000000"/>
+                </a:solidFill>
+                <a:latin typeface="Times New Roman"/>
+                <a:ea typeface="宋体"/>
+                <a:cs typeface="宋体"/>
+              </a:rPr>
+              <a:t>每页一句核心判断</a:t>
+            </a:r>
+          </a:p>
+        </p:txBody>
+      </p:sp>
+      <p:sp>
+        <p:nvSpPr>
+          <p:cNvPr id="17" name="Oval 16"/>
+          <p:cNvSpPr/>
+          <p:nvPr/>
+        </p:nvSpPr>
+        <p:spPr>
+          <a:xfrm>
+            <a:off x="3785615" y="2286000"/>
+            <a:ext cx="566928" cy="566928"/>
+          </a:xfrm>
+          <a:prstGeom prst="ellipse">
+            <a:avLst/>
+          </a:prstGeom>
+          <a:solidFill>
+            <a:srgbClr val="283E4E"/>
+          </a:solidFill>
+          <a:ln>
+            <a:noFill/>
+          </a:ln>
+          <a:effectLst/>
+        </p:spPr>
+        <p:style>
+          <a:lnRef idx="1">
+            <a:schemeClr val="accent1"/>
+          </a:lnRef>
+          <a:fillRef idx="3">
+            <a:schemeClr val="accent1"/>
+          </a:fillRef>
+          <a:effectRef idx="2">
+            <a:schemeClr val="accent1"/>
+          </a:effectRef>
+          <a:fontRef idx="minor">
+            <a:schemeClr val="lt1"/>
+          </a:fontRef>
+        </p:style>
+        <p:txBody>
+          <a:bodyPr rtlCol="0" anchor="ctr"/>
+          <a:lstStyle/>
+          <a:p/>
+        </p:txBody>
+      </p:sp>
+      <p:sp>
+        <p:nvSpPr>
+          <p:cNvPr id="18" name="TextBox 17"/>
+          <p:cNvSpPr txBox="1"/>
+          <p:nvPr/>
+        </p:nvSpPr>
+        <p:spPr>
+          <a:xfrm>
+            <a:off x="3785615" y="2286000"/>
+            <a:ext cx="566928" cy="566928"/>
+          </a:xfrm>
+          <a:prstGeom prst="rect">
+            <a:avLst/>
+          </a:prstGeom>
+          <a:noFill/>
+        </p:spPr>
+        <p:txBody>
+          <a:bodyPr wrap="square" anchor="ctr" lIns="0" rIns="0" tIns="0" bIns="0">
+            <a:spAutoFit/>
+          </a:bodyPr>
+          <a:lstStyle/>
+          <a:p>
+            <a:pPr algn="ctr">
+              <a:lnSpc>
+                <a:spcPct val="100000"/>
+              </a:lnSpc>
+            </a:pPr>
+            <a:r>
+              <a:rPr sz="1600">
+                <a:solidFill>
+                  <a:srgbClr val="FFFFFF"/>
+                </a:solidFill>
+                <a:latin typeface="Arial"/>
+                <a:ea typeface="黑体"/>
+                <a:cs typeface="黑体"/>
+              </a:rPr>
+              <a:t>2</a:t>
+            </a:r>
+          </a:p>
+        </p:txBody>
+      </p:sp>
+      <p:sp>
+        <p:nvSpPr>
+          <p:cNvPr id="19" name="Chevron 18"/>
+          <p:cNvSpPr/>
+          <p:nvPr/>
+        </p:nvSpPr>
+        <p:spPr>
+          <a:xfrm>
+            <a:off x="6446520" y="2880360"/>
+            <a:ext cx="2331720" cy="1188720"/>
+          </a:xfrm>
+          <a:prstGeom prst="chevron">
+            <a:avLst/>
+          </a:prstGeom>
+          <a:solidFill>
+            <a:srgbClr val="FFFFFF"/>
+          </a:solidFill>
+          <a:ln w="9525">
+            <a:solidFill>
+              <a:srgbClr val="4A6577"/>
+            </a:solidFill>
+          </a:ln>
+          <a:effectLst/>
+        </p:spPr>
+        <p:style>
+          <a:lnRef idx="1">
+            <a:schemeClr val="accent1"/>
+          </a:lnRef>
+          <a:fillRef idx="3">
+            <a:schemeClr val="accent1"/>
+          </a:fillRef>
+          <a:effectRef idx="2">
+            <a:schemeClr val="accent1"/>
+          </a:effectRef>
+          <a:fontRef idx="minor">
+            <a:schemeClr val="lt1"/>
+          </a:fontRef>
+        </p:style>
+        <p:txBody>
+          <a:bodyPr rtlCol="0" anchor="ctr"/>
+          <a:lstStyle/>
+          <a:p/>
+        </p:txBody>
+      </p:sp>
+      <p:sp>
+        <p:nvSpPr>
+          <p:cNvPr id="20" name="TextBox 19"/>
+          <p:cNvSpPr txBox="1"/>
+          <p:nvPr/>
+        </p:nvSpPr>
+        <p:spPr>
+          <a:xfrm>
+            <a:off x="6812280" y="3035808"/>
+            <a:ext cx="1783080" cy="402336"/>
+          </a:xfrm>
+          <a:prstGeom prst="rect">
+            <a:avLst/>
+          </a:prstGeom>
+          <a:noFill/>
+        </p:spPr>
+        <p:txBody>
+          <a:bodyPr wrap="square" anchor="ctr" lIns="0" rIns="0" tIns="0" bIns="0">
+            <a:spAutoFit/>
+          </a:bodyPr>
+          <a:lstStyle/>
+          <a:p>
+            <a:pPr algn="ctr">
+              <a:lnSpc>
+                <a:spcPct val="100000"/>
+              </a:lnSpc>
+            </a:pPr>
+            <a:r>
+              <a:rPr sz="1800">
+                <a:solidFill>
+                  <a:srgbClr val="283E4E"/>
+                </a:solidFill>
+                <a:latin typeface="Arial"/>
+                <a:ea typeface="黑体"/>
+                <a:cs typeface="黑体"/>
+              </a:rPr>
+              <a:t>生成页面</a:t>
+            </a:r>
+          </a:p>
+        </p:txBody>
+      </p:sp>
+      <p:sp>
+        <p:nvSpPr>
+          <p:cNvPr id="21" name="TextBox 20"/>
+          <p:cNvSpPr txBox="1"/>
+          <p:nvPr/>
+        </p:nvSpPr>
+        <p:spPr>
+          <a:xfrm>
+            <a:off x="6757416" y="3438144"/>
+            <a:ext cx="1874519" cy="603504"/>
+          </a:xfrm>
+          <a:prstGeom prst="rect">
+            <a:avLst/>
+          </a:prstGeom>
+          <a:noFill/>
+        </p:spPr>
+        <p:txBody>
+          <a:bodyPr wrap="square" anchor="ctr" lIns="0" rIns="0" tIns="0" bIns="0">
+            <a:spAutoFit/>
+          </a:bodyPr>
+          <a:lstStyle/>
+          <a:p>
+            <a:pPr algn="ctr">
+              <a:lnSpc>
+                <a:spcPct val="115000"/>
+              </a:lnSpc>
+            </a:pPr>
+            <a:r>
+              <a:rPr sz="1600">
+                <a:solidFill>
+                  <a:srgbClr val="000000"/>
+                </a:solidFill>
+                <a:latin typeface="Times New Roman"/>
+                <a:ea typeface="宋体"/>
+                <a:cs typeface="宋体"/>
+              </a:rPr>
+              <a:t>骨架与形状按关系选</a:t>
+            </a:r>
+          </a:p>
+        </p:txBody>
+      </p:sp>
+      <p:sp>
+        <p:nvSpPr>
+          <p:cNvPr id="22" name="Oval 21"/>
+          <p:cNvSpPr/>
+          <p:nvPr/>
+        </p:nvSpPr>
+        <p:spPr>
+          <a:xfrm>
+            <a:off x="6665976" y="2286000"/>
+            <a:ext cx="566928" cy="566928"/>
+          </a:xfrm>
+          <a:prstGeom prst="ellipse">
+            <a:avLst/>
+          </a:prstGeom>
+          <a:solidFill>
+            <a:srgbClr val="283E4E"/>
+          </a:solidFill>
+          <a:ln>
+            <a:noFill/>
+          </a:ln>
+          <a:effectLst/>
+        </p:spPr>
+        <p:style>
+          <a:lnRef idx="1">
+            <a:schemeClr val="accent1"/>
+          </a:lnRef>
+          <a:fillRef idx="3">
+            <a:schemeClr val="accent1"/>
+          </a:fillRef>
+          <a:effectRef idx="2">
+            <a:schemeClr val="accent1"/>
+          </a:effectRef>
+          <a:fontRef idx="minor">
+            <a:schemeClr val="lt1"/>
+          </a:fontRef>
+        </p:style>
+        <p:txBody>
+          <a:bodyPr rtlCol="0" anchor="ctr"/>
+          <a:lstStyle/>
+          <a:p/>
+        </p:txBody>
+      </p:sp>
+      <p:sp>
+        <p:nvSpPr>
+          <p:cNvPr id="23" name="TextBox 22"/>
+          <p:cNvSpPr txBox="1"/>
+          <p:nvPr/>
+        </p:nvSpPr>
+        <p:spPr>
+          <a:xfrm>
+            <a:off x="6665976" y="2286000"/>
+            <a:ext cx="566928" cy="566928"/>
+          </a:xfrm>
+          <a:prstGeom prst="rect">
+            <a:avLst/>
+          </a:prstGeom>
+          <a:noFill/>
+        </p:spPr>
+        <p:txBody>
+          <a:bodyPr wrap="square" anchor="ctr" lIns="0" rIns="0" tIns="0" bIns="0">
+            <a:spAutoFit/>
+          </a:bodyPr>
+          <a:lstStyle/>
+          <a:p>
+            <a:pPr algn="ctr">
+              <a:lnSpc>
+                <a:spcPct val="100000"/>
+              </a:lnSpc>
+            </a:pPr>
+            <a:r>
+              <a:rPr sz="1600">
+                <a:solidFill>
+                  <a:srgbClr val="FFFFFF"/>
+                </a:solidFill>
+                <a:latin typeface="Arial"/>
+                <a:ea typeface="黑体"/>
+                <a:cs typeface="黑体"/>
+              </a:rPr>
+              <a:t>3</a:t>
+            </a:r>
+          </a:p>
+        </p:txBody>
+      </p:sp>
+      <p:sp>
+        <p:nvSpPr>
+          <p:cNvPr id="24" name="Chevron 23"/>
+          <p:cNvSpPr/>
+          <p:nvPr/>
+        </p:nvSpPr>
+        <p:spPr>
+          <a:xfrm>
+            <a:off x="9326880" y="2880360"/>
+            <a:ext cx="2331720" cy="1188720"/>
+          </a:xfrm>
+          <a:prstGeom prst="chevron">
+            <a:avLst/>
+          </a:prstGeom>
+          <a:solidFill>
+            <a:srgbClr val="FFFFFF"/>
+          </a:solidFill>
+          <a:ln w="9525">
+            <a:solidFill>
+              <a:srgbClr val="4A6577"/>
+            </a:solidFill>
+          </a:ln>
+          <a:effectLst/>
+        </p:spPr>
+        <p:style>
+          <a:lnRef idx="1">
+            <a:schemeClr val="accent1"/>
+          </a:lnRef>
+          <a:fillRef idx="3">
+            <a:schemeClr val="accent1"/>
+          </a:fillRef>
+          <a:effectRef idx="2">
+            <a:schemeClr val="accent1"/>
+          </a:effectRef>
+          <a:fontRef idx="minor">
+            <a:schemeClr val="lt1"/>
+          </a:fontRef>
+        </p:style>
+        <p:txBody>
+          <a:bodyPr rtlCol="0" anchor="ctr"/>
+          <a:lstStyle/>
+          <a:p/>
+        </p:txBody>
+      </p:sp>
+      <p:sp>
+        <p:nvSpPr>
+          <p:cNvPr id="25" name="TextBox 24"/>
+          <p:cNvSpPr txBox="1"/>
+          <p:nvPr/>
+        </p:nvSpPr>
+        <p:spPr>
+          <a:xfrm>
+            <a:off x="9692640" y="3035808"/>
+            <a:ext cx="1783080" cy="402336"/>
+          </a:xfrm>
+          <a:prstGeom prst="rect">
+            <a:avLst/>
+          </a:prstGeom>
+          <a:noFill/>
+        </p:spPr>
+        <p:txBody>
+          <a:bodyPr wrap="square" anchor="ctr" lIns="0" rIns="0" tIns="0" bIns="0">
+            <a:spAutoFit/>
+          </a:bodyPr>
+          <a:lstStyle/>
+          <a:p>
+            <a:pPr algn="ctr">
+              <a:lnSpc>
+                <a:spcPct val="100000"/>
+              </a:lnSpc>
+            </a:pPr>
+            <a:r>
+              <a:rPr sz="1800">
+                <a:solidFill>
+                  <a:srgbClr val="283E4E"/>
+                </a:solidFill>
+                <a:latin typeface="Arial"/>
+                <a:ea typeface="黑体"/>
+                <a:cs typeface="黑体"/>
+              </a:rPr>
+              <a:t>机器检查</a:t>
+            </a:r>
+          </a:p>
+        </p:txBody>
+      </p:sp>
+      <p:sp>
+        <p:nvSpPr>
+          <p:cNvPr id="26" name="TextBox 25"/>
+          <p:cNvSpPr txBox="1"/>
+          <p:nvPr/>
+        </p:nvSpPr>
+        <p:spPr>
+          <a:xfrm>
+            <a:off x="9637776" y="3438144"/>
+            <a:ext cx="1874519" cy="603504"/>
+          </a:xfrm>
+          <a:prstGeom prst="rect">
+            <a:avLst/>
+          </a:prstGeom>
+          <a:noFill/>
+        </p:spPr>
+        <p:txBody>
+          <a:bodyPr wrap="square" anchor="ctr" lIns="0" rIns="0" tIns="0" bIns="0">
+            <a:spAutoFit/>
+          </a:bodyPr>
+          <a:lstStyle/>
+          <a:p>
+            <a:pPr algn="ctr">
+              <a:lnSpc>
+                <a:spcPct val="115000"/>
+              </a:lnSpc>
+            </a:pPr>
+            <a:r>
+              <a:rPr sz="1600">
+                <a:solidFill>
+                  <a:srgbClr val="000000"/>
+                </a:solidFill>
+                <a:latin typeface="Times New Roman"/>
+                <a:ea typeface="宋体"/>
+                <a:cs typeface="宋体"/>
+              </a:rPr>
+              <a:t>结构、配色、预览三道</a:t>
+            </a:r>
+          </a:p>
+        </p:txBody>
+      </p:sp>
+      <p:sp>
+        <p:nvSpPr>
+          <p:cNvPr id="27" name="Oval 26"/>
+          <p:cNvSpPr/>
+          <p:nvPr/>
+        </p:nvSpPr>
+        <p:spPr>
+          <a:xfrm>
+            <a:off x="9546336" y="2286000"/>
+            <a:ext cx="566928" cy="566928"/>
+          </a:xfrm>
+          <a:prstGeom prst="ellipse">
+            <a:avLst/>
+          </a:prstGeom>
+          <a:solidFill>
+            <a:srgbClr val="283E4E"/>
+          </a:solidFill>
+          <a:ln>
+            <a:noFill/>
+          </a:ln>
+          <a:effectLst/>
+        </p:spPr>
+        <p:style>
+          <a:lnRef idx="1">
+            <a:schemeClr val="accent1"/>
+          </a:lnRef>
+          <a:fillRef idx="3">
+            <a:schemeClr val="accent1"/>
+          </a:fillRef>
+          <a:effectRef idx="2">
+            <a:schemeClr val="accent1"/>
+          </a:effectRef>
+          <a:fontRef idx="minor">
+            <a:schemeClr val="lt1"/>
+          </a:fontRef>
+        </p:style>
+        <p:txBody>
+          <a:bodyPr rtlCol="0" anchor="ctr"/>
+          <a:lstStyle/>
+          <a:p/>
+        </p:txBody>
+      </p:sp>
+      <p:sp>
+        <p:nvSpPr>
+          <p:cNvPr id="28" name="TextBox 27"/>
+          <p:cNvSpPr txBox="1"/>
+          <p:nvPr/>
+        </p:nvSpPr>
+        <p:spPr>
+          <a:xfrm>
+            <a:off x="9546336" y="2286000"/>
+            <a:ext cx="566928" cy="566928"/>
+          </a:xfrm>
+          <a:prstGeom prst="rect">
+            <a:avLst/>
+          </a:prstGeom>
+          <a:noFill/>
+        </p:spPr>
+        <p:txBody>
+          <a:bodyPr wrap="square" anchor="ctr" lIns="0" rIns="0" tIns="0" bIns="0">
+            <a:spAutoFit/>
+          </a:bodyPr>
+          <a:lstStyle/>
+          <a:p>
+            <a:pPr algn="ctr">
+              <a:lnSpc>
+                <a:spcPct val="100000"/>
+              </a:lnSpc>
+            </a:pPr>
+            <a:r>
+              <a:rPr sz="1600">
+                <a:solidFill>
+                  <a:srgbClr val="FFFFFF"/>
+                </a:solidFill>
+                <a:latin typeface="Arial"/>
+                <a:ea typeface="黑体"/>
+                <a:cs typeface="黑体"/>
+              </a:rPr>
+              <a:t>4</a:t>
+            </a:r>
+          </a:p>
+        </p:txBody>
+      </p:sp>
+      <p:sp>
+        <p:nvSpPr>
+          <p:cNvPr id="29" name="Rectangle 28"/>
+          <p:cNvSpPr/>
+          <p:nvPr/>
+        </p:nvSpPr>
+        <p:spPr>
+          <a:xfrm>
+            <a:off x="502920" y="4846320"/>
+            <a:ext cx="11850624" cy="1005840"/>
+          </a:xfrm>
+          <a:prstGeom prst="rect">
+            <a:avLst/>
+          </a:prstGeom>
+          <a:solidFill>
+            <a:srgbClr val="F1F5F8"/>
+          </a:solidFill>
+          <a:ln>
+            <a:noFill/>
+          </a:ln>
+          <a:effectLst/>
+        </p:spPr>
+        <p:style>
+          <a:lnRef idx="1">
+            <a:schemeClr val="accent1"/>
+          </a:lnRef>
+          <a:fillRef idx="3">
+            <a:schemeClr val="accent1"/>
+          </a:fillRef>
+          <a:effectRef idx="2">
+            <a:schemeClr val="accent1"/>
+          </a:effectRef>
+          <a:fontRef idx="minor">
+            <a:schemeClr val="lt1"/>
+          </a:fontRef>
+        </p:style>
+        <p:txBody>
+          <a:bodyPr rtlCol="0" anchor="ctr"/>
+          <a:lstStyle/>
+          <a:p/>
+        </p:txBody>
+      </p:sp>
+      <p:sp>
+        <p:nvSpPr>
+          <p:cNvPr id="30" name="Rectangle 29"/>
+          <p:cNvSpPr/>
+          <p:nvPr/>
+        </p:nvSpPr>
+        <p:spPr>
+          <a:xfrm>
+            <a:off x="502920" y="4846320"/>
+            <a:ext cx="41148" cy="1005840"/>
+          </a:xfrm>
+          <a:prstGeom prst="rect">
+            <a:avLst/>
+          </a:prstGeom>
+          <a:solidFill>
+            <a:srgbClr val="283E4E"/>
+          </a:solidFill>
+          <a:ln>
+            <a:noFill/>
+          </a:ln>
+          <a:effectLst/>
+        </p:spPr>
+        <p:style>
+          <a:lnRef idx="1">
+            <a:schemeClr val="accent1"/>
+          </a:lnRef>
+          <a:fillRef idx="3">
+            <a:schemeClr val="accent1"/>
+          </a:fillRef>
+          <a:effectRef idx="2">
+            <a:schemeClr val="accent1"/>
+          </a:effectRef>
+          <a:fontRef idx="minor">
+            <a:schemeClr val="lt1"/>
+          </a:fontRef>
+        </p:style>
+        <p:txBody>
+          <a:bodyPr rtlCol="0" anchor="ctr"/>
+          <a:lstStyle/>
+          <a:p/>
+        </p:txBody>
+      </p:sp>
+      <p:sp>
+        <p:nvSpPr>
+          <p:cNvPr id="31" name="TextBox 30"/>
+          <p:cNvSpPr txBox="1"/>
+          <p:nvPr/>
+        </p:nvSpPr>
+        <p:spPr>
+          <a:xfrm>
+            <a:off x="694944" y="4937760"/>
+            <a:ext cx="11466576" cy="822960"/>
+          </a:xfrm>
+          <a:prstGeom prst="rect">
+            <a:avLst/>
+          </a:prstGeom>
+          <a:noFill/>
+        </p:spPr>
+        <p:txBody>
+          <a:bodyPr wrap="square" anchor="ctr" lIns="0" rIns="0" tIns="0" bIns="0">
+            <a:spAutoFit/>
+          </a:bodyPr>
+          <a:lstStyle/>
+          <a:p>
+            <a:pPr algn="l">
+              <a:lnSpc>
+                <a:spcPct val="120000"/>
+              </a:lnSpc>
+            </a:pPr>
+            <a:r>
+              <a:rPr sz="1800">
+                <a:solidFill>
+                  <a:srgbClr val="283E4E"/>
+                </a:solidFill>
+                <a:latin typeface="Arial"/>
+                <a:ea typeface="黑体"/>
+                <a:cs typeface="黑体"/>
+              </a:rPr>
+              <a:t>结论占位：结构变化先改大纲再改页面，这是返工最少的一种改法。</a:t>
+            </a:r>
+          </a:p>
+        </p:txBody>
+      </p:sp>
+    </p:spTree>
+  </p:cSld>
+  <p:clrMapOvr>
+    <a:masterClrMapping/>
+  </p:clrMapOvr>
+</p:sld>
+</file>
+
+<file path=ppt/slides/slide6.xml><?xml version="1.0" encoding="utf-8"?>
+<p:sld xmlns:a="http://schemas.openxmlformats.org/drawingml/2006/main" xmlns:p="http://schemas.openxmlformats.org/presentationml/2006/main" xmlns:r="http://schemas.openxmlformats.org/officeDocument/2006/relationships">
+  <p:cSld>
+    <p:spTree>
+      <p:nvGrpSpPr>
+        <p:cNvPr id="1" name=""/>
+        <p:cNvGrpSpPr/>
+        <p:nvPr/>
+      </p:nvGrpSpPr>
+      <p:grpSpPr/>
+      <p:sp>
+        <p:nvSpPr>
+          <p:cNvPr id="2" name="TextBox 1"/>
+          <p:cNvSpPr txBox="1"/>
+          <p:nvPr/>
+        </p:nvSpPr>
+        <p:spPr>
+          <a:xfrm>
+            <a:off x="5852160" y="219456"/>
+            <a:ext cx="5577840" cy="310896"/>
+          </a:xfrm>
+          <a:prstGeom prst="rect">
+            <a:avLst/>
+          </a:prstGeom>
+          <a:noFill/>
+        </p:spPr>
+        <p:txBody>
+          <a:bodyPr wrap="square" anchor="t" lIns="0" rIns="0" tIns="0" bIns="0">
+            <a:spAutoFit/>
+          </a:bodyPr>
+          <a:lstStyle/>
+          <a:p>
+            <a:pPr algn="r">
+              <a:lnSpc>
+                <a:spcPct val="100000"/>
+              </a:lnSpc>
+            </a:pPr>
+            <a:r>
+              <a:rPr sz="1600">
+                <a:solidFill>
+                  <a:srgbClr val="000000"/>
+                </a:solidFill>
+                <a:latin typeface="Times New Roman"/>
+                <a:ea typeface="宋体"/>
+                <a:cs typeface="宋体"/>
+              </a:rPr>
+              <a:t>示例 · 汇报页骨架</a:t>
+            </a:r>
+          </a:p>
+        </p:txBody>
+      </p:sp>
+      <p:sp>
+        <p:nvSpPr>
+          <p:cNvPr id="3" name="TextBox 2"/>
+          <p:cNvSpPr txBox="1"/>
+          <p:nvPr/>
+        </p:nvSpPr>
+        <p:spPr>
+          <a:xfrm>
+            <a:off x="11521440" y="219456"/>
+            <a:ext cx="832104" cy="310896"/>
+          </a:xfrm>
+          <a:prstGeom prst="rect">
+            <a:avLst/>
+          </a:prstGeom>
+          <a:noFill/>
+        </p:spPr>
+        <p:txBody>
+          <a:bodyPr wrap="square" anchor="t" lIns="0" rIns="0" tIns="0" bIns="0">
+            <a:spAutoFit/>
+          </a:bodyPr>
+          <a:lstStyle/>
+          <a:p>
+            <a:pPr algn="r">
+              <a:lnSpc>
+                <a:spcPct val="100000"/>
+              </a:lnSpc>
+            </a:pPr>
+            <a:r>
+              <a:rPr sz="1600">
+                <a:solidFill>
+                  <a:srgbClr val="283E4E"/>
+                </a:solidFill>
+                <a:latin typeface="Arial"/>
+                <a:ea typeface="黑体"/>
+                <a:cs typeface="黑体"/>
+              </a:rPr>
+              <a:t>06</a:t>
+            </a:r>
+          </a:p>
+        </p:txBody>
+      </p:sp>
+      <p:sp>
+        <p:nvSpPr>
+          <p:cNvPr id="4" name="TextBox 3"/>
+          <p:cNvSpPr txBox="1"/>
+          <p:nvPr/>
+        </p:nvSpPr>
+        <p:spPr>
+          <a:xfrm>
+            <a:off x="502920" y="530352"/>
+            <a:ext cx="11850624" cy="603504"/>
+          </a:xfrm>
+          <a:prstGeom prst="rect">
+            <a:avLst/>
+          </a:prstGeom>
+          <a:noFill/>
+        </p:spPr>
+        <p:txBody>
+          <a:bodyPr wrap="square" anchor="t" lIns="0" rIns="0" tIns="0" bIns="0">
+            <a:spAutoFit/>
+          </a:bodyPr>
+          <a:lstStyle/>
+          <a:p>
+            <a:pPr algn="l">
+              <a:lnSpc>
+                <a:spcPct val="100000"/>
+              </a:lnSpc>
+            </a:pPr>
+            <a:r>
+              <a:rPr sz="3000">
+                <a:solidFill>
+                  <a:srgbClr val="283E4E"/>
+                </a:solidFill>
+                <a:latin typeface="Arial"/>
+                <a:ea typeface="黑体"/>
+                <a:cs typeface="黑体"/>
+              </a:rPr>
+              <a:t>示例页：时间关系用一条轴表达</a:t>
+            </a:r>
+          </a:p>
+        </p:txBody>
+      </p:sp>
+      <p:sp>
+        <p:nvSpPr>
+          <p:cNvPr id="5" name="TextBox 4"/>
+          <p:cNvSpPr txBox="1"/>
+          <p:nvPr/>
+        </p:nvSpPr>
+        <p:spPr>
+          <a:xfrm>
+            <a:off x="502920" y="1152144"/>
+            <a:ext cx="11850624" cy="329184"/>
+          </a:xfrm>
+          <a:prstGeom prst="rect">
+            <a:avLst/>
+          </a:prstGeom>
+          <a:noFill/>
+        </p:spPr>
+        <p:txBody>
+          <a:bodyPr wrap="square" anchor="t" lIns="0" rIns="0" tIns="0" bIns="0">
+            <a:spAutoFit/>
+          </a:bodyPr>
+          <a:lstStyle/>
+          <a:p>
+            <a:pPr algn="l">
+              <a:lnSpc>
+                <a:spcPct val="100000"/>
+              </a:lnSpc>
+            </a:pPr>
+            <a:r>
+              <a:rPr sz="2000">
+                <a:solidFill>
+                  <a:srgbClr val="000000"/>
+                </a:solidFill>
+                <a:latin typeface="Times New Roman"/>
+                <a:ea typeface="宋体"/>
+                <a:cs typeface="宋体"/>
+              </a:rPr>
+              <a:t>时间线用一条主轴加节点，年份在上、说明在下；不排成一列方块。</a:t>
+            </a:r>
+          </a:p>
+        </p:txBody>
+      </p:sp>
+      <p:sp>
+        <p:nvSpPr>
+          <p:cNvPr id="6" name="Rectangle 5"/>
+          <p:cNvSpPr/>
+          <p:nvPr/>
+        </p:nvSpPr>
+        <p:spPr>
+          <a:xfrm>
+            <a:off x="502920" y="1554480"/>
+            <a:ext cx="11850624" cy="10972"/>
+          </a:xfrm>
+          <a:prstGeom prst="rect">
+            <a:avLst/>
+          </a:prstGeom>
+          <a:solidFill>
+            <a:srgbClr val="283E4E"/>
+          </a:solidFill>
+          <a:ln>
+            <a:noFill/>
+          </a:ln>
+          <a:effectLst/>
+        </p:spPr>
+        <p:style>
+          <a:lnRef idx="1">
+            <a:schemeClr val="accent1"/>
+          </a:lnRef>
+          <a:fillRef idx="3">
+            <a:schemeClr val="accent1"/>
+          </a:fillRef>
+          <a:effectRef idx="2">
+            <a:schemeClr val="accent1"/>
+          </a:effectRef>
+          <a:fontRef idx="minor">
+            <a:schemeClr val="lt1"/>
+          </a:fontRef>
+        </p:style>
+        <p:txBody>
+          <a:bodyPr rtlCol="0" anchor="ctr"/>
+          <a:lstStyle/>
+          <a:p/>
+        </p:txBody>
+      </p:sp>
+      <p:sp>
+        <p:nvSpPr>
+          <p:cNvPr id="7" name="Rectangle 6"/>
+          <p:cNvSpPr/>
+          <p:nvPr/>
+        </p:nvSpPr>
+        <p:spPr>
+          <a:xfrm>
+            <a:off x="502920" y="1664208"/>
+            <a:ext cx="11850624" cy="658368"/>
+          </a:xfrm>
+          <a:prstGeom prst="rect">
+            <a:avLst/>
+          </a:prstGeom>
+          <a:solidFill>
+            <a:srgbClr val="F1F5F8"/>
+          </a:solidFill>
+          <a:ln>
+            <a:noFill/>
+          </a:ln>
+          <a:effectLst/>
+        </p:spPr>
+        <p:style>
+          <a:lnRef idx="1">
+            <a:schemeClr val="accent1"/>
+          </a:lnRef>
+          <a:fillRef idx="3">
+            <a:schemeClr val="accent1"/>
+          </a:fillRef>
+          <a:effectRef idx="2">
+            <a:schemeClr val="accent1"/>
+          </a:effectRef>
+          <a:fontRef idx="minor">
+            <a:schemeClr val="lt1"/>
+          </a:fontRef>
+        </p:style>
+        <p:txBody>
+          <a:bodyPr rtlCol="0" anchor="ctr"/>
+          <a:lstStyle/>
+          <a:p/>
+        </p:txBody>
+      </p:sp>
+      <p:sp>
+        <p:nvSpPr>
+          <p:cNvPr id="8" name="TextBox 7"/>
+          <p:cNvSpPr txBox="1"/>
+          <p:nvPr/>
+        </p:nvSpPr>
+        <p:spPr>
+          <a:xfrm>
+            <a:off x="694944" y="1755648"/>
+            <a:ext cx="11466576" cy="475488"/>
+          </a:xfrm>
+          <a:prstGeom prst="rect">
+            <a:avLst/>
+          </a:prstGeom>
+          <a:noFill/>
+        </p:spPr>
+        <p:txBody>
+          <a:bodyPr wrap="square" anchor="ctr" lIns="0" rIns="0" tIns="0" bIns="0">
+            <a:spAutoFit/>
+          </a:bodyPr>
+          <a:lstStyle/>
+          <a:p>
+            <a:pPr algn="l">
+              <a:lnSpc>
+                <a:spcPct val="120000"/>
+              </a:lnSpc>
+            </a:pPr>
+            <a:r>
+              <a:rPr sz="2000">
+                <a:solidFill>
+                  <a:srgbClr val="000000"/>
+                </a:solidFill>
+                <a:latin typeface="Times New Roman"/>
+                <a:ea typeface="楷体"/>
+                <a:cs typeface="楷体"/>
+              </a:rPr>
+              <a:t>导语占位：这一页演示时间线骨架，主轴贯穿全宽，四个节点分别落在轴上。</a:t>
+            </a:r>
+          </a:p>
+        </p:txBody>
+      </p:sp>
+      <p:sp>
+        <p:nvSpPr>
+          <p:cNvPr id="9" name="Rectangle 8"/>
+          <p:cNvSpPr/>
+          <p:nvPr/>
+        </p:nvSpPr>
+        <p:spPr>
+          <a:xfrm>
+            <a:off x="502920" y="2450592"/>
+            <a:ext cx="11850624" cy="2194560"/>
+          </a:xfrm>
+          <a:prstGeom prst="rect">
+            <a:avLst/>
+          </a:prstGeom>
+          <a:solidFill>
+            <a:srgbClr val="F1F5F8"/>
+          </a:solidFill>
+          <a:ln>
+            <a:noFill/>
+          </a:ln>
+          <a:effectLst/>
+        </p:spPr>
+        <p:style>
+          <a:lnRef idx="1">
+            <a:schemeClr val="accent1"/>
+          </a:lnRef>
+          <a:fillRef idx="3">
+            <a:schemeClr val="accent1"/>
+          </a:fillRef>
+          <a:effectRef idx="2">
+            <a:schemeClr val="accent1"/>
+          </a:effectRef>
+          <a:fontRef idx="minor">
+            <a:schemeClr val="lt1"/>
+          </a:fontRef>
+        </p:style>
+        <p:txBody>
+          <a:bodyPr rtlCol="0" anchor="ctr"/>
+          <a:lstStyle/>
+          <a:p/>
+        </p:txBody>
+      </p:sp>
+      <p:sp>
+        <p:nvSpPr>
+          <p:cNvPr id="10" name="Rectangle 9"/>
+          <p:cNvSpPr/>
+          <p:nvPr/>
+        </p:nvSpPr>
+        <p:spPr>
+          <a:xfrm>
+            <a:off x="777240" y="3401568"/>
+            <a:ext cx="11247120" cy="41148"/>
+          </a:xfrm>
+          <a:prstGeom prst="rect">
+            <a:avLst/>
+          </a:prstGeom>
+          <a:solidFill>
+            <a:srgbClr val="283E4E"/>
+          </a:solidFill>
+          <a:ln>
+            <a:noFill/>
+          </a:ln>
+          <a:effectLst/>
+        </p:spPr>
+        <p:style>
+          <a:lnRef idx="1">
+            <a:schemeClr val="accent1"/>
+          </a:lnRef>
+          <a:fillRef idx="3">
+            <a:schemeClr val="accent1"/>
+          </a:fillRef>
+          <a:effectRef idx="2">
+            <a:schemeClr val="accent1"/>
+          </a:effectRef>
+          <a:fontRef idx="minor">
+            <a:schemeClr val="lt1"/>
+          </a:fontRef>
+        </p:style>
+        <p:txBody>
+          <a:bodyPr rtlCol="0" anchor="ctr"/>
+          <a:lstStyle/>
+          <a:p/>
+        </p:txBody>
+      </p:sp>
+      <p:sp>
+        <p:nvSpPr>
+          <p:cNvPr id="11" name="Oval 10"/>
+          <p:cNvSpPr/>
+          <p:nvPr/>
+        </p:nvSpPr>
+        <p:spPr>
+          <a:xfrm>
+            <a:off x="1271016" y="3163824"/>
+            <a:ext cx="475488" cy="475488"/>
+          </a:xfrm>
+          <a:prstGeom prst="ellipse">
+            <a:avLst/>
+          </a:prstGeom>
+          <a:solidFill>
+            <a:srgbClr val="283E4E"/>
+          </a:solidFill>
+          <a:ln>
+            <a:noFill/>
+          </a:ln>
+          <a:effectLst/>
+        </p:spPr>
+        <p:style>
+          <a:lnRef idx="1">
+            <a:schemeClr val="accent1"/>
+          </a:lnRef>
+          <a:fillRef idx="3">
+            <a:schemeClr val="accent1"/>
+          </a:fillRef>
+          <a:effectRef idx="2">
+            <a:schemeClr val="accent1"/>
+          </a:effectRef>
+          <a:fontRef idx="minor">
+            <a:schemeClr val="lt1"/>
+          </a:fontRef>
+        </p:style>
+        <p:txBody>
+          <a:bodyPr rtlCol="0" anchor="ctr"/>
+          <a:lstStyle/>
+          <a:p/>
+        </p:txBody>
+      </p:sp>
+      <p:sp>
+        <p:nvSpPr>
+          <p:cNvPr id="12" name="TextBox 11"/>
+          <p:cNvSpPr txBox="1"/>
+          <p:nvPr/>
+        </p:nvSpPr>
+        <p:spPr>
+          <a:xfrm>
+            <a:off x="1271016" y="3163824"/>
+            <a:ext cx="475488" cy="475488"/>
+          </a:xfrm>
+          <a:prstGeom prst="rect">
+            <a:avLst/>
+          </a:prstGeom>
+          <a:noFill/>
+        </p:spPr>
+        <p:txBody>
+          <a:bodyPr wrap="square" anchor="ctr" lIns="0" rIns="0" tIns="0" bIns="0">
+            <a:spAutoFit/>
+          </a:bodyPr>
+          <a:lstStyle/>
+          <a:p>
+            <a:pPr algn="ctr">
+              <a:lnSpc>
+                <a:spcPct val="100000"/>
+              </a:lnSpc>
+            </a:pPr>
+            <a:r>
+              <a:rPr sz="1600">
+                <a:solidFill>
+                  <a:srgbClr val="FFFFFF"/>
+                </a:solidFill>
+                <a:latin typeface="Arial"/>
+                <a:ea typeface="黑体"/>
+                <a:cs typeface="黑体"/>
+              </a:rPr>
+              <a:t>1</a:t>
+            </a:r>
+          </a:p>
+        </p:txBody>
+      </p:sp>
+      <p:sp>
+        <p:nvSpPr>
+          <p:cNvPr id="13" name="TextBox 12"/>
+          <p:cNvSpPr txBox="1"/>
+          <p:nvPr/>
+        </p:nvSpPr>
+        <p:spPr>
+          <a:xfrm>
+            <a:off x="960120" y="2706624"/>
+            <a:ext cx="1737360" cy="402336"/>
+          </a:xfrm>
+          <a:prstGeom prst="rect">
+            <a:avLst/>
+          </a:prstGeom>
+          <a:noFill/>
+        </p:spPr>
+        <p:txBody>
+          <a:bodyPr wrap="square" anchor="ctr" lIns="0" rIns="0" tIns="0" bIns="0">
+            <a:spAutoFit/>
+          </a:bodyPr>
+          <a:lstStyle/>
+          <a:p>
+            <a:pPr algn="ctr">
+              <a:lnSpc>
+                <a:spcPct val="100000"/>
+              </a:lnSpc>
+            </a:pPr>
+            <a:r>
+              <a:rPr sz="1800">
+                <a:solidFill>
+                  <a:srgbClr val="283E4E"/>
+                </a:solidFill>
+                <a:latin typeface="Arial"/>
+                <a:ea typeface="黑体"/>
+                <a:cs typeface="黑体"/>
+              </a:rPr>
+              <a:t>示例年 1</a:t>
+            </a:r>
+          </a:p>
+        </p:txBody>
+      </p:sp>
+      <p:sp>
+        <p:nvSpPr>
+          <p:cNvPr id="14" name="TextBox 13"/>
+          <p:cNvSpPr txBox="1"/>
+          <p:nvPr/>
+        </p:nvSpPr>
+        <p:spPr>
+          <a:xfrm>
+            <a:off x="960120" y="3730752"/>
+            <a:ext cx="1737360" cy="731520"/>
+          </a:xfrm>
+          <a:prstGeom prst="rect">
+            <a:avLst/>
+          </a:prstGeom>
+          <a:noFill/>
+        </p:spPr>
+        <p:txBody>
+          <a:bodyPr wrap="square" anchor="t" lIns="0" rIns="0" tIns="0" bIns="0">
+            <a:spAutoFit/>
+          </a:bodyPr>
+          <a:lstStyle/>
+          <a:p>
+            <a:pPr algn="ctr">
+              <a:lnSpc>
+                <a:spcPct val="115000"/>
+              </a:lnSpc>
+            </a:pPr>
+            <a:r>
+              <a:rPr sz="1600">
+                <a:solidFill>
+                  <a:srgbClr val="000000"/>
+                </a:solidFill>
+                <a:latin typeface="Times New Roman"/>
+                <a:ea typeface="宋体"/>
+                <a:cs typeface="宋体"/>
+              </a:rPr>
+              <a:t>起点：材料与目标对齐</a:t>
+            </a:r>
+          </a:p>
+        </p:txBody>
+      </p:sp>
+      <p:sp>
+        <p:nvSpPr>
+          <p:cNvPr id="15" name="Oval 14"/>
+          <p:cNvSpPr/>
+          <p:nvPr/>
+        </p:nvSpPr>
+        <p:spPr>
+          <a:xfrm>
+            <a:off x="4087368" y="3163824"/>
+            <a:ext cx="475488" cy="475488"/>
+          </a:xfrm>
+          <a:prstGeom prst="ellipse">
+            <a:avLst/>
+          </a:prstGeom>
+          <a:solidFill>
+            <a:srgbClr val="283E4E"/>
+          </a:solidFill>
+          <a:ln>
+            <a:noFill/>
+          </a:ln>
+          <a:effectLst/>
+        </p:spPr>
+        <p:style>
+          <a:lnRef idx="1">
+            <a:schemeClr val="accent1"/>
+          </a:lnRef>
+          <a:fillRef idx="3">
+            <a:schemeClr val="accent1"/>
+          </a:fillRef>
+          <a:effectRef idx="2">
+            <a:schemeClr val="accent1"/>
+          </a:effectRef>
+          <a:fontRef idx="minor">
+            <a:schemeClr val="lt1"/>
+          </a:fontRef>
+        </p:style>
+        <p:txBody>
+          <a:bodyPr rtlCol="0" anchor="ctr"/>
+          <a:lstStyle/>
+          <a:p/>
+        </p:txBody>
+      </p:sp>
+      <p:sp>
+        <p:nvSpPr>
+          <p:cNvPr id="16" name="TextBox 15"/>
+          <p:cNvSpPr txBox="1"/>
+          <p:nvPr/>
+        </p:nvSpPr>
+        <p:spPr>
+          <a:xfrm>
+            <a:off x="4087368" y="3163824"/>
+            <a:ext cx="475488" cy="475488"/>
+          </a:xfrm>
+          <a:prstGeom prst="rect">
+            <a:avLst/>
+          </a:prstGeom>
+          <a:noFill/>
+        </p:spPr>
+        <p:txBody>
+          <a:bodyPr wrap="square" anchor="ctr" lIns="0" rIns="0" tIns="0" bIns="0">
+            <a:spAutoFit/>
+          </a:bodyPr>
+          <a:lstStyle/>
+          <a:p>
+            <a:pPr algn="ctr">
+              <a:lnSpc>
+                <a:spcPct val="100000"/>
+              </a:lnSpc>
+            </a:pPr>
+            <a:r>
+              <a:rPr sz="1600">
+                <a:solidFill>
+                  <a:srgbClr val="FFFFFF"/>
+                </a:solidFill>
+                <a:latin typeface="Arial"/>
+                <a:ea typeface="黑体"/>
+                <a:cs typeface="黑体"/>
+              </a:rPr>
+              <a:t>2</a:t>
+            </a:r>
+          </a:p>
+        </p:txBody>
+      </p:sp>
+      <p:sp>
+        <p:nvSpPr>
+          <p:cNvPr id="17" name="TextBox 16"/>
+          <p:cNvSpPr txBox="1"/>
+          <p:nvPr/>
+        </p:nvSpPr>
+        <p:spPr>
+          <a:xfrm>
+            <a:off x="3776472" y="2706624"/>
+            <a:ext cx="1737360" cy="402336"/>
+          </a:xfrm>
+          <a:prstGeom prst="rect">
+            <a:avLst/>
+          </a:prstGeom>
+          <a:noFill/>
+        </p:spPr>
+        <p:txBody>
+          <a:bodyPr wrap="square" anchor="ctr" lIns="0" rIns="0" tIns="0" bIns="0">
+            <a:spAutoFit/>
+          </a:bodyPr>
+          <a:lstStyle/>
+          <a:p>
+            <a:pPr algn="ctr">
+              <a:lnSpc>
+                <a:spcPct val="100000"/>
+              </a:lnSpc>
+            </a:pPr>
+            <a:r>
+              <a:rPr sz="1800">
+                <a:solidFill>
+                  <a:srgbClr val="283E4E"/>
+                </a:solidFill>
+                <a:latin typeface="Arial"/>
+                <a:ea typeface="黑体"/>
+                <a:cs typeface="黑体"/>
+              </a:rPr>
+              <a:t>示例年 2</a:t>
+            </a:r>
+          </a:p>
+        </p:txBody>
+      </p:sp>
+      <p:sp>
+        <p:nvSpPr>
+          <p:cNvPr id="18" name="TextBox 17"/>
+          <p:cNvSpPr txBox="1"/>
+          <p:nvPr/>
+        </p:nvSpPr>
+        <p:spPr>
+          <a:xfrm>
+            <a:off x="3776472" y="3730752"/>
+            <a:ext cx="1737360" cy="731520"/>
+          </a:xfrm>
+          <a:prstGeom prst="rect">
+            <a:avLst/>
+          </a:prstGeom>
+          <a:noFill/>
+        </p:spPr>
+        <p:txBody>
+          <a:bodyPr wrap="square" anchor="t" lIns="0" rIns="0" tIns="0" bIns="0">
+            <a:spAutoFit/>
+          </a:bodyPr>
+          <a:lstStyle/>
+          <a:p>
+            <a:pPr algn="ctr">
+              <a:lnSpc>
+                <a:spcPct val="115000"/>
+              </a:lnSpc>
+            </a:pPr>
+            <a:r>
+              <a:rPr sz="1600">
+                <a:solidFill>
+                  <a:srgbClr val="000000"/>
+                </a:solidFill>
+                <a:latin typeface="Times New Roman"/>
+                <a:ea typeface="宋体"/>
+                <a:cs typeface="宋体"/>
+              </a:rPr>
+              <a:t>阶段：结构与方法定稿</a:t>
+            </a:r>
+          </a:p>
+        </p:txBody>
+      </p:sp>
+      <p:sp>
+        <p:nvSpPr>
+          <p:cNvPr id="19" name="Oval 18"/>
+          <p:cNvSpPr/>
+          <p:nvPr/>
+        </p:nvSpPr>
+        <p:spPr>
+          <a:xfrm>
+            <a:off x="6903720" y="3163824"/>
+            <a:ext cx="475488" cy="475488"/>
+          </a:xfrm>
+          <a:prstGeom prst="ellipse">
+            <a:avLst/>
+          </a:prstGeom>
+          <a:solidFill>
+            <a:srgbClr val="283E4E"/>
+          </a:solidFill>
+          <a:ln>
+            <a:noFill/>
+          </a:ln>
+          <a:effectLst/>
+        </p:spPr>
+        <p:style>
+          <a:lnRef idx="1">
+            <a:schemeClr val="accent1"/>
+          </a:lnRef>
+          <a:fillRef idx="3">
+            <a:schemeClr val="accent1"/>
+          </a:fillRef>
+          <a:effectRef idx="2">
+            <a:schemeClr val="accent1"/>
+          </a:effectRef>
+          <a:fontRef idx="minor">
+            <a:schemeClr val="lt1"/>
+          </a:fontRef>
+        </p:style>
+        <p:txBody>
+          <a:bodyPr rtlCol="0" anchor="ctr"/>
+          <a:lstStyle/>
+          <a:p/>
+        </p:txBody>
+      </p:sp>
+      <p:sp>
+        <p:nvSpPr>
+          <p:cNvPr id="20" name="TextBox 19"/>
+          <p:cNvSpPr txBox="1"/>
+          <p:nvPr/>
+        </p:nvSpPr>
+        <p:spPr>
+          <a:xfrm>
+            <a:off x="6903720" y="3163824"/>
+            <a:ext cx="475488" cy="475488"/>
+          </a:xfrm>
+          <a:prstGeom prst="rect">
+            <a:avLst/>
+          </a:prstGeom>
+          <a:noFill/>
+        </p:spPr>
+        <p:txBody>
+          <a:bodyPr wrap="square" anchor="ctr" lIns="0" rIns="0" tIns="0" bIns="0">
+            <a:spAutoFit/>
+          </a:bodyPr>
+          <a:lstStyle/>
+          <a:p>
+            <a:pPr algn="ctr">
+              <a:lnSpc>
+                <a:spcPct val="100000"/>
+              </a:lnSpc>
+            </a:pPr>
+            <a:r>
+              <a:rPr sz="1600">
+                <a:solidFill>
+                  <a:srgbClr val="FFFFFF"/>
+                </a:solidFill>
+                <a:latin typeface="Arial"/>
+                <a:ea typeface="黑体"/>
+                <a:cs typeface="黑体"/>
+              </a:rPr>
+              <a:t>3</a:t>
+            </a:r>
+          </a:p>
+        </p:txBody>
+      </p:sp>
+      <p:sp>
+        <p:nvSpPr>
+          <p:cNvPr id="21" name="TextBox 20"/>
+          <p:cNvSpPr txBox="1"/>
+          <p:nvPr/>
+        </p:nvSpPr>
+        <p:spPr>
+          <a:xfrm>
+            <a:off x="6592824" y="2706624"/>
+            <a:ext cx="1737360" cy="402336"/>
+          </a:xfrm>
+          <a:prstGeom prst="rect">
+            <a:avLst/>
+          </a:prstGeom>
+          <a:noFill/>
+        </p:spPr>
+        <p:txBody>
+          <a:bodyPr wrap="square" anchor="ctr" lIns="0" rIns="0" tIns="0" bIns="0">
+            <a:spAutoFit/>
+          </a:bodyPr>
+          <a:lstStyle/>
+          <a:p>
+            <a:pPr algn="ctr">
+              <a:lnSpc>
+                <a:spcPct val="100000"/>
+              </a:lnSpc>
+            </a:pPr>
+            <a:r>
+              <a:rPr sz="1800">
+                <a:solidFill>
+                  <a:srgbClr val="283E4E"/>
+                </a:solidFill>
+                <a:latin typeface="Arial"/>
+                <a:ea typeface="黑体"/>
+                <a:cs typeface="黑体"/>
+              </a:rPr>
+              <a:t>示例年 3</a:t>
+            </a:r>
+          </a:p>
+        </p:txBody>
+      </p:sp>
+      <p:sp>
+        <p:nvSpPr>
+          <p:cNvPr id="22" name="TextBox 21"/>
+          <p:cNvSpPr txBox="1"/>
+          <p:nvPr/>
+        </p:nvSpPr>
+        <p:spPr>
+          <a:xfrm>
+            <a:off x="6592824" y="3730752"/>
+            <a:ext cx="1737360" cy="731520"/>
+          </a:xfrm>
+          <a:prstGeom prst="rect">
+            <a:avLst/>
+          </a:prstGeom>
+          <a:noFill/>
+        </p:spPr>
+        <p:txBody>
+          <a:bodyPr wrap="square" anchor="t" lIns="0" rIns="0" tIns="0" bIns="0">
+            <a:spAutoFit/>
+          </a:bodyPr>
+          <a:lstStyle/>
+          <a:p>
+            <a:pPr algn="ctr">
+              <a:lnSpc>
+                <a:spcPct val="115000"/>
+              </a:lnSpc>
+            </a:pPr>
+            <a:r>
+              <a:rPr sz="1600">
+                <a:solidFill>
+                  <a:srgbClr val="000000"/>
+                </a:solidFill>
+                <a:latin typeface="Times New Roman"/>
+                <a:ea typeface="宋体"/>
+                <a:cs typeface="宋体"/>
+              </a:rPr>
+              <a:t>推进：数据与证据补齐</a:t>
+            </a:r>
+          </a:p>
+        </p:txBody>
+      </p:sp>
+      <p:sp>
+        <p:nvSpPr>
+          <p:cNvPr id="23" name="Oval 22"/>
+          <p:cNvSpPr/>
+          <p:nvPr/>
+        </p:nvSpPr>
+        <p:spPr>
+          <a:xfrm>
+            <a:off x="9720072" y="3163824"/>
+            <a:ext cx="475488" cy="475488"/>
+          </a:xfrm>
+          <a:prstGeom prst="ellipse">
+            <a:avLst/>
+          </a:prstGeom>
+          <a:solidFill>
+            <a:srgbClr val="283E4E"/>
+          </a:solidFill>
+          <a:ln>
+            <a:noFill/>
+          </a:ln>
+          <a:effectLst/>
+        </p:spPr>
+        <p:style>
+          <a:lnRef idx="1">
+            <a:schemeClr val="accent1"/>
+          </a:lnRef>
+          <a:fillRef idx="3">
+            <a:schemeClr val="accent1"/>
+          </a:fillRef>
+          <a:effectRef idx="2">
+            <a:schemeClr val="accent1"/>
+          </a:effectRef>
+          <a:fontRef idx="minor">
+            <a:schemeClr val="lt1"/>
+          </a:fontRef>
+        </p:style>
+        <p:txBody>
+          <a:bodyPr rtlCol="0" anchor="ctr"/>
+          <a:lstStyle/>
+          <a:p/>
+        </p:txBody>
+      </p:sp>
+      <p:sp>
+        <p:nvSpPr>
+          <p:cNvPr id="24" name="TextBox 23"/>
+          <p:cNvSpPr txBox="1"/>
+          <p:nvPr/>
+        </p:nvSpPr>
+        <p:spPr>
+          <a:xfrm>
+            <a:off x="9720072" y="3163824"/>
+            <a:ext cx="475488" cy="475488"/>
+          </a:xfrm>
+          <a:prstGeom prst="rect">
+            <a:avLst/>
+          </a:prstGeom>
+          <a:noFill/>
+        </p:spPr>
+        <p:txBody>
+          <a:bodyPr wrap="square" anchor="ctr" lIns="0" rIns="0" tIns="0" bIns="0">
+            <a:spAutoFit/>
+          </a:bodyPr>
+          <a:lstStyle/>
+          <a:p>
+            <a:pPr algn="ctr">
+              <a:lnSpc>
+                <a:spcPct val="100000"/>
+              </a:lnSpc>
+            </a:pPr>
+            <a:r>
+              <a:rPr sz="1600">
+                <a:solidFill>
+                  <a:srgbClr val="FFFFFF"/>
+                </a:solidFill>
+                <a:latin typeface="Arial"/>
+                <a:ea typeface="黑体"/>
+                <a:cs typeface="黑体"/>
+              </a:rPr>
+              <a:t>4</a:t>
+            </a:r>
+          </a:p>
+        </p:txBody>
+      </p:sp>
+      <p:sp>
+        <p:nvSpPr>
+          <p:cNvPr id="25" name="TextBox 24"/>
+          <p:cNvSpPr txBox="1"/>
+          <p:nvPr/>
+        </p:nvSpPr>
+        <p:spPr>
+          <a:xfrm>
+            <a:off x="9409176" y="2706624"/>
+            <a:ext cx="1737360" cy="402336"/>
+          </a:xfrm>
+          <a:prstGeom prst="rect">
+            <a:avLst/>
+          </a:prstGeom>
+          <a:noFill/>
+        </p:spPr>
+        <p:txBody>
+          <a:bodyPr wrap="square" anchor="ctr" lIns="0" rIns="0" tIns="0" bIns="0">
+            <a:spAutoFit/>
+          </a:bodyPr>
+          <a:lstStyle/>
+          <a:p>
+            <a:pPr algn="ctr">
+              <a:lnSpc>
+                <a:spcPct val="100000"/>
+              </a:lnSpc>
+            </a:pPr>
+            <a:r>
+              <a:rPr sz="1800">
+                <a:solidFill>
+                  <a:srgbClr val="283E4E"/>
+                </a:solidFill>
+                <a:latin typeface="Arial"/>
+                <a:ea typeface="黑体"/>
+                <a:cs typeface="黑体"/>
+              </a:rPr>
+              <a:t>示例年 4</a:t>
+            </a:r>
+          </a:p>
+        </p:txBody>
+      </p:sp>
+      <p:sp>
+        <p:nvSpPr>
+          <p:cNvPr id="26" name="TextBox 25"/>
+          <p:cNvSpPr txBox="1"/>
+          <p:nvPr/>
+        </p:nvSpPr>
+        <p:spPr>
+          <a:xfrm>
+            <a:off x="9409176" y="3730752"/>
+            <a:ext cx="1737360" cy="731520"/>
+          </a:xfrm>
+          <a:prstGeom prst="rect">
+            <a:avLst/>
+          </a:prstGeom>
+          <a:noFill/>
+        </p:spPr>
+        <p:txBody>
+          <a:bodyPr wrap="square" anchor="t" lIns="0" rIns="0" tIns="0" bIns="0">
+            <a:spAutoFit/>
+          </a:bodyPr>
+          <a:lstStyle/>
+          <a:p>
+            <a:pPr algn="ctr">
+              <a:lnSpc>
+                <a:spcPct val="115000"/>
+              </a:lnSpc>
+            </a:pPr>
+            <a:r>
+              <a:rPr sz="1600">
+                <a:solidFill>
+                  <a:srgbClr val="000000"/>
+                </a:solidFill>
+                <a:latin typeface="Times New Roman"/>
+                <a:ea typeface="宋体"/>
+                <a:cs typeface="宋体"/>
+              </a:rPr>
+              <a:t>收束：结论与口径复核</a:t>
+            </a:r>
+          </a:p>
+        </p:txBody>
+      </p:sp>
+      <p:sp>
+        <p:nvSpPr>
+          <p:cNvPr id="27" name="Rectangle 26"/>
+          <p:cNvSpPr/>
+          <p:nvPr/>
+        </p:nvSpPr>
+        <p:spPr>
+          <a:xfrm>
+            <a:off x="502920" y="4846320"/>
+            <a:ext cx="11850624" cy="1005840"/>
+          </a:xfrm>
+          <a:prstGeom prst="rect">
+            <a:avLst/>
+          </a:prstGeom>
+          <a:solidFill>
+            <a:srgbClr val="F1F5F8"/>
+          </a:solidFill>
+          <a:ln>
+            <a:noFill/>
+          </a:ln>
+          <a:effectLst/>
+        </p:spPr>
+        <p:style>
+          <a:lnRef idx="1">
+            <a:schemeClr val="accent1"/>
+          </a:lnRef>
+          <a:fillRef idx="3">
+            <a:schemeClr val="accent1"/>
+          </a:fillRef>
+          <a:effectRef idx="2">
+            <a:schemeClr val="accent1"/>
+          </a:effectRef>
+          <a:fontRef idx="minor">
+            <a:schemeClr val="lt1"/>
+          </a:fontRef>
+        </p:style>
+        <p:txBody>
+          <a:bodyPr rtlCol="0" anchor="ctr"/>
+          <a:lstStyle/>
+          <a:p/>
+        </p:txBody>
+      </p:sp>
+      <p:sp>
+        <p:nvSpPr>
+          <p:cNvPr id="28" name="Rectangle 27"/>
+          <p:cNvSpPr/>
+          <p:nvPr/>
+        </p:nvSpPr>
+        <p:spPr>
+          <a:xfrm>
+            <a:off x="502920" y="4846320"/>
+            <a:ext cx="41148" cy="1005840"/>
+          </a:xfrm>
+          <a:prstGeom prst="rect">
+            <a:avLst/>
+          </a:prstGeom>
+          <a:solidFill>
+            <a:srgbClr val="4F7C74"/>
+          </a:solidFill>
+          <a:ln>
+            <a:noFill/>
+          </a:ln>
+          <a:effectLst/>
+        </p:spPr>
+        <p:style>
+          <a:lnRef idx="1">
+            <a:schemeClr val="accent1"/>
+          </a:lnRef>
+          <a:fillRef idx="3">
+            <a:schemeClr val="accent1"/>
+          </a:fillRef>
+          <a:effectRef idx="2">
+            <a:schemeClr val="accent1"/>
+          </a:effectRef>
+          <a:fontRef idx="minor">
+            <a:schemeClr val="lt1"/>
+          </a:fontRef>
+        </p:style>
+        <p:txBody>
+          <a:bodyPr rtlCol="0" anchor="ctr"/>
+          <a:lstStyle/>
+          <a:p/>
+        </p:txBody>
+      </p:sp>
+      <p:sp>
+        <p:nvSpPr>
+          <p:cNvPr id="29" name="TextBox 28"/>
+          <p:cNvSpPr txBox="1"/>
+          <p:nvPr/>
+        </p:nvSpPr>
+        <p:spPr>
+          <a:xfrm>
+            <a:off x="694944" y="4937760"/>
+            <a:ext cx="11466576" cy="822960"/>
+          </a:xfrm>
+          <a:prstGeom prst="rect">
+            <a:avLst/>
+          </a:prstGeom>
+          <a:noFill/>
+        </p:spPr>
+        <p:txBody>
+          <a:bodyPr wrap="square" anchor="ctr" lIns="0" rIns="0" tIns="0" bIns="0">
+            <a:spAutoFit/>
+          </a:bodyPr>
+          <a:lstStyle/>
+          <a:p>
+            <a:pPr algn="l">
+              <a:lnSpc>
+                <a:spcPct val="120000"/>
+              </a:lnSpc>
+            </a:pPr>
+            <a:r>
+              <a:rPr sz="1800">
+                <a:solidFill>
+                  <a:srgbClr val="283E4E"/>
+                </a:solidFill>
+                <a:latin typeface="Arial"/>
+                <a:ea typeface="黑体"/>
+                <a:cs typeface="黑体"/>
+              </a:rPr>
+              <a:t>结论占位：时间线只标真正改变方向的事件，不把日常进度也排上去。</a:t>
+            </a:r>
+          </a:p>
+        </p:txBody>
+      </p:sp>
+    </p:spTree>
+  </p:cSld>
+  <p:clrMapOvr>
+    <a:masterClrMapping/>
+  </p:clrMapOvr>
+</p:sld>
+</file>
+
+<file path=ppt/slides/slide7.xml><?xml version="1.0" encoding="utf-8"?>
+<p:sld xmlns:a="http://schemas.openxmlformats.org/drawingml/2006/main" xmlns:p="http://schemas.openxmlformats.org/presentationml/2006/main" xmlns:r="http://schemas.openxmlformats.org/officeDocument/2006/relationships">
+  <p:cSld>
+    <p:spTree>
+      <p:nvGrpSpPr>
+        <p:cNvPr id="1" name=""/>
+        <p:cNvGrpSpPr/>
+        <p:nvPr/>
+      </p:nvGrpSpPr>
+      <p:grpSpPr/>
+      <p:sp>
+        <p:nvSpPr>
+          <p:cNvPr id="2" name="TextBox 1"/>
+          <p:cNvSpPr txBox="1"/>
+          <p:nvPr/>
+        </p:nvSpPr>
+        <p:spPr>
+          <a:xfrm>
+            <a:off x="5852160" y="219456"/>
+            <a:ext cx="5577840" cy="310896"/>
+          </a:xfrm>
+          <a:prstGeom prst="rect">
+            <a:avLst/>
+          </a:prstGeom>
+          <a:noFill/>
+        </p:spPr>
+        <p:txBody>
+          <a:bodyPr wrap="square" anchor="t" lIns="0" rIns="0" tIns="0" bIns="0">
+            <a:spAutoFit/>
+          </a:bodyPr>
+          <a:lstStyle/>
+          <a:p>
+            <a:pPr algn="r">
+              <a:lnSpc>
+                <a:spcPct val="100000"/>
+              </a:lnSpc>
+            </a:pPr>
+            <a:r>
+              <a:rPr sz="1600">
+                <a:solidFill>
+                  <a:srgbClr val="000000"/>
+                </a:solidFill>
+                <a:latin typeface="Times New Roman"/>
+                <a:ea typeface="宋体"/>
+                <a:cs typeface="宋体"/>
+              </a:rPr>
+              <a:t>示例 · 汇报页骨架</a:t>
+            </a:r>
+          </a:p>
+        </p:txBody>
+      </p:sp>
+      <p:sp>
+        <p:nvSpPr>
+          <p:cNvPr id="3" name="TextBox 2"/>
+          <p:cNvSpPr txBox="1"/>
+          <p:nvPr/>
+        </p:nvSpPr>
+        <p:spPr>
+          <a:xfrm>
+            <a:off x="11521440" y="219456"/>
+            <a:ext cx="832104" cy="310896"/>
+          </a:xfrm>
+          <a:prstGeom prst="rect">
+            <a:avLst/>
+          </a:prstGeom>
+          <a:noFill/>
+        </p:spPr>
+        <p:txBody>
+          <a:bodyPr wrap="square" anchor="t" lIns="0" rIns="0" tIns="0" bIns="0">
+            <a:spAutoFit/>
+          </a:bodyPr>
+          <a:lstStyle/>
+          <a:p>
+            <a:pPr algn="r">
+              <a:lnSpc>
+                <a:spcPct val="100000"/>
+              </a:lnSpc>
+            </a:pPr>
+            <a:r>
+              <a:rPr sz="1600">
+                <a:solidFill>
+                  <a:srgbClr val="283E4E"/>
+                </a:solidFill>
+                <a:latin typeface="Arial"/>
+                <a:ea typeface="黑体"/>
+                <a:cs typeface="黑体"/>
+              </a:rPr>
+              <a:t>07</a:t>
+            </a:r>
+          </a:p>
+        </p:txBody>
+      </p:sp>
+      <p:sp>
+        <p:nvSpPr>
+          <p:cNvPr id="4" name="TextBox 3"/>
+          <p:cNvSpPr txBox="1"/>
+          <p:nvPr/>
+        </p:nvSpPr>
+        <p:spPr>
+          <a:xfrm>
+            <a:off x="502920" y="530352"/>
+            <a:ext cx="11850624" cy="603504"/>
+          </a:xfrm>
+          <a:prstGeom prst="rect">
+            <a:avLst/>
+          </a:prstGeom>
+          <a:noFill/>
+        </p:spPr>
+        <p:txBody>
+          <a:bodyPr wrap="square" anchor="t" lIns="0" rIns="0" tIns="0" bIns="0">
+            <a:spAutoFit/>
+          </a:bodyPr>
+          <a:lstStyle/>
+          <a:p>
+            <a:pPr algn="l">
+              <a:lnSpc>
+                <a:spcPct val="100000"/>
+              </a:lnSpc>
+            </a:pPr>
+            <a:r>
+              <a:rPr sz="3000">
+                <a:solidFill>
+                  <a:srgbClr val="283E4E"/>
+                </a:solidFill>
+                <a:latin typeface="Arial"/>
+                <a:ea typeface="黑体"/>
+                <a:cs typeface="黑体"/>
+              </a:rPr>
+              <a:t>示例页：层级关系用宽度变化表达</a:t>
+            </a:r>
+          </a:p>
+        </p:txBody>
+      </p:sp>
+      <p:sp>
+        <p:nvSpPr>
+          <p:cNvPr id="5" name="TextBox 4"/>
+          <p:cNvSpPr txBox="1"/>
+          <p:nvPr/>
+        </p:nvSpPr>
+        <p:spPr>
+          <a:xfrm>
+            <a:off x="502920" y="1152144"/>
+            <a:ext cx="11850624" cy="329184"/>
+          </a:xfrm>
+          <a:prstGeom prst="rect">
+            <a:avLst/>
+          </a:prstGeom>
+          <a:noFill/>
+        </p:spPr>
+        <p:txBody>
+          <a:bodyPr wrap="square" anchor="t" lIns="0" rIns="0" tIns="0" bIns="0">
+            <a:spAutoFit/>
+          </a:bodyPr>
+          <a:lstStyle/>
+          <a:p>
+            <a:pPr algn="l">
+              <a:lnSpc>
+                <a:spcPct val="100000"/>
+              </a:lnSpc>
+            </a:pPr>
+            <a:r>
+              <a:rPr sz="2000">
+                <a:solidFill>
+                  <a:srgbClr val="000000"/>
+                </a:solidFill>
+                <a:latin typeface="Times New Roman"/>
+                <a:ea typeface="宋体"/>
+                <a:cs typeface="宋体"/>
+              </a:rPr>
+              <a:t>层级用逐层加宽的条带表达，不用三个同样大的方块并排。</a:t>
+            </a:r>
+          </a:p>
+        </p:txBody>
+      </p:sp>
+      <p:sp>
+        <p:nvSpPr>
+          <p:cNvPr id="6" name="Rectangle 5"/>
+          <p:cNvSpPr/>
+          <p:nvPr/>
+        </p:nvSpPr>
+        <p:spPr>
+          <a:xfrm>
+            <a:off x="502920" y="1554480"/>
+            <a:ext cx="11850624" cy="10972"/>
+          </a:xfrm>
+          <a:prstGeom prst="rect">
+            <a:avLst/>
+          </a:prstGeom>
+          <a:solidFill>
+            <a:srgbClr val="283E4E"/>
+          </a:solidFill>
+          <a:ln>
+            <a:noFill/>
+          </a:ln>
+          <a:effectLst/>
+        </p:spPr>
+        <p:style>
+          <a:lnRef idx="1">
+            <a:schemeClr val="accent1"/>
+          </a:lnRef>
+          <a:fillRef idx="3">
+            <a:schemeClr val="accent1"/>
+          </a:fillRef>
+          <a:effectRef idx="2">
+            <a:schemeClr val="accent1"/>
+          </a:effectRef>
+          <a:fontRef idx="minor">
+            <a:schemeClr val="lt1"/>
+          </a:fontRef>
+        </p:style>
+        <p:txBody>
+          <a:bodyPr rtlCol="0" anchor="ctr"/>
+          <a:lstStyle/>
+          <a:p/>
+        </p:txBody>
+      </p:sp>
+      <p:sp>
+        <p:nvSpPr>
+          <p:cNvPr id="7" name="Rectangle 6"/>
+          <p:cNvSpPr/>
+          <p:nvPr/>
+        </p:nvSpPr>
+        <p:spPr>
+          <a:xfrm>
+            <a:off x="3456432" y="1920240"/>
+            <a:ext cx="5943600" cy="960120"/>
+          </a:xfrm>
+          <a:prstGeom prst="rect">
+            <a:avLst/>
+          </a:prstGeom>
+          <a:solidFill>
+            <a:srgbClr val="283E4E"/>
+          </a:solidFill>
+          <a:ln w="9525">
+            <a:solidFill>
+              <a:srgbClr val="B7C1C8"/>
+            </a:solidFill>
+          </a:ln>
+          <a:effectLst/>
+        </p:spPr>
+        <p:style>
+          <a:lnRef idx="1">
+            <a:schemeClr val="accent1"/>
+          </a:lnRef>
+          <a:fillRef idx="3">
+            <a:schemeClr val="accent1"/>
+          </a:fillRef>
+          <a:effectRef idx="2">
+            <a:schemeClr val="accent1"/>
+          </a:effectRef>
+          <a:fontRef idx="minor">
+            <a:schemeClr val="lt1"/>
+          </a:fontRef>
+        </p:style>
+        <p:txBody>
+          <a:bodyPr rtlCol="0" anchor="ctr"/>
+          <a:lstStyle/>
+          <a:p/>
+        </p:txBody>
+      </p:sp>
+      <p:sp>
+        <p:nvSpPr>
+          <p:cNvPr id="8" name="TextBox 7"/>
+          <p:cNvSpPr txBox="1"/>
+          <p:nvPr/>
+        </p:nvSpPr>
+        <p:spPr>
+          <a:xfrm>
+            <a:off x="3730752" y="2029968"/>
+            <a:ext cx="5394960" cy="402336"/>
+          </a:xfrm>
+          <a:prstGeom prst="rect">
+            <a:avLst/>
+          </a:prstGeom>
+          <a:noFill/>
+        </p:spPr>
+        <p:txBody>
+          <a:bodyPr wrap="square" anchor="ctr" lIns="0" rIns="0" tIns="0" bIns="0">
+            <a:spAutoFit/>
+          </a:bodyPr>
+          <a:lstStyle/>
+          <a:p>
+            <a:pPr algn="l">
+              <a:lnSpc>
+                <a:spcPct val="100000"/>
+              </a:lnSpc>
+            </a:pPr>
+            <a:r>
+              <a:rPr sz="1800">
+                <a:solidFill>
+                  <a:srgbClr val="FFFFFF"/>
+                </a:solidFill>
+                <a:latin typeface="Arial"/>
+                <a:ea typeface="黑体"/>
+                <a:cs typeface="黑体"/>
+              </a:rPr>
+              <a:t>上层：总目标</a:t>
+            </a:r>
+          </a:p>
+        </p:txBody>
+      </p:sp>
+      <p:sp>
+        <p:nvSpPr>
+          <p:cNvPr id="9" name="TextBox 8"/>
+          <p:cNvSpPr txBox="1"/>
+          <p:nvPr/>
+        </p:nvSpPr>
+        <p:spPr>
+          <a:xfrm>
+            <a:off x="3730752" y="2414016"/>
+            <a:ext cx="5394960" cy="384048"/>
+          </a:xfrm>
+          <a:prstGeom prst="rect">
+            <a:avLst/>
+          </a:prstGeom>
+          <a:noFill/>
+        </p:spPr>
+        <p:txBody>
+          <a:bodyPr wrap="square" anchor="ctr" lIns="0" rIns="0" tIns="0" bIns="0">
+            <a:spAutoFit/>
+          </a:bodyPr>
+          <a:lstStyle/>
+          <a:p>
+            <a:pPr algn="l">
+              <a:lnSpc>
+                <a:spcPct val="100000"/>
+              </a:lnSpc>
+            </a:pPr>
+            <a:r>
+              <a:rPr sz="1600">
+                <a:solidFill>
+                  <a:srgbClr val="FFFFFF"/>
+                </a:solidFill>
+                <a:latin typeface="Times New Roman"/>
+                <a:ea typeface="宋体"/>
+                <a:cs typeface="宋体"/>
+              </a:rPr>
+              <a:t>一句话说清这套汇报要证明什么</a:t>
+            </a:r>
+          </a:p>
+        </p:txBody>
+      </p:sp>
+      <p:sp>
+        <p:nvSpPr>
+          <p:cNvPr id="10" name="Rectangle 9"/>
+          <p:cNvSpPr/>
+          <p:nvPr/>
+        </p:nvSpPr>
+        <p:spPr>
+          <a:xfrm>
+            <a:off x="2496312" y="2980944"/>
+            <a:ext cx="7863840" cy="960120"/>
+          </a:xfrm>
+          <a:prstGeom prst="rect">
+            <a:avLst/>
+          </a:prstGeom>
+          <a:solidFill>
+            <a:srgbClr val="4A6577"/>
+          </a:solidFill>
+          <a:ln w="9525">
+            <a:solidFill>
+              <a:srgbClr val="B7C1C8"/>
+            </a:solidFill>
+          </a:ln>
+          <a:effectLst/>
+        </p:spPr>
+        <p:style>
+          <a:lnRef idx="1">
+            <a:schemeClr val="accent1"/>
+          </a:lnRef>
+          <a:fillRef idx="3">
+            <a:schemeClr val="accent1"/>
+          </a:fillRef>
+          <a:effectRef idx="2">
+            <a:schemeClr val="accent1"/>
+          </a:effectRef>
+          <a:fontRef idx="minor">
+            <a:schemeClr val="lt1"/>
+          </a:fontRef>
+        </p:style>
+        <p:txBody>
+          <a:bodyPr rtlCol="0" anchor="ctr"/>
+          <a:lstStyle/>
+          <a:p/>
+        </p:txBody>
+      </p:sp>
+      <p:sp>
+        <p:nvSpPr>
+          <p:cNvPr id="11" name="TextBox 10"/>
+          <p:cNvSpPr txBox="1"/>
+          <p:nvPr/>
+        </p:nvSpPr>
+        <p:spPr>
+          <a:xfrm>
+            <a:off x="2770632" y="3090672"/>
+            <a:ext cx="7315200" cy="402336"/>
+          </a:xfrm>
+          <a:prstGeom prst="rect">
+            <a:avLst/>
+          </a:prstGeom>
+          <a:noFill/>
+        </p:spPr>
+        <p:txBody>
+          <a:bodyPr wrap="square" anchor="ctr" lIns="0" rIns="0" tIns="0" bIns="0">
+            <a:spAutoFit/>
+          </a:bodyPr>
+          <a:lstStyle/>
+          <a:p>
+            <a:pPr algn="l">
+              <a:lnSpc>
+                <a:spcPct val="100000"/>
+              </a:lnSpc>
+            </a:pPr>
+            <a:r>
+              <a:rPr sz="1800">
+                <a:solidFill>
+                  <a:srgbClr val="FFFFFF"/>
+                </a:solidFill>
+                <a:latin typeface="Arial"/>
+                <a:ea typeface="黑体"/>
+                <a:cs typeface="黑体"/>
+              </a:rPr>
+              <a:t>中层：三条主线</a:t>
+            </a:r>
+          </a:p>
+        </p:txBody>
+      </p:sp>
+      <p:sp>
+        <p:nvSpPr>
+          <p:cNvPr id="12" name="TextBox 11"/>
+          <p:cNvSpPr txBox="1"/>
+          <p:nvPr/>
+        </p:nvSpPr>
+        <p:spPr>
+          <a:xfrm>
+            <a:off x="2770632" y="3474720"/>
+            <a:ext cx="7315200" cy="384048"/>
+          </a:xfrm>
+          <a:prstGeom prst="rect">
+            <a:avLst/>
+          </a:prstGeom>
+          <a:noFill/>
+        </p:spPr>
+        <p:txBody>
+          <a:bodyPr wrap="square" anchor="ctr" lIns="0" rIns="0" tIns="0" bIns="0">
+            <a:spAutoFit/>
+          </a:bodyPr>
+          <a:lstStyle/>
+          <a:p>
+            <a:pPr algn="l">
+              <a:lnSpc>
+                <a:spcPct val="100000"/>
+              </a:lnSpc>
+            </a:pPr>
+            <a:r>
+              <a:rPr sz="1600">
+                <a:solidFill>
+                  <a:srgbClr val="FFFFFF"/>
+                </a:solidFill>
+                <a:latin typeface="Times New Roman"/>
+                <a:ea typeface="宋体"/>
+                <a:cs typeface="宋体"/>
+              </a:rPr>
+              <a:t>把证据按主线分组，每条只讲一个机制</a:t>
+            </a:r>
+          </a:p>
+        </p:txBody>
+      </p:sp>
+      <p:sp>
+        <p:nvSpPr>
+          <p:cNvPr id="13" name="Rectangle 12"/>
+          <p:cNvSpPr/>
+          <p:nvPr/>
+        </p:nvSpPr>
+        <p:spPr>
+          <a:xfrm>
+            <a:off x="1536192" y="4041648"/>
+            <a:ext cx="9784080" cy="960120"/>
+          </a:xfrm>
+          <a:prstGeom prst="rect">
+            <a:avLst/>
+          </a:prstGeom>
+          <a:solidFill>
+            <a:srgbClr val="4F7C74"/>
+          </a:solidFill>
+          <a:ln w="9525">
+            <a:solidFill>
+              <a:srgbClr val="B7C1C8"/>
+            </a:solidFill>
+          </a:ln>
+          <a:effectLst/>
+        </p:spPr>
+        <p:style>
+          <a:lnRef idx="1">
+            <a:schemeClr val="accent1"/>
+          </a:lnRef>
+          <a:fillRef idx="3">
+            <a:schemeClr val="accent1"/>
+          </a:fillRef>
+          <a:effectRef idx="2">
+            <a:schemeClr val="accent1"/>
+          </a:effectRef>
+          <a:fontRef idx="minor">
+            <a:schemeClr val="lt1"/>
+          </a:fontRef>
+        </p:style>
+        <p:txBody>
+          <a:bodyPr rtlCol="0" anchor="ctr"/>
+          <a:lstStyle/>
+          <a:p/>
+        </p:txBody>
+      </p:sp>
+      <p:sp>
+        <p:nvSpPr>
+          <p:cNvPr id="14" name="TextBox 13"/>
+          <p:cNvSpPr txBox="1"/>
+          <p:nvPr/>
+        </p:nvSpPr>
+        <p:spPr>
+          <a:xfrm>
+            <a:off x="1810512" y="4151376"/>
+            <a:ext cx="9235440" cy="402336"/>
+          </a:xfrm>
+          <a:prstGeom prst="rect">
+            <a:avLst/>
+          </a:prstGeom>
+          <a:noFill/>
+        </p:spPr>
+        <p:txBody>
+          <a:bodyPr wrap="square" anchor="ctr" lIns="0" rIns="0" tIns="0" bIns="0">
+            <a:spAutoFit/>
+          </a:bodyPr>
+          <a:lstStyle/>
+          <a:p>
+            <a:pPr algn="l">
+              <a:lnSpc>
+                <a:spcPct val="100000"/>
+              </a:lnSpc>
+            </a:pPr>
+            <a:r>
+              <a:rPr sz="1800">
+                <a:solidFill>
+                  <a:srgbClr val="FFFFFF"/>
+                </a:solidFill>
+                <a:latin typeface="Arial"/>
+                <a:ea typeface="黑体"/>
+                <a:cs typeface="黑体"/>
+              </a:rPr>
+              <a:t>下层：具体实证</a:t>
+            </a:r>
+          </a:p>
+        </p:txBody>
+      </p:sp>
+      <p:sp>
+        <p:nvSpPr>
+          <p:cNvPr id="15" name="TextBox 14"/>
+          <p:cNvSpPr txBox="1"/>
+          <p:nvPr/>
+        </p:nvSpPr>
+        <p:spPr>
+          <a:xfrm>
+            <a:off x="1810512" y="4535424"/>
+            <a:ext cx="9235440" cy="384048"/>
+          </a:xfrm>
+          <a:prstGeom prst="rect">
+            <a:avLst/>
+          </a:prstGeom>
+          <a:noFill/>
+        </p:spPr>
+        <p:txBody>
+          <a:bodyPr wrap="square" anchor="ctr" lIns="0" rIns="0" tIns="0" bIns="0">
+            <a:spAutoFit/>
+          </a:bodyPr>
+          <a:lstStyle/>
+          <a:p>
+            <a:pPr algn="l">
+              <a:lnSpc>
+                <a:spcPct val="100000"/>
+              </a:lnSpc>
+            </a:pPr>
+            <a:r>
+              <a:rPr sz="1600">
+                <a:solidFill>
+                  <a:srgbClr val="FFFFFF"/>
+                </a:solidFill>
+                <a:latin typeface="Times New Roman"/>
+                <a:ea typeface="宋体"/>
+                <a:cs typeface="宋体"/>
+              </a:rPr>
+              <a:t>指标、数值、口径逐条落到同一句里</a:t>
+            </a:r>
+          </a:p>
+        </p:txBody>
+      </p:sp>
+      <p:sp>
+        <p:nvSpPr>
+          <p:cNvPr id="16" name="TextBox 15"/>
+          <p:cNvSpPr txBox="1"/>
+          <p:nvPr/>
+        </p:nvSpPr>
+        <p:spPr>
+          <a:xfrm>
+            <a:off x="502920" y="5230368"/>
+            <a:ext cx="11850624" cy="566928"/>
+          </a:xfrm>
+          <a:prstGeom prst="rect">
+            <a:avLst/>
+          </a:prstGeom>
+          <a:noFill/>
+        </p:spPr>
+        <p:txBody>
+          <a:bodyPr wrap="square" anchor="ctr" lIns="0" rIns="0" tIns="0" bIns="0">
+            <a:spAutoFit/>
+          </a:bodyPr>
+          <a:lstStyle/>
+          <a:p>
+            <a:pPr algn="l">
+              <a:lnSpc>
+                <a:spcPct val="120000"/>
+              </a:lnSpc>
+            </a:pPr>
+            <a:r>
+              <a:rPr sz="1800">
+                <a:solidFill>
+                  <a:srgbClr val="000000"/>
+                </a:solidFill>
+                <a:latin typeface="Times New Roman"/>
+                <a:ea typeface="宋体"/>
+                <a:cs typeface="宋体"/>
+              </a:rPr>
+              <a:t>判断占位：层级越往上越概括，越往下越具体；同级信息必须同宽，不靠字号区分层级。</a:t>
+            </a:r>
+          </a:p>
+        </p:txBody>
+      </p:sp>
+    </p:spTree>
+  </p:cSld>
+  <p:clrMapOvr>
+    <a:masterClrMapping/>
+  </p:clrMapOvr>
+</p:sld>
+</file>
+
+<file path=ppt/slides/slide8.xml><?xml version="1.0" encoding="utf-8"?>
+<p:sld xmlns:a="http://schemas.openxmlformats.org/drawingml/2006/main" xmlns:p="http://schemas.openxmlformats.org/presentationml/2006/main" xmlns:r="http://schemas.openxmlformats.org/officeDocument/2006/relationships">
+  <p:cSld>
+    <p:spTree>
+      <p:nvGrpSpPr>
+        <p:cNvPr id="1" name=""/>
+        <p:cNvGrpSpPr/>
+        <p:nvPr/>
+      </p:nvGrpSpPr>
+      <p:grpSpPr/>
+      <p:sp>
+        <p:nvSpPr>
+          <p:cNvPr id="2" name="TextBox 1"/>
+          <p:cNvSpPr txBox="1"/>
+          <p:nvPr/>
+        </p:nvSpPr>
+        <p:spPr>
+          <a:xfrm>
+            <a:off x="5852160" y="219456"/>
+            <a:ext cx="5577840" cy="310896"/>
+          </a:xfrm>
+          <a:prstGeom prst="rect">
+            <a:avLst/>
+          </a:prstGeom>
+          <a:noFill/>
+        </p:spPr>
+        <p:txBody>
+          <a:bodyPr wrap="square" anchor="t" lIns="0" rIns="0" tIns="0" bIns="0">
+            <a:spAutoFit/>
+          </a:bodyPr>
+          <a:lstStyle/>
+          <a:p>
+            <a:pPr algn="r">
+              <a:lnSpc>
+                <a:spcPct val="100000"/>
+              </a:lnSpc>
+            </a:pPr>
+            <a:r>
+              <a:rPr sz="1600">
+                <a:solidFill>
+                  <a:srgbClr val="000000"/>
+                </a:solidFill>
+                <a:latin typeface="Times New Roman"/>
+                <a:ea typeface="宋体"/>
+                <a:cs typeface="宋体"/>
+              </a:rPr>
+              <a:t>示例 · 汇报页骨架</a:t>
+            </a:r>
+          </a:p>
+        </p:txBody>
+      </p:sp>
+      <p:sp>
+        <p:nvSpPr>
+          <p:cNvPr id="3" name="TextBox 2"/>
+          <p:cNvSpPr txBox="1"/>
+          <p:nvPr/>
+        </p:nvSpPr>
+        <p:spPr>
+          <a:xfrm>
+            <a:off x="11521440" y="219456"/>
+            <a:ext cx="832104" cy="310896"/>
+          </a:xfrm>
+          <a:prstGeom prst="rect">
+            <a:avLst/>
+          </a:prstGeom>
+          <a:noFill/>
+        </p:spPr>
+        <p:txBody>
+          <a:bodyPr wrap="square" anchor="t" lIns="0" rIns="0" tIns="0" bIns="0">
+            <a:spAutoFit/>
+          </a:bodyPr>
+          <a:lstStyle/>
+          <a:p>
+            <a:pPr algn="r">
+              <a:lnSpc>
+                <a:spcPct val="100000"/>
+              </a:lnSpc>
+            </a:pPr>
+            <a:r>
+              <a:rPr sz="1600">
+                <a:solidFill>
+                  <a:srgbClr val="283E4E"/>
+                </a:solidFill>
+                <a:latin typeface="Arial"/>
+                <a:ea typeface="黑体"/>
+                <a:cs typeface="黑体"/>
+              </a:rPr>
+              <a:t>08</a:t>
+            </a:r>
+          </a:p>
+        </p:txBody>
+      </p:sp>
+      <p:sp>
+        <p:nvSpPr>
+          <p:cNvPr id="4" name="TextBox 3"/>
+          <p:cNvSpPr txBox="1"/>
+          <p:nvPr/>
+        </p:nvSpPr>
+        <p:spPr>
+          <a:xfrm>
+            <a:off x="502920" y="530352"/>
+            <a:ext cx="11850624" cy="603504"/>
+          </a:xfrm>
+          <a:prstGeom prst="rect">
+            <a:avLst/>
+          </a:prstGeom>
+          <a:noFill/>
+        </p:spPr>
+        <p:txBody>
+          <a:bodyPr wrap="square" anchor="t" lIns="0" rIns="0" tIns="0" bIns="0">
+            <a:spAutoFit/>
+          </a:bodyPr>
+          <a:lstStyle/>
+          <a:p>
+            <a:pPr algn="l">
+              <a:lnSpc>
+                <a:spcPct val="100000"/>
+              </a:lnSpc>
+            </a:pPr>
+            <a:r>
+              <a:rPr sz="3000">
+                <a:solidFill>
+                  <a:srgbClr val="283E4E"/>
+                </a:solidFill>
+                <a:latin typeface="Arial"/>
+                <a:ea typeface="黑体"/>
+                <a:cs typeface="黑体"/>
+              </a:rPr>
+              <a:t>示例页：循环关系用中心与节点表达</a:t>
+            </a:r>
+          </a:p>
+        </p:txBody>
+      </p:sp>
+      <p:sp>
+        <p:nvSpPr>
+          <p:cNvPr id="5" name="TextBox 4"/>
+          <p:cNvSpPr txBox="1"/>
+          <p:nvPr/>
+        </p:nvSpPr>
+        <p:spPr>
+          <a:xfrm>
+            <a:off x="502920" y="1152144"/>
+            <a:ext cx="11850624" cy="329184"/>
+          </a:xfrm>
+          <a:prstGeom prst="rect">
+            <a:avLst/>
+          </a:prstGeom>
+          <a:noFill/>
+        </p:spPr>
+        <p:txBody>
+          <a:bodyPr wrap="square" anchor="t" lIns="0" rIns="0" tIns="0" bIns="0">
+            <a:spAutoFit/>
+          </a:bodyPr>
+          <a:lstStyle/>
+          <a:p>
+            <a:pPr algn="l">
+              <a:lnSpc>
+                <a:spcPct val="100000"/>
+              </a:lnSpc>
+            </a:pPr>
+            <a:r>
+              <a:rPr sz="2000">
+                <a:solidFill>
+                  <a:srgbClr val="000000"/>
+                </a:solidFill>
+                <a:latin typeface="Times New Roman"/>
+                <a:ea typeface="宋体"/>
+                <a:cs typeface="宋体"/>
+              </a:rPr>
+              <a:t>闭环、迭代、聚合关系用中心圆加周边节点，不用箭头回环堆满页面。</a:t>
+            </a:r>
+          </a:p>
+        </p:txBody>
+      </p:sp>
+      <p:sp>
+        <p:nvSpPr>
+          <p:cNvPr id="6" name="Rectangle 5"/>
+          <p:cNvSpPr/>
+          <p:nvPr/>
+        </p:nvSpPr>
+        <p:spPr>
+          <a:xfrm>
+            <a:off x="502920" y="1554480"/>
+            <a:ext cx="11850624" cy="10972"/>
+          </a:xfrm>
+          <a:prstGeom prst="rect">
+            <a:avLst/>
+          </a:prstGeom>
+          <a:solidFill>
+            <a:srgbClr val="283E4E"/>
+          </a:solidFill>
+          <a:ln>
+            <a:noFill/>
+          </a:ln>
+          <a:effectLst/>
+        </p:spPr>
+        <p:style>
+          <a:lnRef idx="1">
+            <a:schemeClr val="accent1"/>
+          </a:lnRef>
+          <a:fillRef idx="3">
+            <a:schemeClr val="accent1"/>
+          </a:fillRef>
+          <a:effectRef idx="2">
+            <a:schemeClr val="accent1"/>
+          </a:effectRef>
+          <a:fontRef idx="minor">
+            <a:schemeClr val="lt1"/>
+          </a:fontRef>
+        </p:style>
+        <p:txBody>
+          <a:bodyPr rtlCol="0" anchor="ctr"/>
+          <a:lstStyle/>
+          <a:p/>
+        </p:txBody>
+      </p:sp>
+      <p:sp>
+        <p:nvSpPr>
+          <p:cNvPr id="7" name="Oval 6"/>
+          <p:cNvSpPr/>
+          <p:nvPr/>
+        </p:nvSpPr>
+        <p:spPr>
+          <a:xfrm>
+            <a:off x="4434840" y="2834640"/>
+            <a:ext cx="2926080" cy="2926080"/>
+          </a:xfrm>
+          <a:prstGeom prst="ellipse">
+            <a:avLst/>
+          </a:prstGeom>
+          <a:solidFill>
+            <a:srgbClr val="283E4E"/>
+          </a:solidFill>
+          <a:ln>
+            <a:noFill/>
+          </a:ln>
+          <a:effectLst/>
+        </p:spPr>
+        <p:style>
+          <a:lnRef idx="1">
+            <a:schemeClr val="accent1"/>
+          </a:lnRef>
+          <a:fillRef idx="3">
+            <a:schemeClr val="accent1"/>
+          </a:fillRef>
+          <a:effectRef idx="2">
+            <a:schemeClr val="accent1"/>
+          </a:effectRef>
+          <a:fontRef idx="minor">
+            <a:schemeClr val="lt1"/>
+          </a:fontRef>
+        </p:style>
+        <p:txBody>
+          <a:bodyPr rtlCol="0" anchor="ctr"/>
+          <a:lstStyle/>
+          <a:p/>
+        </p:txBody>
+      </p:sp>
+      <p:sp>
+        <p:nvSpPr>
+          <p:cNvPr id="8" name="TextBox 7"/>
+          <p:cNvSpPr txBox="1"/>
+          <p:nvPr/>
+        </p:nvSpPr>
+        <p:spPr>
+          <a:xfrm>
+            <a:off x="4709160" y="3584448"/>
+            <a:ext cx="2377440" cy="658368"/>
+          </a:xfrm>
+          <a:prstGeom prst="rect">
+            <a:avLst/>
+          </a:prstGeom>
+          <a:noFill/>
+        </p:spPr>
+        <p:txBody>
+          <a:bodyPr wrap="square" anchor="ctr" lIns="0" rIns="0" tIns="0" bIns="0">
+            <a:spAutoFit/>
+          </a:bodyPr>
+          <a:lstStyle/>
+          <a:p>
+            <a:pPr algn="ctr">
+              <a:lnSpc>
+                <a:spcPct val="100000"/>
+              </a:lnSpc>
+            </a:pPr>
+            <a:r>
+              <a:rPr sz="2000">
+                <a:solidFill>
+                  <a:srgbClr val="FFFFFF"/>
+                </a:solidFill>
+                <a:latin typeface="Arial"/>
+                <a:ea typeface="黑体"/>
+                <a:cs typeface="黑体"/>
+              </a:rPr>
+              <a:t>中心主题</a:t>
+            </a:r>
+          </a:p>
+        </p:txBody>
+      </p:sp>
+      <p:sp>
+        <p:nvSpPr>
+          <p:cNvPr id="9" name="TextBox 8"/>
+          <p:cNvSpPr txBox="1"/>
+          <p:nvPr/>
+        </p:nvSpPr>
+        <p:spPr>
+          <a:xfrm>
+            <a:off x="4709160" y="4261104"/>
+            <a:ext cx="2377440" cy="457200"/>
+          </a:xfrm>
+          <a:prstGeom prst="rect">
+            <a:avLst/>
+          </a:prstGeom>
+          <a:noFill/>
+        </p:spPr>
+        <p:txBody>
+          <a:bodyPr wrap="square" anchor="ctr" lIns="0" rIns="0" tIns="0" bIns="0">
+            <a:spAutoFit/>
+          </a:bodyPr>
+          <a:lstStyle/>
+          <a:p>
+            <a:pPr algn="ctr">
+              <a:lnSpc>
+                <a:spcPct val="100000"/>
+              </a:lnSpc>
+            </a:pPr>
+            <a:r>
+              <a:rPr sz="1600">
+                <a:solidFill>
+                  <a:srgbClr val="FFFFFF"/>
+                </a:solidFill>
+                <a:latin typeface="Times New Roman"/>
+                <a:ea typeface="宋体"/>
+                <a:cs typeface="宋体"/>
+              </a:rPr>
+              <a:t>一句话定义</a:t>
+            </a:r>
+          </a:p>
+        </p:txBody>
+      </p:sp>
+      <p:sp>
+        <p:nvSpPr>
+          <p:cNvPr id="10" name="Rounded Rectangle 9"/>
+          <p:cNvSpPr/>
+          <p:nvPr/>
+        </p:nvSpPr>
+        <p:spPr>
+          <a:xfrm>
+            <a:off x="1234440" y="2468880"/>
+            <a:ext cx="1783080" cy="1097280"/>
+          </a:xfrm>
+          <a:prstGeom prst="roundRect">
+            <a:avLst/>
+          </a:prstGeom>
+          <a:solidFill>
+            <a:srgbClr val="D6E5E1"/>
+          </a:solidFill>
+          <a:ln w="9525">
+            <a:solidFill>
+              <a:srgbClr val="B7C1C8"/>
+            </a:solidFill>
+          </a:ln>
+          <a:effectLst/>
+        </p:spPr>
+        <p:style>
+          <a:lnRef idx="1">
+            <a:schemeClr val="accent1"/>
+          </a:lnRef>
+          <a:fillRef idx="3">
+            <a:schemeClr val="accent1"/>
+          </a:fillRef>
+          <a:effectRef idx="2">
+            <a:schemeClr val="accent1"/>
+          </a:effectRef>
+          <a:fontRef idx="minor">
+            <a:schemeClr val="lt1"/>
+          </a:fontRef>
+        </p:style>
+        <p:txBody>
+          <a:bodyPr rtlCol="0" anchor="ctr"/>
+          <a:lstStyle/>
+          <a:p/>
+        </p:txBody>
+      </p:sp>
+      <p:sp>
+        <p:nvSpPr>
+          <p:cNvPr id="11" name="TextBox 10"/>
+          <p:cNvSpPr txBox="1"/>
+          <p:nvPr/>
+        </p:nvSpPr>
+        <p:spPr>
+          <a:xfrm>
+            <a:off x="1344168" y="2615184"/>
+            <a:ext cx="1563624" cy="804672"/>
+          </a:xfrm>
+          <a:prstGeom prst="rect">
+            <a:avLst/>
+          </a:prstGeom>
+          <a:noFill/>
+        </p:spPr>
+        <p:txBody>
+          <a:bodyPr wrap="square" anchor="ctr" lIns="0" rIns="0" tIns="0" bIns="0">
+            <a:spAutoFit/>
+          </a:bodyPr>
+          <a:lstStyle/>
+          <a:p>
+            <a:pPr algn="ctr">
+              <a:lnSpc>
+                <a:spcPct val="115000"/>
+              </a:lnSpc>
+            </a:pPr>
+            <a:r>
+              <a:rPr sz="1600">
+                <a:solidFill>
+                  <a:srgbClr val="2F4E48"/>
+                </a:solidFill>
+                <a:latin typeface="Arial"/>
+                <a:ea typeface="黑体"/>
+                <a:cs typeface="黑体"/>
+              </a:rPr>
+              <a:t>节点一</a:t>
+            </a:r>
+            <a:r>
+              <a:rPr sz="1600">
+                <a:solidFill>
+                  <a:srgbClr val="000000"/>
+                </a:solidFill>
+                <a:latin typeface="Times New Roman"/>
+                <a:ea typeface="宋体"/>
+                <a:cs typeface="宋体"/>
+              </a:rPr>
+              <a:t>
+说明占位</a:t>
+            </a:r>
+          </a:p>
+        </p:txBody>
+      </p:sp>
+      <p:sp>
+        <p:nvSpPr>
+          <p:cNvPr id="12" name="Rounded Rectangle 11"/>
+          <p:cNvSpPr/>
+          <p:nvPr/>
+        </p:nvSpPr>
+        <p:spPr>
+          <a:xfrm>
+            <a:off x="9189720" y="2468880"/>
+            <a:ext cx="1783080" cy="1097280"/>
+          </a:xfrm>
+          <a:prstGeom prst="roundRect">
+            <a:avLst/>
+          </a:prstGeom>
+          <a:solidFill>
+            <a:srgbClr val="D6E5E1"/>
+          </a:solidFill>
+          <a:ln w="9525">
+            <a:solidFill>
+              <a:srgbClr val="B7C1C8"/>
+            </a:solidFill>
+          </a:ln>
+          <a:effectLst/>
+        </p:spPr>
+        <p:style>
+          <a:lnRef idx="1">
+            <a:schemeClr val="accent1"/>
+          </a:lnRef>
+          <a:fillRef idx="3">
+            <a:schemeClr val="accent1"/>
+          </a:fillRef>
+          <a:effectRef idx="2">
+            <a:schemeClr val="accent1"/>
+          </a:effectRef>
+          <a:fontRef idx="minor">
+            <a:schemeClr val="lt1"/>
+          </a:fontRef>
+        </p:style>
+        <p:txBody>
+          <a:bodyPr rtlCol="0" anchor="ctr"/>
+          <a:lstStyle/>
+          <a:p/>
+        </p:txBody>
+      </p:sp>
+      <p:sp>
+        <p:nvSpPr>
+          <p:cNvPr id="13" name="TextBox 12"/>
+          <p:cNvSpPr txBox="1"/>
+          <p:nvPr/>
+        </p:nvSpPr>
+        <p:spPr>
+          <a:xfrm>
+            <a:off x="9299448" y="2615184"/>
+            <a:ext cx="1563624" cy="804672"/>
+          </a:xfrm>
+          <a:prstGeom prst="rect">
+            <a:avLst/>
+          </a:prstGeom>
+          <a:noFill/>
+        </p:spPr>
+        <p:txBody>
+          <a:bodyPr wrap="square" anchor="ctr" lIns="0" rIns="0" tIns="0" bIns="0">
+            <a:spAutoFit/>
+          </a:bodyPr>
+          <a:lstStyle/>
+          <a:p>
+            <a:pPr algn="ctr">
+              <a:lnSpc>
+                <a:spcPct val="115000"/>
+              </a:lnSpc>
+            </a:pPr>
+            <a:r>
+              <a:rPr sz="1600">
+                <a:solidFill>
+                  <a:srgbClr val="2F4E48"/>
+                </a:solidFill>
+                <a:latin typeface="Arial"/>
+                <a:ea typeface="黑体"/>
+                <a:cs typeface="黑体"/>
+              </a:rPr>
+              <a:t>节点二</a:t>
+            </a:r>
+            <a:r>
+              <a:rPr sz="1600">
+                <a:solidFill>
+                  <a:srgbClr val="000000"/>
+                </a:solidFill>
+                <a:latin typeface="Times New Roman"/>
+                <a:ea typeface="宋体"/>
+                <a:cs typeface="宋体"/>
+              </a:rPr>
+              <a:t>
+说明占位</a:t>
+            </a:r>
+          </a:p>
+        </p:txBody>
+      </p:sp>
+      <p:sp>
+        <p:nvSpPr>
+          <p:cNvPr id="14" name="Rounded Rectangle 13"/>
+          <p:cNvSpPr/>
+          <p:nvPr/>
+        </p:nvSpPr>
+        <p:spPr>
+          <a:xfrm>
+            <a:off x="1234440" y="4297680"/>
+            <a:ext cx="1783080" cy="1097280"/>
+          </a:xfrm>
+          <a:prstGeom prst="roundRect">
+            <a:avLst/>
+          </a:prstGeom>
+          <a:solidFill>
+            <a:srgbClr val="D6E5E1"/>
+          </a:solidFill>
+          <a:ln w="9525">
+            <a:solidFill>
+              <a:srgbClr val="B7C1C8"/>
+            </a:solidFill>
+          </a:ln>
+          <a:effectLst/>
+        </p:spPr>
+        <p:style>
+          <a:lnRef idx="1">
+            <a:schemeClr val="accent1"/>
+          </a:lnRef>
+          <a:fillRef idx="3">
+            <a:schemeClr val="accent1"/>
+          </a:fillRef>
+          <a:effectRef idx="2">
+            <a:schemeClr val="accent1"/>
+          </a:effectRef>
+          <a:fontRef idx="minor">
+            <a:schemeClr val="lt1"/>
+          </a:fontRef>
+        </p:style>
+        <p:txBody>
+          <a:bodyPr rtlCol="0" anchor="ctr"/>
+          <a:lstStyle/>
+          <a:p/>
+        </p:txBody>
+      </p:sp>
+      <p:sp>
+        <p:nvSpPr>
+          <p:cNvPr id="15" name="TextBox 14"/>
+          <p:cNvSpPr txBox="1"/>
+          <p:nvPr/>
+        </p:nvSpPr>
+        <p:spPr>
+          <a:xfrm>
+            <a:off x="1344168" y="4443984"/>
+            <a:ext cx="1563624" cy="804672"/>
+          </a:xfrm>
+          <a:prstGeom prst="rect">
+            <a:avLst/>
+          </a:prstGeom>
+          <a:noFill/>
+        </p:spPr>
+        <p:txBody>
+          <a:bodyPr wrap="square" anchor="ctr" lIns="0" rIns="0" tIns="0" bIns="0">
+            <a:spAutoFit/>
+          </a:bodyPr>
+          <a:lstStyle/>
+          <a:p>
+            <a:pPr algn="ctr">
+              <a:lnSpc>
+                <a:spcPct val="115000"/>
+              </a:lnSpc>
+            </a:pPr>
+            <a:r>
+              <a:rPr sz="1600">
+                <a:solidFill>
+                  <a:srgbClr val="2F4E48"/>
+                </a:solidFill>
+                <a:latin typeface="Arial"/>
+                <a:ea typeface="黑体"/>
+                <a:cs typeface="黑体"/>
+              </a:rPr>
+              <a:t>节点三</a:t>
+            </a:r>
+            <a:r>
+              <a:rPr sz="1600">
+                <a:solidFill>
+                  <a:srgbClr val="000000"/>
+                </a:solidFill>
+                <a:latin typeface="Times New Roman"/>
+                <a:ea typeface="宋体"/>
+                <a:cs typeface="宋体"/>
+              </a:rPr>
+              <a:t>
+说明占位</a:t>
+            </a:r>
+          </a:p>
+        </p:txBody>
+      </p:sp>
+      <p:sp>
+        <p:nvSpPr>
+          <p:cNvPr id="16" name="Rounded Rectangle 15"/>
+          <p:cNvSpPr/>
+          <p:nvPr/>
+        </p:nvSpPr>
+        <p:spPr>
+          <a:xfrm>
+            <a:off x="9189720" y="4297680"/>
+            <a:ext cx="1783080" cy="1097280"/>
+          </a:xfrm>
+          <a:prstGeom prst="roundRect">
+            <a:avLst/>
+          </a:prstGeom>
+          <a:solidFill>
+            <a:srgbClr val="D6E5E1"/>
+          </a:solidFill>
+          <a:ln w="9525">
+            <a:solidFill>
+              <a:srgbClr val="B7C1C8"/>
+            </a:solidFill>
+          </a:ln>
+          <a:effectLst/>
+        </p:spPr>
+        <p:style>
+          <a:lnRef idx="1">
+            <a:schemeClr val="accent1"/>
+          </a:lnRef>
+          <a:fillRef idx="3">
+            <a:schemeClr val="accent1"/>
+          </a:fillRef>
+          <a:effectRef idx="2">
+            <a:schemeClr val="accent1"/>
+          </a:effectRef>
+          <a:fontRef idx="minor">
+            <a:schemeClr val="lt1"/>
+          </a:fontRef>
+        </p:style>
+        <p:txBody>
+          <a:bodyPr rtlCol="0" anchor="ctr"/>
+          <a:lstStyle/>
+          <a:p/>
+        </p:txBody>
+      </p:sp>
+      <p:sp>
+        <p:nvSpPr>
+          <p:cNvPr id="17" name="TextBox 16"/>
+          <p:cNvSpPr txBox="1"/>
+          <p:nvPr/>
+        </p:nvSpPr>
+        <p:spPr>
+          <a:xfrm>
+            <a:off x="9299448" y="4443984"/>
+            <a:ext cx="1563624" cy="804672"/>
+          </a:xfrm>
+          <a:prstGeom prst="rect">
+            <a:avLst/>
+          </a:prstGeom>
+          <a:noFill/>
+        </p:spPr>
+        <p:txBody>
+          <a:bodyPr wrap="square" anchor="ctr" lIns="0" rIns="0" tIns="0" bIns="0">
+            <a:spAutoFit/>
+          </a:bodyPr>
+          <a:lstStyle/>
+          <a:p>
+            <a:pPr algn="ctr">
+              <a:lnSpc>
+                <a:spcPct val="115000"/>
+              </a:lnSpc>
+            </a:pPr>
+            <a:r>
+              <a:rPr sz="1600">
+                <a:solidFill>
+                  <a:srgbClr val="2F4E48"/>
+                </a:solidFill>
+                <a:latin typeface="Arial"/>
+                <a:ea typeface="黑体"/>
+                <a:cs typeface="黑体"/>
+              </a:rPr>
+              <a:t>节点四</a:t>
+            </a:r>
+            <a:r>
+              <a:rPr sz="1600">
+                <a:solidFill>
+                  <a:srgbClr val="000000"/>
+                </a:solidFill>
+                <a:latin typeface="Times New Roman"/>
+                <a:ea typeface="宋体"/>
+                <a:cs typeface="宋体"/>
+              </a:rPr>
+              <a:t>
+说明占位</a:t>
+            </a:r>
+          </a:p>
+        </p:txBody>
+      </p:sp>
+      <p:sp>
+        <p:nvSpPr>
+          <p:cNvPr id="18" name="TextBox 17"/>
+          <p:cNvSpPr txBox="1"/>
+          <p:nvPr/>
+        </p:nvSpPr>
+        <p:spPr>
+          <a:xfrm>
+            <a:off x="502920" y="5943600"/>
+            <a:ext cx="11850624" cy="530352"/>
+          </a:xfrm>
+          <a:prstGeom prst="rect">
+            <a:avLst/>
+          </a:prstGeom>
+          <a:noFill/>
+        </p:spPr>
+        <p:txBody>
+          <a:bodyPr wrap="square" anchor="ctr" lIns="0" rIns="0" tIns="0" bIns="0">
+            <a:spAutoFit/>
+          </a:bodyPr>
+          <a:lstStyle/>
+          <a:p>
+            <a:pPr algn="l">
+              <a:lnSpc>
+                <a:spcPct val="120000"/>
+              </a:lnSpc>
+            </a:pPr>
+            <a:r>
+              <a:rPr sz="1800">
+                <a:solidFill>
+                  <a:srgbClr val="000000"/>
+                </a:solidFill>
+                <a:latin typeface="Times New Roman"/>
+                <a:ea typeface="宋体"/>
+                <a:cs typeface="宋体"/>
+              </a:rPr>
+              <a:t>判断占位：闭环的关键是回到起点时标准变了，而不是把四步原样转一圈。</a:t>
+            </a:r>
+          </a:p>
+        </p:txBody>
+      </p:sp>
+    </p:spTree>
+  </p:cSld>
+  <p:clrMapOvr>
+    <a:masterClrMapping/>
+  </p:clrMapOvr>
+</p:sld>
+</file>
+
+<file path=ppt/slides/slide9.xml><?xml version="1.0" encoding="utf-8"?>
+<p:sld xmlns:a="http://schemas.openxmlformats.org/drawingml/2006/main" xmlns:p="http://schemas.openxmlformats.org/presentationml/2006/main" xmlns:r="http://schemas.openxmlformats.org/officeDocument/2006/relationships">
+  <p:cSld>
+    <p:spTree>
+      <p:nvGrpSpPr>
+        <p:cNvPr id="1" name=""/>
+        <p:cNvGrpSpPr/>
+        <p:nvPr/>
+      </p:nvGrpSpPr>
+      <p:grpSpPr/>
+      <p:sp>
+        <p:nvSpPr>
+          <p:cNvPr id="2" name="TextBox 1"/>
+          <p:cNvSpPr txBox="1"/>
+          <p:nvPr/>
+        </p:nvSpPr>
+        <p:spPr>
+          <a:xfrm>
+            <a:off x="502920" y="219456"/>
+            <a:ext cx="11850624" cy="310896"/>
+          </a:xfrm>
+          <a:prstGeom prst="rect">
+            <a:avLst/>
+          </a:prstGeom>
+          <a:noFill/>
+        </p:spPr>
+        <p:txBody>
+          <a:bodyPr wrap="square" anchor="t" lIns="0" rIns="0" tIns="0" bIns="0">
+            <a:spAutoFit/>
+          </a:bodyPr>
+          <a:lstStyle/>
+          <a:p>
+            <a:pPr algn="r">
+              <a:lnSpc>
+                <a:spcPct val="100000"/>
+              </a:lnSpc>
+            </a:pPr>
+            <a:r>
+              <a:rPr sz="1600">
+                <a:solidFill>
+                  <a:srgbClr val="000000"/>
+                </a:solidFill>
+                <a:latin typeface="Times New Roman"/>
+                <a:ea typeface="宋体"/>
+                <a:cs typeface="宋体"/>
+              </a:rPr>
+              <a:t>示例 · 纯文字观点页</a:t>
+            </a:r>
+          </a:p>
+        </p:txBody>
+      </p:sp>
+      <p:sp>
+        <p:nvSpPr>
+          <p:cNvPr id="3" name="Rectangle 2"/>
+          <p:cNvSpPr/>
+          <p:nvPr/>
+        </p:nvSpPr>
+        <p:spPr>
+          <a:xfrm>
+            <a:off x="502920" y="1737360"/>
+            <a:ext cx="41148" cy="2377440"/>
+          </a:xfrm>
+          <a:prstGeom prst="rect">
+            <a:avLst/>
+          </a:prstGeom>
+          <a:solidFill>
+            <a:srgbClr val="8C5A16"/>
+          </a:solidFill>
+          <a:ln>
+            <a:noFill/>
+          </a:ln>
+          <a:effectLst/>
+        </p:spPr>
+        <p:style>
+          <a:lnRef idx="1">
+            <a:schemeClr val="accent1"/>
+          </a:lnRef>
+          <a:fillRef idx="3">
+            <a:schemeClr val="accent1"/>
+          </a:fillRef>
+          <a:effectRef idx="2">
+            <a:schemeClr val="accent1"/>
+          </a:effectRef>
+          <a:fontRef idx="minor">
+            <a:schemeClr val="lt1"/>
+          </a:fontRef>
+        </p:style>
+        <p:txBody>
+          <a:bodyPr rtlCol="0" anchor="ctr"/>
+          <a:lstStyle/>
+          <a:p/>
+        </p:txBody>
+      </p:sp>
+      <p:sp>
+        <p:nvSpPr>
+          <p:cNvPr id="4" name="TextBox 3"/>
+          <p:cNvSpPr txBox="1"/>
+          <p:nvPr/>
+        </p:nvSpPr>
+        <p:spPr>
+          <a:xfrm>
+            <a:off x="868680" y="1783080"/>
+            <a:ext cx="11155680" cy="1280160"/>
+          </a:xfrm>
+          <a:prstGeom prst="rect">
+            <a:avLst/>
+          </a:prstGeom>
+          <a:noFill/>
+        </p:spPr>
+        <p:txBody>
+          <a:bodyPr wrap="square" anchor="t" lIns="0" rIns="0" tIns="0" bIns="0">
+            <a:spAutoFit/>
+          </a:bodyPr>
+          <a:lstStyle/>
+          <a:p>
+            <a:pPr algn="l">
+              <a:lnSpc>
+                <a:spcPct val="110000"/>
+              </a:lnSpc>
+            </a:pPr>
+            <a:r>
+              <a:rPr sz="3600">
+                <a:solidFill>
+                  <a:srgbClr val="283E4E"/>
+                </a:solidFill>
+                <a:latin typeface="Arial"/>
+                <a:ea typeface="黑体"/>
+                <a:cs typeface="黑体"/>
+              </a:rPr>
+              <a:t>宁可没有，不能乱加。</a:t>
+            </a:r>
+          </a:p>
+        </p:txBody>
+      </p:sp>
+      <p:sp>
+        <p:nvSpPr>
+          <p:cNvPr id="5" name="TextBox 4"/>
+          <p:cNvSpPr txBox="1"/>
+          <p:nvPr/>
+        </p:nvSpPr>
+        <p:spPr>
+          <a:xfrm>
+            <a:off x="868680" y="3246120"/>
+            <a:ext cx="11155680" cy="914400"/>
+          </a:xfrm>
+          <a:prstGeom prst="rect">
+            <a:avLst/>
+          </a:prstGeom>
+          <a:noFill/>
+        </p:spPr>
+        <p:txBody>
+          <a:bodyPr wrap="square" anchor="t" lIns="0" rIns="0" tIns="0" bIns="0">
+            <a:spAutoFit/>
+          </a:bodyPr>
+          <a:lstStyle/>
+          <a:p>
+            <a:pPr algn="l">
+              <a:lnSpc>
+                <a:spcPct val="125000"/>
+              </a:lnSpc>
+            </a:pPr>
+            <a:r>
+              <a:rPr sz="2000">
+                <a:solidFill>
+                  <a:srgbClr val="000000"/>
+                </a:solidFill>
+                <a:latin typeface="Times New Roman"/>
+                <a:ea typeface="楷体"/>
+                <a:cs typeface="楷体"/>
+              </a:rPr>
+              <a:t>纯文字页允许存在，但必须有字号层级、留白和对齐结构，不能是一大段文字居中堆着。这一页用 36pt 主句、20pt 次级句和 16pt 小字建立三级层次，靠留白承担视觉任务。</a:t>
+            </a:r>
+          </a:p>
+        </p:txBody>
+      </p:sp>
+      <p:sp>
+        <p:nvSpPr>
+          <p:cNvPr id="6" name="TextBox 5"/>
+          <p:cNvSpPr txBox="1"/>
+          <p:nvPr/>
+        </p:nvSpPr>
+        <p:spPr>
+          <a:xfrm>
+            <a:off x="868680" y="4389120"/>
+            <a:ext cx="11155680" cy="402336"/>
+          </a:xfrm>
+          <a:prstGeom prst="rect">
+            <a:avLst/>
+          </a:prstGeom>
+          <a:noFill/>
+        </p:spPr>
+        <p:txBody>
+          <a:bodyPr wrap="square" anchor="t" lIns="0" rIns="0" tIns="0" bIns="0">
+            <a:spAutoFit/>
+          </a:bodyPr>
+          <a:lstStyle/>
+          <a:p>
+            <a:pPr algn="l">
+              <a:lnSpc>
+                <a:spcPct val="100000"/>
+              </a:lnSpc>
+            </a:pPr>
+            <a:r>
+              <a:rPr sz="1600">
+                <a:solidFill>
+                  <a:srgbClr val="4A6577"/>
+                </a:solidFill>
+                <a:latin typeface="Times New Roman"/>
+                <a:ea typeface="宋体"/>
+                <a:cs typeface="宋体"/>
+              </a:rPr>
+              <a:t>整套演示里纯文字页建议不超过两成；只有核心观点、引用、转折和结尾适合这样处理。</a:t>
             </a:r>
           </a:p>
         </p:txBody>
